--- a/documentos/Banner_FECAP_CCOMP3_ESC.pptx
+++ b/documentos/Banner_FECAP_CCOMP3_ESC.pptx
@@ -10,7 +10,7 @@
   <p:sldIdLst>
     <p:sldId id="256" r:id="rId6"/>
   </p:sldIdLst>
-  <p:sldSz cy="43200000" cx="28800000"/>
+  <p:sldSz cy="43200625" cx="28800425"/>
   <p:notesSz cx="6858000" cy="9144000"/>
   <p:embeddedFontLst>
     <p:embeddedFont>
@@ -273,7 +273,7 @@
       </p15:sldGuideLst>
     </p:ext>
     <p:ext uri="GoogleSlidesCustomDataVersion2">
-      <go:slidesCustomData xmlns:go="http://customooxmlschemas.google.com/" r:id="rId15" roundtripDataSignature="AMtx7mjf0usFWD5G9003LM6/9WjtB9Lalg=="/>
+      <go:slidesCustomData xmlns:go="http://customooxmlschemas.google.com/" r:id="rId15" roundtripDataSignature="AMtx7miRCsidAqZ+Ihax+ikNHSFbyrocvw=="/>
     </p:ext>
   </p:extLst>
 </p:presentation>
@@ -306,8 +306,8 @@
         </p:nvSpPr>
         <p:spPr>
           <a:xfrm>
-            <a:off x="1143226" y="685800"/>
-            <a:ext cx="4572300" cy="3429000"/>
+            <a:off x="1143225" y="685800"/>
+            <a:ext cx="4572225" cy="3429000"/>
           </a:xfrm>
           <a:custGeom>
             <a:rect b="b" l="l" r="r" t="t"/>
@@ -914,8 +914,8 @@
         </p:nvSpPr>
         <p:spPr>
           <a:xfrm>
-            <a:off x="1143226" y="685800"/>
-            <a:ext cx="4572300" cy="3429000"/>
+            <a:off x="1143225" y="685800"/>
+            <a:ext cx="4572225" cy="3429000"/>
           </a:xfrm>
           <a:custGeom>
             <a:rect b="b" l="l" r="r" t="t"/>
@@ -984,8 +984,8 @@
         </p:nvSpPr>
         <p:spPr>
           <a:xfrm>
-            <a:off x="871261" y="12847063"/>
-            <a:ext cx="4065900" cy="738000"/>
+            <a:off x="871274" y="12847249"/>
+            <a:ext cx="4065942" cy="737979"/>
           </a:xfrm>
           <a:prstGeom prst="rect">
             <a:avLst/>
@@ -1012,7 +1012,7 @@
               </a:spcAft>
               <a:buSzPts val="1400"/>
               <a:buNone/>
-              <a:defRPr sz="2287"/>
+              <a:defRPr/>
             </a:lvl1pPr>
             <a:lvl2pPr lvl="1" algn="l">
               <a:lnSpc>
@@ -1026,7 +1026,7 @@
               </a:spcAft>
               <a:buSzPts val="1400"/>
               <a:buNone/>
-              <a:defRPr sz="3552"/>
+              <a:defRPr/>
             </a:lvl2pPr>
             <a:lvl3pPr lvl="2" algn="l">
               <a:lnSpc>
@@ -1040,7 +1040,7 @@
               </a:spcAft>
               <a:buSzPts val="1400"/>
               <a:buNone/>
-              <a:defRPr sz="3552"/>
+              <a:defRPr/>
             </a:lvl3pPr>
             <a:lvl4pPr lvl="3" algn="l">
               <a:lnSpc>
@@ -1054,7 +1054,7 @@
               </a:spcAft>
               <a:buSzPts val="1400"/>
               <a:buNone/>
-              <a:defRPr sz="3552"/>
+              <a:defRPr/>
             </a:lvl4pPr>
             <a:lvl5pPr lvl="4" algn="l">
               <a:lnSpc>
@@ -1068,7 +1068,7 @@
               </a:spcAft>
               <a:buSzPts val="1400"/>
               <a:buNone/>
-              <a:defRPr sz="3552"/>
+              <a:defRPr/>
             </a:lvl5pPr>
             <a:lvl6pPr lvl="5" algn="l">
               <a:lnSpc>
@@ -1082,7 +1082,7 @@
               </a:spcAft>
               <a:buSzPts val="1400"/>
               <a:buNone/>
-              <a:defRPr sz="3552"/>
+              <a:defRPr/>
             </a:lvl6pPr>
             <a:lvl7pPr lvl="6" algn="l">
               <a:lnSpc>
@@ -1096,7 +1096,7 @@
               </a:spcAft>
               <a:buSzPts val="1400"/>
               <a:buNone/>
-              <a:defRPr sz="3552"/>
+              <a:defRPr/>
             </a:lvl7pPr>
             <a:lvl8pPr lvl="7" algn="l">
               <a:lnSpc>
@@ -1110,7 +1110,7 @@
               </a:spcAft>
               <a:buSzPts val="1400"/>
               <a:buNone/>
-              <a:defRPr sz="3552"/>
+              <a:defRPr/>
             </a:lvl8pPr>
             <a:lvl9pPr lvl="8" algn="l">
               <a:lnSpc>
@@ -1124,7 +1124,7 @@
               </a:spcAft>
               <a:buSzPts val="1400"/>
               <a:buNone/>
-              <a:defRPr sz="3552"/>
+              <a:defRPr/>
             </a:lvl9pPr>
           </a:lstStyle>
           <a:p/>
@@ -1140,8 +1140,8 @@
         </p:nvSpPr>
         <p:spPr>
           <a:xfrm>
-            <a:off x="5953613" y="12847063"/>
-            <a:ext cx="5517900" cy="738000"/>
+            <a:off x="5953701" y="12847249"/>
+            <a:ext cx="5518065" cy="737979"/>
           </a:xfrm>
           <a:prstGeom prst="rect">
             <a:avLst/>
@@ -1168,7 +1168,7 @@
               </a:spcAft>
               <a:buSzPts val="1400"/>
               <a:buNone/>
-              <a:defRPr sz="2287"/>
+              <a:defRPr/>
             </a:lvl1pPr>
             <a:lvl2pPr lvl="1" algn="l">
               <a:lnSpc>
@@ -1182,7 +1182,7 @@
               </a:spcAft>
               <a:buSzPts val="1400"/>
               <a:buNone/>
-              <a:defRPr sz="3552"/>
+              <a:defRPr/>
             </a:lvl2pPr>
             <a:lvl3pPr lvl="2" algn="l">
               <a:lnSpc>
@@ -1196,7 +1196,7 @@
               </a:spcAft>
               <a:buSzPts val="1400"/>
               <a:buNone/>
-              <a:defRPr sz="3552"/>
+              <a:defRPr/>
             </a:lvl3pPr>
             <a:lvl4pPr lvl="3" algn="l">
               <a:lnSpc>
@@ -1210,7 +1210,7 @@
               </a:spcAft>
               <a:buSzPts val="1400"/>
               <a:buNone/>
-              <a:defRPr sz="3552"/>
+              <a:defRPr/>
             </a:lvl4pPr>
             <a:lvl5pPr lvl="4" algn="l">
               <a:lnSpc>
@@ -1224,7 +1224,7 @@
               </a:spcAft>
               <a:buSzPts val="1400"/>
               <a:buNone/>
-              <a:defRPr sz="3552"/>
+              <a:defRPr/>
             </a:lvl5pPr>
             <a:lvl6pPr lvl="5" algn="l">
               <a:lnSpc>
@@ -1238,7 +1238,7 @@
               </a:spcAft>
               <a:buSzPts val="1400"/>
               <a:buNone/>
-              <a:defRPr sz="3552"/>
+              <a:defRPr/>
             </a:lvl6pPr>
             <a:lvl7pPr lvl="6" algn="l">
               <a:lnSpc>
@@ -1252,7 +1252,7 @@
               </a:spcAft>
               <a:buSzPts val="1400"/>
               <a:buNone/>
-              <a:defRPr sz="3552"/>
+              <a:defRPr/>
             </a:lvl7pPr>
             <a:lvl8pPr lvl="7" algn="l">
               <a:lnSpc>
@@ -1266,7 +1266,7 @@
               </a:spcAft>
               <a:buSzPts val="1400"/>
               <a:buNone/>
-              <a:defRPr sz="3552"/>
+              <a:defRPr/>
             </a:lvl8pPr>
             <a:lvl9pPr lvl="8" algn="l">
               <a:lnSpc>
@@ -1280,7 +1280,7 @@
               </a:spcAft>
               <a:buSzPts val="1400"/>
               <a:buNone/>
-              <a:defRPr sz="3552"/>
+              <a:defRPr/>
             </a:lvl9pPr>
           </a:lstStyle>
           <a:p/>
@@ -1296,8 +1296,8 @@
         </p:nvSpPr>
         <p:spPr>
           <a:xfrm>
-            <a:off x="12488068" y="12847063"/>
-            <a:ext cx="4065900" cy="738000"/>
+            <a:off x="12488252" y="12847249"/>
+            <a:ext cx="4065942" cy="737979"/>
           </a:xfrm>
           <a:prstGeom prst="rect">
             <a:avLst/>
@@ -1600,8 +1600,8 @@
         </p:nvSpPr>
         <p:spPr>
           <a:xfrm>
-            <a:off x="871260" y="555081"/>
-            <a:ext cx="15682800" cy="2310000"/>
+            <a:off x="871273" y="555089"/>
+            <a:ext cx="15682921" cy="2310195"/>
           </a:xfrm>
           <a:prstGeom prst="rect">
             <a:avLst/>
@@ -1631,7 +1631,7 @@
               </a:buClr>
               <a:buSzPts val="1800"/>
               <a:buNone/>
-              <a:defRPr sz="8385"/>
+              <a:defRPr/>
             </a:lvl1pPr>
             <a:lvl2pPr lvl="1" algn="l">
               <a:lnSpc>
@@ -1645,7 +1645,7 @@
               </a:spcAft>
               <a:buSzPts val="1400"/>
               <a:buNone/>
-              <a:defRPr sz="1800"/>
+              <a:defRPr/>
             </a:lvl2pPr>
             <a:lvl3pPr lvl="2" algn="l">
               <a:lnSpc>
@@ -1659,7 +1659,7 @@
               </a:spcAft>
               <a:buSzPts val="1400"/>
               <a:buNone/>
-              <a:defRPr sz="1800"/>
+              <a:defRPr/>
             </a:lvl3pPr>
             <a:lvl4pPr lvl="3" algn="l">
               <a:lnSpc>
@@ -1673,7 +1673,7 @@
               </a:spcAft>
               <a:buSzPts val="1400"/>
               <a:buNone/>
-              <a:defRPr sz="1800"/>
+              <a:defRPr/>
             </a:lvl4pPr>
             <a:lvl5pPr lvl="4" algn="l">
               <a:lnSpc>
@@ -1687,7 +1687,7 @@
               </a:spcAft>
               <a:buSzPts val="1400"/>
               <a:buNone/>
-              <a:defRPr sz="1800"/>
+              <a:defRPr/>
             </a:lvl5pPr>
             <a:lvl6pPr lvl="5" algn="l">
               <a:lnSpc>
@@ -1701,7 +1701,7 @@
               </a:spcAft>
               <a:buSzPts val="1400"/>
               <a:buNone/>
-              <a:defRPr sz="1800"/>
+              <a:defRPr/>
             </a:lvl6pPr>
             <a:lvl7pPr lvl="6" algn="l">
               <a:lnSpc>
@@ -1715,7 +1715,7 @@
               </a:spcAft>
               <a:buSzPts val="1400"/>
               <a:buNone/>
-              <a:defRPr sz="1800"/>
+              <a:defRPr/>
             </a:lvl7pPr>
             <a:lvl8pPr lvl="7" algn="l">
               <a:lnSpc>
@@ -1729,7 +1729,7 @@
               </a:spcAft>
               <a:buSzPts val="1400"/>
               <a:buNone/>
-              <a:defRPr sz="1800"/>
+              <a:defRPr/>
             </a:lvl8pPr>
             <a:lvl9pPr lvl="8" algn="l">
               <a:lnSpc>
@@ -1743,7 +1743,7 @@
               </a:spcAft>
               <a:buSzPts val="1400"/>
               <a:buNone/>
-              <a:defRPr sz="1800"/>
+              <a:defRPr/>
             </a:lvl9pPr>
           </a:lstStyle>
           <a:p/>
@@ -1759,8 +1759,8 @@
         </p:nvSpPr>
         <p:spPr>
           <a:xfrm rot="5400000">
-            <a:off x="4138750" y="-33373"/>
-            <a:ext cx="9147600" cy="15682800"/>
+            <a:off x="4138869" y="-33322"/>
+            <a:ext cx="9147730" cy="15682921"/>
           </a:xfrm>
           <a:prstGeom prst="rect">
             <a:avLst/>
@@ -1775,7 +1775,7 @@
             <a:normAutofit/>
           </a:bodyPr>
           <a:lstStyle>
-            <a:lvl1pPr indent="-342898" lvl="0" marL="457200" algn="l">
+            <a:lvl1pPr indent="-342900" lvl="0" marL="457200" algn="l">
               <a:lnSpc>
                 <a:spcPct val="100000"/>
               </a:lnSpc>
@@ -1790,9 +1790,9 @@
               </a:buClr>
               <a:buSzPts val="1800"/>
               <a:buChar char="•"/>
-              <a:defRPr sz="6098"/>
+              <a:defRPr/>
             </a:lvl1pPr>
-            <a:lvl2pPr indent="-342898" lvl="1" marL="914400" algn="l">
+            <a:lvl2pPr indent="-342900" lvl="1" marL="914400" algn="l">
               <a:lnSpc>
                 <a:spcPct val="100000"/>
               </a:lnSpc>
@@ -1807,9 +1807,9 @@
               </a:buClr>
               <a:buSzPts val="1800"/>
               <a:buChar char="–"/>
-              <a:defRPr sz="5336"/>
+              <a:defRPr/>
             </a:lvl2pPr>
-            <a:lvl3pPr indent="-342898" lvl="2" marL="1371600" algn="l">
+            <a:lvl3pPr indent="-342900" lvl="2" marL="1371600" algn="l">
               <a:lnSpc>
                 <a:spcPct val="100000"/>
               </a:lnSpc>
@@ -1824,9 +1824,9 @@
               </a:buClr>
               <a:buSzPts val="1800"/>
               <a:buChar char="•"/>
-              <a:defRPr sz="4574"/>
+              <a:defRPr/>
             </a:lvl3pPr>
-            <a:lvl4pPr indent="-342898" lvl="3" marL="1828800" algn="l">
+            <a:lvl4pPr indent="-342900" lvl="3" marL="1828800" algn="l">
               <a:lnSpc>
                 <a:spcPct val="100000"/>
               </a:lnSpc>
@@ -1841,9 +1841,9 @@
               </a:buClr>
               <a:buSzPts val="1800"/>
               <a:buChar char="–"/>
-              <a:defRPr sz="3811"/>
+              <a:defRPr/>
             </a:lvl4pPr>
-            <a:lvl5pPr indent="-342898" lvl="4" marL="2286000" algn="l">
+            <a:lvl5pPr indent="-342900" lvl="4" marL="2286000" algn="l">
               <a:lnSpc>
                 <a:spcPct val="100000"/>
               </a:lnSpc>
@@ -1858,9 +1858,9 @@
               </a:buClr>
               <a:buSzPts val="1800"/>
               <a:buChar char="»"/>
-              <a:defRPr sz="3811"/>
+              <a:defRPr/>
             </a:lvl5pPr>
-            <a:lvl6pPr indent="-342898" lvl="5" marL="2743200" algn="l">
+            <a:lvl6pPr indent="-342900" lvl="5" marL="2743200" algn="l">
               <a:lnSpc>
                 <a:spcPct val="100000"/>
               </a:lnSpc>
@@ -1875,9 +1875,9 @@
               </a:buClr>
               <a:buSzPts val="1800"/>
               <a:buChar char="•"/>
-              <a:defRPr sz="3811"/>
+              <a:defRPr/>
             </a:lvl6pPr>
-            <a:lvl7pPr indent="-342898" lvl="6" marL="3200400" algn="l">
+            <a:lvl7pPr indent="-342900" lvl="6" marL="3200400" algn="l">
               <a:lnSpc>
                 <a:spcPct val="100000"/>
               </a:lnSpc>
@@ -1892,9 +1892,9 @@
               </a:buClr>
               <a:buSzPts val="1800"/>
               <a:buChar char="•"/>
-              <a:defRPr sz="3811"/>
+              <a:defRPr/>
             </a:lvl7pPr>
-            <a:lvl8pPr indent="-342898" lvl="7" marL="3657600" algn="l">
+            <a:lvl8pPr indent="-342900" lvl="7" marL="3657600" algn="l">
               <a:lnSpc>
                 <a:spcPct val="100000"/>
               </a:lnSpc>
@@ -1909,9 +1909,9 @@
               </a:buClr>
               <a:buSzPts val="1800"/>
               <a:buChar char="•"/>
-              <a:defRPr sz="3811"/>
+              <a:defRPr/>
             </a:lvl8pPr>
-            <a:lvl9pPr indent="-342898" lvl="8" marL="4114800" algn="l">
+            <a:lvl9pPr indent="-342900" lvl="8" marL="4114800" algn="l">
               <a:lnSpc>
                 <a:spcPct val="100000"/>
               </a:lnSpc>
@@ -1926,7 +1926,7 @@
               </a:buClr>
               <a:buSzPts val="1800"/>
               <a:buChar char="•"/>
-              <a:defRPr sz="3811"/>
+              <a:defRPr/>
             </a:lvl9pPr>
           </a:lstStyle>
           <a:p/>
@@ -1942,8 +1942,8 @@
         </p:nvSpPr>
         <p:spPr>
           <a:xfrm>
-            <a:off x="871261" y="12847063"/>
-            <a:ext cx="4065900" cy="738000"/>
+            <a:off x="871274" y="12847249"/>
+            <a:ext cx="4065942" cy="737979"/>
           </a:xfrm>
           <a:prstGeom prst="rect">
             <a:avLst/>
@@ -1970,7 +1970,7 @@
               </a:spcAft>
               <a:buSzPts val="1400"/>
               <a:buNone/>
-              <a:defRPr sz="2287"/>
+              <a:defRPr/>
             </a:lvl1pPr>
             <a:lvl2pPr lvl="1" algn="l">
               <a:lnSpc>
@@ -1984,7 +1984,7 @@
               </a:spcAft>
               <a:buSzPts val="1400"/>
               <a:buNone/>
-              <a:defRPr sz="3552"/>
+              <a:defRPr/>
             </a:lvl2pPr>
             <a:lvl3pPr lvl="2" algn="l">
               <a:lnSpc>
@@ -1998,7 +1998,7 @@
               </a:spcAft>
               <a:buSzPts val="1400"/>
               <a:buNone/>
-              <a:defRPr sz="3552"/>
+              <a:defRPr/>
             </a:lvl3pPr>
             <a:lvl4pPr lvl="3" algn="l">
               <a:lnSpc>
@@ -2012,7 +2012,7 @@
               </a:spcAft>
               <a:buSzPts val="1400"/>
               <a:buNone/>
-              <a:defRPr sz="3552"/>
+              <a:defRPr/>
             </a:lvl4pPr>
             <a:lvl5pPr lvl="4" algn="l">
               <a:lnSpc>
@@ -2026,7 +2026,7 @@
               </a:spcAft>
               <a:buSzPts val="1400"/>
               <a:buNone/>
-              <a:defRPr sz="3552"/>
+              <a:defRPr/>
             </a:lvl5pPr>
             <a:lvl6pPr lvl="5" algn="l">
               <a:lnSpc>
@@ -2040,7 +2040,7 @@
               </a:spcAft>
               <a:buSzPts val="1400"/>
               <a:buNone/>
-              <a:defRPr sz="3552"/>
+              <a:defRPr/>
             </a:lvl6pPr>
             <a:lvl7pPr lvl="6" algn="l">
               <a:lnSpc>
@@ -2054,7 +2054,7 @@
               </a:spcAft>
               <a:buSzPts val="1400"/>
               <a:buNone/>
-              <a:defRPr sz="3552"/>
+              <a:defRPr/>
             </a:lvl7pPr>
             <a:lvl8pPr lvl="7" algn="l">
               <a:lnSpc>
@@ -2068,7 +2068,7 @@
               </a:spcAft>
               <a:buSzPts val="1400"/>
               <a:buNone/>
-              <a:defRPr sz="3552"/>
+              <a:defRPr/>
             </a:lvl8pPr>
             <a:lvl9pPr lvl="8" algn="l">
               <a:lnSpc>
@@ -2082,7 +2082,7 @@
               </a:spcAft>
               <a:buSzPts val="1400"/>
               <a:buNone/>
-              <a:defRPr sz="3552"/>
+              <a:defRPr/>
             </a:lvl9pPr>
           </a:lstStyle>
           <a:p/>
@@ -2098,8 +2098,8 @@
         </p:nvSpPr>
         <p:spPr>
           <a:xfrm>
-            <a:off x="5953613" y="12847063"/>
-            <a:ext cx="5517900" cy="738000"/>
+            <a:off x="5953701" y="12847249"/>
+            <a:ext cx="5518065" cy="737979"/>
           </a:xfrm>
           <a:prstGeom prst="rect">
             <a:avLst/>
@@ -2126,7 +2126,7 @@
               </a:spcAft>
               <a:buSzPts val="1400"/>
               <a:buNone/>
-              <a:defRPr sz="2287"/>
+              <a:defRPr/>
             </a:lvl1pPr>
             <a:lvl2pPr lvl="1" algn="l">
               <a:lnSpc>
@@ -2140,7 +2140,7 @@
               </a:spcAft>
               <a:buSzPts val="1400"/>
               <a:buNone/>
-              <a:defRPr sz="3552"/>
+              <a:defRPr/>
             </a:lvl2pPr>
             <a:lvl3pPr lvl="2" algn="l">
               <a:lnSpc>
@@ -2154,7 +2154,7 @@
               </a:spcAft>
               <a:buSzPts val="1400"/>
               <a:buNone/>
-              <a:defRPr sz="3552"/>
+              <a:defRPr/>
             </a:lvl3pPr>
             <a:lvl4pPr lvl="3" algn="l">
               <a:lnSpc>
@@ -2168,7 +2168,7 @@
               </a:spcAft>
               <a:buSzPts val="1400"/>
               <a:buNone/>
-              <a:defRPr sz="3552"/>
+              <a:defRPr/>
             </a:lvl4pPr>
             <a:lvl5pPr lvl="4" algn="l">
               <a:lnSpc>
@@ -2182,7 +2182,7 @@
               </a:spcAft>
               <a:buSzPts val="1400"/>
               <a:buNone/>
-              <a:defRPr sz="3552"/>
+              <a:defRPr/>
             </a:lvl5pPr>
             <a:lvl6pPr lvl="5" algn="l">
               <a:lnSpc>
@@ -2196,7 +2196,7 @@
               </a:spcAft>
               <a:buSzPts val="1400"/>
               <a:buNone/>
-              <a:defRPr sz="3552"/>
+              <a:defRPr/>
             </a:lvl6pPr>
             <a:lvl7pPr lvl="6" algn="l">
               <a:lnSpc>
@@ -2210,7 +2210,7 @@
               </a:spcAft>
               <a:buSzPts val="1400"/>
               <a:buNone/>
-              <a:defRPr sz="3552"/>
+              <a:defRPr/>
             </a:lvl7pPr>
             <a:lvl8pPr lvl="7" algn="l">
               <a:lnSpc>
@@ -2224,7 +2224,7 @@
               </a:spcAft>
               <a:buSzPts val="1400"/>
               <a:buNone/>
-              <a:defRPr sz="3552"/>
+              <a:defRPr/>
             </a:lvl8pPr>
             <a:lvl9pPr lvl="8" algn="l">
               <a:lnSpc>
@@ -2238,7 +2238,7 @@
               </a:spcAft>
               <a:buSzPts val="1400"/>
               <a:buNone/>
-              <a:defRPr sz="3552"/>
+              <a:defRPr/>
             </a:lvl9pPr>
           </a:lstStyle>
           <a:p/>
@@ -2254,8 +2254,8 @@
         </p:nvSpPr>
         <p:spPr>
           <a:xfrm>
-            <a:off x="12488068" y="12847063"/>
-            <a:ext cx="4065900" cy="738000"/>
+            <a:off x="12488252" y="12847249"/>
+            <a:ext cx="4065942" cy="737979"/>
           </a:xfrm>
           <a:prstGeom prst="rect">
             <a:avLst/>
@@ -2558,8 +2558,8 @@
         </p:nvSpPr>
         <p:spPr>
           <a:xfrm rot="5400000">
-            <a:off x="8680300" y="4508032"/>
-            <a:ext cx="11826600" cy="3920700"/>
+            <a:off x="8680373" y="4508182"/>
+            <a:ext cx="11826913" cy="3920730"/>
           </a:xfrm>
           <a:prstGeom prst="rect">
             <a:avLst/>
@@ -2589,7 +2589,7 @@
               </a:buClr>
               <a:buSzPts val="1800"/>
               <a:buNone/>
-              <a:defRPr sz="8385"/>
+              <a:defRPr/>
             </a:lvl1pPr>
             <a:lvl2pPr lvl="1" algn="l">
               <a:lnSpc>
@@ -2603,7 +2603,7 @@
               </a:spcAft>
               <a:buSzPts val="1400"/>
               <a:buNone/>
-              <a:defRPr sz="1800"/>
+              <a:defRPr/>
             </a:lvl2pPr>
             <a:lvl3pPr lvl="2" algn="l">
               <a:lnSpc>
@@ -2617,7 +2617,7 @@
               </a:spcAft>
               <a:buSzPts val="1400"/>
               <a:buNone/>
-              <a:defRPr sz="1800"/>
+              <a:defRPr/>
             </a:lvl3pPr>
             <a:lvl4pPr lvl="3" algn="l">
               <a:lnSpc>
@@ -2631,7 +2631,7 @@
               </a:spcAft>
               <a:buSzPts val="1400"/>
               <a:buNone/>
-              <a:defRPr sz="1800"/>
+              <a:defRPr/>
             </a:lvl4pPr>
             <a:lvl5pPr lvl="4" algn="l">
               <a:lnSpc>
@@ -2645,7 +2645,7 @@
               </a:spcAft>
               <a:buSzPts val="1400"/>
               <a:buNone/>
-              <a:defRPr sz="1800"/>
+              <a:defRPr/>
             </a:lvl5pPr>
             <a:lvl6pPr lvl="5" algn="l">
               <a:lnSpc>
@@ -2659,7 +2659,7 @@
               </a:spcAft>
               <a:buSzPts val="1400"/>
               <a:buNone/>
-              <a:defRPr sz="1800"/>
+              <a:defRPr/>
             </a:lvl6pPr>
             <a:lvl7pPr lvl="6" algn="l">
               <a:lnSpc>
@@ -2673,7 +2673,7 @@
               </a:spcAft>
               <a:buSzPts val="1400"/>
               <a:buNone/>
-              <a:defRPr sz="1800"/>
+              <a:defRPr/>
             </a:lvl7pPr>
             <a:lvl8pPr lvl="7" algn="l">
               <a:lnSpc>
@@ -2687,7 +2687,7 @@
               </a:spcAft>
               <a:buSzPts val="1400"/>
               <a:buNone/>
-              <a:defRPr sz="1800"/>
+              <a:defRPr/>
             </a:lvl8pPr>
             <a:lvl9pPr lvl="8" algn="l">
               <a:lnSpc>
@@ -2701,7 +2701,7 @@
               </a:spcAft>
               <a:buSzPts val="1400"/>
               <a:buNone/>
-              <a:defRPr sz="1800"/>
+              <a:defRPr/>
             </a:lvl9pPr>
           </a:lstStyle>
           <a:p/>
@@ -2717,8 +2717,8 @@
         </p:nvSpPr>
         <p:spPr>
           <a:xfrm rot="5400000">
-            <a:off x="693706" y="732532"/>
-            <a:ext cx="11826600" cy="11471700"/>
+            <a:off x="693699" y="732664"/>
+            <a:ext cx="11826913" cy="11471766"/>
           </a:xfrm>
           <a:prstGeom prst="rect">
             <a:avLst/>
@@ -2733,7 +2733,7 @@
             <a:normAutofit/>
           </a:bodyPr>
           <a:lstStyle>
-            <a:lvl1pPr indent="-342898" lvl="0" marL="457200" algn="l">
+            <a:lvl1pPr indent="-342900" lvl="0" marL="457200" algn="l">
               <a:lnSpc>
                 <a:spcPct val="100000"/>
               </a:lnSpc>
@@ -2748,9 +2748,9 @@
               </a:buClr>
               <a:buSzPts val="1800"/>
               <a:buChar char="•"/>
-              <a:defRPr sz="6098"/>
+              <a:defRPr/>
             </a:lvl1pPr>
-            <a:lvl2pPr indent="-342898" lvl="1" marL="914400" algn="l">
+            <a:lvl2pPr indent="-342900" lvl="1" marL="914400" algn="l">
               <a:lnSpc>
                 <a:spcPct val="100000"/>
               </a:lnSpc>
@@ -2765,9 +2765,9 @@
               </a:buClr>
               <a:buSzPts val="1800"/>
               <a:buChar char="–"/>
-              <a:defRPr sz="5336"/>
+              <a:defRPr/>
             </a:lvl2pPr>
-            <a:lvl3pPr indent="-342898" lvl="2" marL="1371600" algn="l">
+            <a:lvl3pPr indent="-342900" lvl="2" marL="1371600" algn="l">
               <a:lnSpc>
                 <a:spcPct val="100000"/>
               </a:lnSpc>
@@ -2782,9 +2782,9 @@
               </a:buClr>
               <a:buSzPts val="1800"/>
               <a:buChar char="•"/>
-              <a:defRPr sz="4574"/>
+              <a:defRPr/>
             </a:lvl3pPr>
-            <a:lvl4pPr indent="-342898" lvl="3" marL="1828800" algn="l">
+            <a:lvl4pPr indent="-342900" lvl="3" marL="1828800" algn="l">
               <a:lnSpc>
                 <a:spcPct val="100000"/>
               </a:lnSpc>
@@ -2799,9 +2799,9 @@
               </a:buClr>
               <a:buSzPts val="1800"/>
               <a:buChar char="–"/>
-              <a:defRPr sz="3811"/>
+              <a:defRPr/>
             </a:lvl4pPr>
-            <a:lvl5pPr indent="-342898" lvl="4" marL="2286000" algn="l">
+            <a:lvl5pPr indent="-342900" lvl="4" marL="2286000" algn="l">
               <a:lnSpc>
                 <a:spcPct val="100000"/>
               </a:lnSpc>
@@ -2816,9 +2816,9 @@
               </a:buClr>
               <a:buSzPts val="1800"/>
               <a:buChar char="»"/>
-              <a:defRPr sz="3811"/>
+              <a:defRPr/>
             </a:lvl5pPr>
-            <a:lvl6pPr indent="-342898" lvl="5" marL="2743200" algn="l">
+            <a:lvl6pPr indent="-342900" lvl="5" marL="2743200" algn="l">
               <a:lnSpc>
                 <a:spcPct val="100000"/>
               </a:lnSpc>
@@ -2833,9 +2833,9 @@
               </a:buClr>
               <a:buSzPts val="1800"/>
               <a:buChar char="•"/>
-              <a:defRPr sz="3811"/>
+              <a:defRPr/>
             </a:lvl6pPr>
-            <a:lvl7pPr indent="-342898" lvl="6" marL="3200400" algn="l">
+            <a:lvl7pPr indent="-342900" lvl="6" marL="3200400" algn="l">
               <a:lnSpc>
                 <a:spcPct val="100000"/>
               </a:lnSpc>
@@ -2850,9 +2850,9 @@
               </a:buClr>
               <a:buSzPts val="1800"/>
               <a:buChar char="•"/>
-              <a:defRPr sz="3811"/>
+              <a:defRPr/>
             </a:lvl7pPr>
-            <a:lvl8pPr indent="-342898" lvl="7" marL="3657600" algn="l">
+            <a:lvl8pPr indent="-342900" lvl="7" marL="3657600" algn="l">
               <a:lnSpc>
                 <a:spcPct val="100000"/>
               </a:lnSpc>
@@ -2867,9 +2867,9 @@
               </a:buClr>
               <a:buSzPts val="1800"/>
               <a:buChar char="•"/>
-              <a:defRPr sz="3811"/>
+              <a:defRPr/>
             </a:lvl8pPr>
-            <a:lvl9pPr indent="-342898" lvl="8" marL="4114800" algn="l">
+            <a:lvl9pPr indent="-342900" lvl="8" marL="4114800" algn="l">
               <a:lnSpc>
                 <a:spcPct val="100000"/>
               </a:lnSpc>
@@ -2884,7 +2884,7 @@
               </a:buClr>
               <a:buSzPts val="1800"/>
               <a:buChar char="•"/>
-              <a:defRPr sz="3811"/>
+              <a:defRPr/>
             </a:lvl9pPr>
           </a:lstStyle>
           <a:p/>
@@ -2900,8 +2900,8 @@
         </p:nvSpPr>
         <p:spPr>
           <a:xfrm>
-            <a:off x="871261" y="12847063"/>
-            <a:ext cx="4065900" cy="738000"/>
+            <a:off x="871274" y="12847249"/>
+            <a:ext cx="4065942" cy="737979"/>
           </a:xfrm>
           <a:prstGeom prst="rect">
             <a:avLst/>
@@ -2928,7 +2928,7 @@
               </a:spcAft>
               <a:buSzPts val="1400"/>
               <a:buNone/>
-              <a:defRPr sz="2287"/>
+              <a:defRPr/>
             </a:lvl1pPr>
             <a:lvl2pPr lvl="1" algn="l">
               <a:lnSpc>
@@ -2942,7 +2942,7 @@
               </a:spcAft>
               <a:buSzPts val="1400"/>
               <a:buNone/>
-              <a:defRPr sz="3552"/>
+              <a:defRPr/>
             </a:lvl2pPr>
             <a:lvl3pPr lvl="2" algn="l">
               <a:lnSpc>
@@ -2956,7 +2956,7 @@
               </a:spcAft>
               <a:buSzPts val="1400"/>
               <a:buNone/>
-              <a:defRPr sz="3552"/>
+              <a:defRPr/>
             </a:lvl3pPr>
             <a:lvl4pPr lvl="3" algn="l">
               <a:lnSpc>
@@ -2970,7 +2970,7 @@
               </a:spcAft>
               <a:buSzPts val="1400"/>
               <a:buNone/>
-              <a:defRPr sz="3552"/>
+              <a:defRPr/>
             </a:lvl4pPr>
             <a:lvl5pPr lvl="4" algn="l">
               <a:lnSpc>
@@ -2984,7 +2984,7 @@
               </a:spcAft>
               <a:buSzPts val="1400"/>
               <a:buNone/>
-              <a:defRPr sz="3552"/>
+              <a:defRPr/>
             </a:lvl5pPr>
             <a:lvl6pPr lvl="5" algn="l">
               <a:lnSpc>
@@ -2998,7 +2998,7 @@
               </a:spcAft>
               <a:buSzPts val="1400"/>
               <a:buNone/>
-              <a:defRPr sz="3552"/>
+              <a:defRPr/>
             </a:lvl6pPr>
             <a:lvl7pPr lvl="6" algn="l">
               <a:lnSpc>
@@ -3012,7 +3012,7 @@
               </a:spcAft>
               <a:buSzPts val="1400"/>
               <a:buNone/>
-              <a:defRPr sz="3552"/>
+              <a:defRPr/>
             </a:lvl7pPr>
             <a:lvl8pPr lvl="7" algn="l">
               <a:lnSpc>
@@ -3026,7 +3026,7 @@
               </a:spcAft>
               <a:buSzPts val="1400"/>
               <a:buNone/>
-              <a:defRPr sz="3552"/>
+              <a:defRPr/>
             </a:lvl8pPr>
             <a:lvl9pPr lvl="8" algn="l">
               <a:lnSpc>
@@ -3040,7 +3040,7 @@
               </a:spcAft>
               <a:buSzPts val="1400"/>
               <a:buNone/>
-              <a:defRPr sz="3552"/>
+              <a:defRPr/>
             </a:lvl9pPr>
           </a:lstStyle>
           <a:p/>
@@ -3056,8 +3056,8 @@
         </p:nvSpPr>
         <p:spPr>
           <a:xfrm>
-            <a:off x="5953613" y="12847063"/>
-            <a:ext cx="5517900" cy="738000"/>
+            <a:off x="5953701" y="12847249"/>
+            <a:ext cx="5518065" cy="737979"/>
           </a:xfrm>
           <a:prstGeom prst="rect">
             <a:avLst/>
@@ -3084,7 +3084,7 @@
               </a:spcAft>
               <a:buSzPts val="1400"/>
               <a:buNone/>
-              <a:defRPr sz="2287"/>
+              <a:defRPr/>
             </a:lvl1pPr>
             <a:lvl2pPr lvl="1" algn="l">
               <a:lnSpc>
@@ -3098,7 +3098,7 @@
               </a:spcAft>
               <a:buSzPts val="1400"/>
               <a:buNone/>
-              <a:defRPr sz="3552"/>
+              <a:defRPr/>
             </a:lvl2pPr>
             <a:lvl3pPr lvl="2" algn="l">
               <a:lnSpc>
@@ -3112,7 +3112,7 @@
               </a:spcAft>
               <a:buSzPts val="1400"/>
               <a:buNone/>
-              <a:defRPr sz="3552"/>
+              <a:defRPr/>
             </a:lvl3pPr>
             <a:lvl4pPr lvl="3" algn="l">
               <a:lnSpc>
@@ -3126,7 +3126,7 @@
               </a:spcAft>
               <a:buSzPts val="1400"/>
               <a:buNone/>
-              <a:defRPr sz="3552"/>
+              <a:defRPr/>
             </a:lvl4pPr>
             <a:lvl5pPr lvl="4" algn="l">
               <a:lnSpc>
@@ -3140,7 +3140,7 @@
               </a:spcAft>
               <a:buSzPts val="1400"/>
               <a:buNone/>
-              <a:defRPr sz="3552"/>
+              <a:defRPr/>
             </a:lvl5pPr>
             <a:lvl6pPr lvl="5" algn="l">
               <a:lnSpc>
@@ -3154,7 +3154,7 @@
               </a:spcAft>
               <a:buSzPts val="1400"/>
               <a:buNone/>
-              <a:defRPr sz="3552"/>
+              <a:defRPr/>
             </a:lvl6pPr>
             <a:lvl7pPr lvl="6" algn="l">
               <a:lnSpc>
@@ -3168,7 +3168,7 @@
               </a:spcAft>
               <a:buSzPts val="1400"/>
               <a:buNone/>
-              <a:defRPr sz="3552"/>
+              <a:defRPr/>
             </a:lvl7pPr>
             <a:lvl8pPr lvl="7" algn="l">
               <a:lnSpc>
@@ -3182,7 +3182,7 @@
               </a:spcAft>
               <a:buSzPts val="1400"/>
               <a:buNone/>
-              <a:defRPr sz="3552"/>
+              <a:defRPr/>
             </a:lvl8pPr>
             <a:lvl9pPr lvl="8" algn="l">
               <a:lnSpc>
@@ -3196,7 +3196,7 @@
               </a:spcAft>
               <a:buSzPts val="1400"/>
               <a:buNone/>
-              <a:defRPr sz="3552"/>
+              <a:defRPr/>
             </a:lvl9pPr>
           </a:lstStyle>
           <a:p/>
@@ -3212,8 +3212,8 @@
         </p:nvSpPr>
         <p:spPr>
           <a:xfrm>
-            <a:off x="12488068" y="12847063"/>
-            <a:ext cx="4065900" cy="738000"/>
+            <a:off x="12488252" y="12847249"/>
+            <a:ext cx="4065942" cy="737979"/>
           </a:xfrm>
           <a:prstGeom prst="rect">
             <a:avLst/>
@@ -3516,8 +3516,8 @@
         </p:nvSpPr>
         <p:spPr>
           <a:xfrm>
-            <a:off x="1306891" y="4305885"/>
-            <a:ext cx="14811300" cy="2971200"/>
+            <a:off x="1306910" y="4305947"/>
+            <a:ext cx="14811647" cy="2971167"/>
           </a:xfrm>
           <a:prstGeom prst="rect">
             <a:avLst/>
@@ -3547,7 +3547,7 @@
               </a:buClr>
               <a:buSzPts val="1800"/>
               <a:buNone/>
-              <a:defRPr sz="8385"/>
+              <a:defRPr/>
             </a:lvl1pPr>
             <a:lvl2pPr lvl="1" algn="l">
               <a:lnSpc>
@@ -3561,7 +3561,7 @@
               </a:spcAft>
               <a:buSzPts val="1400"/>
               <a:buNone/>
-              <a:defRPr sz="1800"/>
+              <a:defRPr/>
             </a:lvl2pPr>
             <a:lvl3pPr lvl="2" algn="l">
               <a:lnSpc>
@@ -3575,7 +3575,7 @@
               </a:spcAft>
               <a:buSzPts val="1400"/>
               <a:buNone/>
-              <a:defRPr sz="1800"/>
+              <a:defRPr/>
             </a:lvl3pPr>
             <a:lvl4pPr lvl="3" algn="l">
               <a:lnSpc>
@@ -3589,7 +3589,7 @@
               </a:spcAft>
               <a:buSzPts val="1400"/>
               <a:buNone/>
-              <a:defRPr sz="1800"/>
+              <a:defRPr/>
             </a:lvl4pPr>
             <a:lvl5pPr lvl="4" algn="l">
               <a:lnSpc>
@@ -3603,7 +3603,7 @@
               </a:spcAft>
               <a:buSzPts val="1400"/>
               <a:buNone/>
-              <a:defRPr sz="1800"/>
+              <a:defRPr/>
             </a:lvl5pPr>
             <a:lvl6pPr lvl="5" algn="l">
               <a:lnSpc>
@@ -3617,7 +3617,7 @@
               </a:spcAft>
               <a:buSzPts val="1400"/>
               <a:buNone/>
-              <a:defRPr sz="1800"/>
+              <a:defRPr/>
             </a:lvl6pPr>
             <a:lvl7pPr lvl="6" algn="l">
               <a:lnSpc>
@@ -3631,7 +3631,7 @@
               </a:spcAft>
               <a:buSzPts val="1400"/>
               <a:buNone/>
-              <a:defRPr sz="1800"/>
+              <a:defRPr/>
             </a:lvl7pPr>
             <a:lvl8pPr lvl="7" algn="l">
               <a:lnSpc>
@@ -3645,7 +3645,7 @@
               </a:spcAft>
               <a:buSzPts val="1400"/>
               <a:buNone/>
-              <a:defRPr sz="1800"/>
+              <a:defRPr/>
             </a:lvl8pPr>
             <a:lvl9pPr lvl="8" algn="l">
               <a:lnSpc>
@@ -3659,7 +3659,7 @@
               </a:spcAft>
               <a:buSzPts val="1400"/>
               <a:buNone/>
-              <a:defRPr sz="1800"/>
+              <a:defRPr/>
             </a:lvl9pPr>
           </a:lstStyle>
           <a:p/>
@@ -3675,8 +3675,8 @@
         </p:nvSpPr>
         <p:spPr>
           <a:xfrm>
-            <a:off x="2613781" y="7854548"/>
-            <a:ext cx="12197700" cy="3542100"/>
+            <a:off x="2613820" y="7854662"/>
+            <a:ext cx="12197827" cy="3542298"/>
           </a:xfrm>
           <a:prstGeom prst="rect">
             <a:avLst/>
@@ -3706,7 +3706,7 @@
               </a:buClr>
               <a:buSzPts val="6098"/>
               <a:buNone/>
-              <a:defRPr sz="6098">
+              <a:defRPr>
                 <a:solidFill>
                   <a:srgbClr val="888888"/>
                 </a:solidFill>
@@ -3727,7 +3727,7 @@
               </a:buClr>
               <a:buSzPts val="5336"/>
               <a:buNone/>
-              <a:defRPr sz="5336">
+              <a:defRPr>
                 <a:solidFill>
                   <a:srgbClr val="888888"/>
                 </a:solidFill>
@@ -3748,7 +3748,7 @@
               </a:buClr>
               <a:buSzPts val="4574"/>
               <a:buNone/>
-              <a:defRPr sz="4574">
+              <a:defRPr>
                 <a:solidFill>
                   <a:srgbClr val="888888"/>
                 </a:solidFill>
@@ -3769,7 +3769,7 @@
               </a:buClr>
               <a:buSzPts val="3811"/>
               <a:buNone/>
-              <a:defRPr sz="3811">
+              <a:defRPr>
                 <a:solidFill>
                   <a:srgbClr val="888888"/>
                 </a:solidFill>
@@ -3790,7 +3790,7 @@
               </a:buClr>
               <a:buSzPts val="3811"/>
               <a:buNone/>
-              <a:defRPr sz="3811">
+              <a:defRPr>
                 <a:solidFill>
                   <a:srgbClr val="888888"/>
                 </a:solidFill>
@@ -3811,7 +3811,7 @@
               </a:buClr>
               <a:buSzPts val="3811"/>
               <a:buNone/>
-              <a:defRPr sz="3811">
+              <a:defRPr>
                 <a:solidFill>
                   <a:srgbClr val="888888"/>
                 </a:solidFill>
@@ -3832,7 +3832,7 @@
               </a:buClr>
               <a:buSzPts val="3811"/>
               <a:buNone/>
-              <a:defRPr sz="3811">
+              <a:defRPr>
                 <a:solidFill>
                   <a:srgbClr val="888888"/>
                 </a:solidFill>
@@ -3853,7 +3853,7 @@
               </a:buClr>
               <a:buSzPts val="3811"/>
               <a:buNone/>
-              <a:defRPr sz="3811">
+              <a:defRPr>
                 <a:solidFill>
                   <a:srgbClr val="888888"/>
                 </a:solidFill>
@@ -3874,7 +3874,7 @@
               </a:buClr>
               <a:buSzPts val="3811"/>
               <a:buNone/>
-              <a:defRPr sz="3811">
+              <a:defRPr>
                 <a:solidFill>
                   <a:srgbClr val="888888"/>
                 </a:solidFill>
@@ -3894,8 +3894,8 @@
         </p:nvSpPr>
         <p:spPr>
           <a:xfrm>
-            <a:off x="871261" y="12847063"/>
-            <a:ext cx="4065900" cy="738000"/>
+            <a:off x="871274" y="12847249"/>
+            <a:ext cx="4065942" cy="737979"/>
           </a:xfrm>
           <a:prstGeom prst="rect">
             <a:avLst/>
@@ -3922,7 +3922,7 @@
               </a:spcAft>
               <a:buSzPts val="1400"/>
               <a:buNone/>
-              <a:defRPr sz="2287"/>
+              <a:defRPr/>
             </a:lvl1pPr>
             <a:lvl2pPr lvl="1" algn="l">
               <a:lnSpc>
@@ -3936,7 +3936,7 @@
               </a:spcAft>
               <a:buSzPts val="1400"/>
               <a:buNone/>
-              <a:defRPr sz="3552"/>
+              <a:defRPr/>
             </a:lvl2pPr>
             <a:lvl3pPr lvl="2" algn="l">
               <a:lnSpc>
@@ -3950,7 +3950,7 @@
               </a:spcAft>
               <a:buSzPts val="1400"/>
               <a:buNone/>
-              <a:defRPr sz="3552"/>
+              <a:defRPr/>
             </a:lvl3pPr>
             <a:lvl4pPr lvl="3" algn="l">
               <a:lnSpc>
@@ -3964,7 +3964,7 @@
               </a:spcAft>
               <a:buSzPts val="1400"/>
               <a:buNone/>
-              <a:defRPr sz="3552"/>
+              <a:defRPr/>
             </a:lvl4pPr>
             <a:lvl5pPr lvl="4" algn="l">
               <a:lnSpc>
@@ -3978,7 +3978,7 @@
               </a:spcAft>
               <a:buSzPts val="1400"/>
               <a:buNone/>
-              <a:defRPr sz="3552"/>
+              <a:defRPr/>
             </a:lvl5pPr>
             <a:lvl6pPr lvl="5" algn="l">
               <a:lnSpc>
@@ -3992,7 +3992,7 @@
               </a:spcAft>
               <a:buSzPts val="1400"/>
               <a:buNone/>
-              <a:defRPr sz="3552"/>
+              <a:defRPr/>
             </a:lvl6pPr>
             <a:lvl7pPr lvl="6" algn="l">
               <a:lnSpc>
@@ -4006,7 +4006,7 @@
               </a:spcAft>
               <a:buSzPts val="1400"/>
               <a:buNone/>
-              <a:defRPr sz="3552"/>
+              <a:defRPr/>
             </a:lvl7pPr>
             <a:lvl8pPr lvl="7" algn="l">
               <a:lnSpc>
@@ -4020,7 +4020,7 @@
               </a:spcAft>
               <a:buSzPts val="1400"/>
               <a:buNone/>
-              <a:defRPr sz="3552"/>
+              <a:defRPr/>
             </a:lvl8pPr>
             <a:lvl9pPr lvl="8" algn="l">
               <a:lnSpc>
@@ -4034,7 +4034,7 @@
               </a:spcAft>
               <a:buSzPts val="1400"/>
               <a:buNone/>
-              <a:defRPr sz="3552"/>
+              <a:defRPr/>
             </a:lvl9pPr>
           </a:lstStyle>
           <a:p/>
@@ -4050,8 +4050,8 @@
         </p:nvSpPr>
         <p:spPr>
           <a:xfrm>
-            <a:off x="5953613" y="12847063"/>
-            <a:ext cx="5517900" cy="738000"/>
+            <a:off x="5953701" y="12847249"/>
+            <a:ext cx="5518065" cy="737979"/>
           </a:xfrm>
           <a:prstGeom prst="rect">
             <a:avLst/>
@@ -4078,7 +4078,7 @@
               </a:spcAft>
               <a:buSzPts val="1400"/>
               <a:buNone/>
-              <a:defRPr sz="2287"/>
+              <a:defRPr/>
             </a:lvl1pPr>
             <a:lvl2pPr lvl="1" algn="l">
               <a:lnSpc>
@@ -4092,7 +4092,7 @@
               </a:spcAft>
               <a:buSzPts val="1400"/>
               <a:buNone/>
-              <a:defRPr sz="3552"/>
+              <a:defRPr/>
             </a:lvl2pPr>
             <a:lvl3pPr lvl="2" algn="l">
               <a:lnSpc>
@@ -4106,7 +4106,7 @@
               </a:spcAft>
               <a:buSzPts val="1400"/>
               <a:buNone/>
-              <a:defRPr sz="3552"/>
+              <a:defRPr/>
             </a:lvl3pPr>
             <a:lvl4pPr lvl="3" algn="l">
               <a:lnSpc>
@@ -4120,7 +4120,7 @@
               </a:spcAft>
               <a:buSzPts val="1400"/>
               <a:buNone/>
-              <a:defRPr sz="3552"/>
+              <a:defRPr/>
             </a:lvl4pPr>
             <a:lvl5pPr lvl="4" algn="l">
               <a:lnSpc>
@@ -4134,7 +4134,7 @@
               </a:spcAft>
               <a:buSzPts val="1400"/>
               <a:buNone/>
-              <a:defRPr sz="3552"/>
+              <a:defRPr/>
             </a:lvl5pPr>
             <a:lvl6pPr lvl="5" algn="l">
               <a:lnSpc>
@@ -4148,7 +4148,7 @@
               </a:spcAft>
               <a:buSzPts val="1400"/>
               <a:buNone/>
-              <a:defRPr sz="3552"/>
+              <a:defRPr/>
             </a:lvl6pPr>
             <a:lvl7pPr lvl="6" algn="l">
               <a:lnSpc>
@@ -4162,7 +4162,7 @@
               </a:spcAft>
               <a:buSzPts val="1400"/>
               <a:buNone/>
-              <a:defRPr sz="3552"/>
+              <a:defRPr/>
             </a:lvl7pPr>
             <a:lvl8pPr lvl="7" algn="l">
               <a:lnSpc>
@@ -4176,7 +4176,7 @@
               </a:spcAft>
               <a:buSzPts val="1400"/>
               <a:buNone/>
-              <a:defRPr sz="3552"/>
+              <a:defRPr/>
             </a:lvl8pPr>
             <a:lvl9pPr lvl="8" algn="l">
               <a:lnSpc>
@@ -4190,7 +4190,7 @@
               </a:spcAft>
               <a:buSzPts val="1400"/>
               <a:buNone/>
-              <a:defRPr sz="3552"/>
+              <a:defRPr/>
             </a:lvl9pPr>
           </a:lstStyle>
           <a:p/>
@@ -4206,8 +4206,8 @@
         </p:nvSpPr>
         <p:spPr>
           <a:xfrm>
-            <a:off x="12488068" y="12847063"/>
-            <a:ext cx="4065900" cy="738000"/>
+            <a:off x="12488252" y="12847249"/>
+            <a:ext cx="4065942" cy="737979"/>
           </a:xfrm>
           <a:prstGeom prst="rect">
             <a:avLst/>
@@ -4510,8 +4510,8 @@
         </p:nvSpPr>
         <p:spPr>
           <a:xfrm>
-            <a:off x="871260" y="555081"/>
-            <a:ext cx="15682800" cy="2310000"/>
+            <a:off x="871273" y="555089"/>
+            <a:ext cx="15682921" cy="2310195"/>
           </a:xfrm>
           <a:prstGeom prst="rect">
             <a:avLst/>
@@ -4541,7 +4541,7 @@
               </a:buClr>
               <a:buSzPts val="1800"/>
               <a:buNone/>
-              <a:defRPr sz="8385"/>
+              <a:defRPr/>
             </a:lvl1pPr>
             <a:lvl2pPr lvl="1" algn="l">
               <a:lnSpc>
@@ -4555,7 +4555,7 @@
               </a:spcAft>
               <a:buSzPts val="1400"/>
               <a:buNone/>
-              <a:defRPr sz="1800"/>
+              <a:defRPr/>
             </a:lvl2pPr>
             <a:lvl3pPr lvl="2" algn="l">
               <a:lnSpc>
@@ -4569,7 +4569,7 @@
               </a:spcAft>
               <a:buSzPts val="1400"/>
               <a:buNone/>
-              <a:defRPr sz="1800"/>
+              <a:defRPr/>
             </a:lvl3pPr>
             <a:lvl4pPr lvl="3" algn="l">
               <a:lnSpc>
@@ -4583,7 +4583,7 @@
               </a:spcAft>
               <a:buSzPts val="1400"/>
               <a:buNone/>
-              <a:defRPr sz="1800"/>
+              <a:defRPr/>
             </a:lvl4pPr>
             <a:lvl5pPr lvl="4" algn="l">
               <a:lnSpc>
@@ -4597,7 +4597,7 @@
               </a:spcAft>
               <a:buSzPts val="1400"/>
               <a:buNone/>
-              <a:defRPr sz="1800"/>
+              <a:defRPr/>
             </a:lvl5pPr>
             <a:lvl6pPr lvl="5" algn="l">
               <a:lnSpc>
@@ -4611,7 +4611,7 @@
               </a:spcAft>
               <a:buSzPts val="1400"/>
               <a:buNone/>
-              <a:defRPr sz="1800"/>
+              <a:defRPr/>
             </a:lvl6pPr>
             <a:lvl7pPr lvl="6" algn="l">
               <a:lnSpc>
@@ -4625,7 +4625,7 @@
               </a:spcAft>
               <a:buSzPts val="1400"/>
               <a:buNone/>
-              <a:defRPr sz="1800"/>
+              <a:defRPr/>
             </a:lvl7pPr>
             <a:lvl8pPr lvl="7" algn="l">
               <a:lnSpc>
@@ -4639,7 +4639,7 @@
               </a:spcAft>
               <a:buSzPts val="1400"/>
               <a:buNone/>
-              <a:defRPr sz="1800"/>
+              <a:defRPr/>
             </a:lvl8pPr>
             <a:lvl9pPr lvl="8" algn="l">
               <a:lnSpc>
@@ -4653,7 +4653,7 @@
               </a:spcAft>
               <a:buSzPts val="1400"/>
               <a:buNone/>
-              <a:defRPr sz="1800"/>
+              <a:defRPr/>
             </a:lvl9pPr>
           </a:lstStyle>
           <a:p/>
@@ -4669,8 +4669,8 @@
         </p:nvSpPr>
         <p:spPr>
           <a:xfrm>
-            <a:off x="871260" y="3234226"/>
-            <a:ext cx="15682800" cy="9147600"/>
+            <a:off x="871273" y="3234273"/>
+            <a:ext cx="15682921" cy="9147730"/>
           </a:xfrm>
           <a:prstGeom prst="rect">
             <a:avLst/>
@@ -4685,7 +4685,7 @@
             <a:normAutofit/>
           </a:bodyPr>
           <a:lstStyle>
-            <a:lvl1pPr indent="-342898" lvl="0" marL="457200" algn="l">
+            <a:lvl1pPr indent="-342900" lvl="0" marL="457200" algn="l">
               <a:lnSpc>
                 <a:spcPct val="100000"/>
               </a:lnSpc>
@@ -4700,9 +4700,9 @@
               </a:buClr>
               <a:buSzPts val="1800"/>
               <a:buChar char="•"/>
-              <a:defRPr sz="6098"/>
+              <a:defRPr/>
             </a:lvl1pPr>
-            <a:lvl2pPr indent="-342898" lvl="1" marL="914400" algn="l">
+            <a:lvl2pPr indent="-342900" lvl="1" marL="914400" algn="l">
               <a:lnSpc>
                 <a:spcPct val="100000"/>
               </a:lnSpc>
@@ -4717,9 +4717,9 @@
               </a:buClr>
               <a:buSzPts val="1800"/>
               <a:buChar char="–"/>
-              <a:defRPr sz="5336"/>
+              <a:defRPr/>
             </a:lvl2pPr>
-            <a:lvl3pPr indent="-342898" lvl="2" marL="1371600" algn="l">
+            <a:lvl3pPr indent="-342900" lvl="2" marL="1371600" algn="l">
               <a:lnSpc>
                 <a:spcPct val="100000"/>
               </a:lnSpc>
@@ -4734,9 +4734,9 @@
               </a:buClr>
               <a:buSzPts val="1800"/>
               <a:buChar char="•"/>
-              <a:defRPr sz="4574"/>
+              <a:defRPr/>
             </a:lvl3pPr>
-            <a:lvl4pPr indent="-342898" lvl="3" marL="1828800" algn="l">
+            <a:lvl4pPr indent="-342900" lvl="3" marL="1828800" algn="l">
               <a:lnSpc>
                 <a:spcPct val="100000"/>
               </a:lnSpc>
@@ -4751,9 +4751,9 @@
               </a:buClr>
               <a:buSzPts val="1800"/>
               <a:buChar char="–"/>
-              <a:defRPr sz="3811"/>
+              <a:defRPr/>
             </a:lvl4pPr>
-            <a:lvl5pPr indent="-342898" lvl="4" marL="2286000" algn="l">
+            <a:lvl5pPr indent="-342900" lvl="4" marL="2286000" algn="l">
               <a:lnSpc>
                 <a:spcPct val="100000"/>
               </a:lnSpc>
@@ -4768,9 +4768,9 @@
               </a:buClr>
               <a:buSzPts val="1800"/>
               <a:buChar char="»"/>
-              <a:defRPr sz="3811"/>
+              <a:defRPr/>
             </a:lvl5pPr>
-            <a:lvl6pPr indent="-342898" lvl="5" marL="2743200" algn="l">
+            <a:lvl6pPr indent="-342900" lvl="5" marL="2743200" algn="l">
               <a:lnSpc>
                 <a:spcPct val="100000"/>
               </a:lnSpc>
@@ -4785,9 +4785,9 @@
               </a:buClr>
               <a:buSzPts val="1800"/>
               <a:buChar char="•"/>
-              <a:defRPr sz="3811"/>
+              <a:defRPr/>
             </a:lvl6pPr>
-            <a:lvl7pPr indent="-342898" lvl="6" marL="3200400" algn="l">
+            <a:lvl7pPr indent="-342900" lvl="6" marL="3200400" algn="l">
               <a:lnSpc>
                 <a:spcPct val="100000"/>
               </a:lnSpc>
@@ -4802,9 +4802,9 @@
               </a:buClr>
               <a:buSzPts val="1800"/>
               <a:buChar char="•"/>
-              <a:defRPr sz="3811"/>
+              <a:defRPr/>
             </a:lvl7pPr>
-            <a:lvl8pPr indent="-342898" lvl="7" marL="3657600" algn="l">
+            <a:lvl8pPr indent="-342900" lvl="7" marL="3657600" algn="l">
               <a:lnSpc>
                 <a:spcPct val="100000"/>
               </a:lnSpc>
@@ -4819,9 +4819,9 @@
               </a:buClr>
               <a:buSzPts val="1800"/>
               <a:buChar char="•"/>
-              <a:defRPr sz="3811"/>
+              <a:defRPr/>
             </a:lvl8pPr>
-            <a:lvl9pPr indent="-342898" lvl="8" marL="4114800" algn="l">
+            <a:lvl9pPr indent="-342900" lvl="8" marL="4114800" algn="l">
               <a:lnSpc>
                 <a:spcPct val="100000"/>
               </a:lnSpc>
@@ -4836,7 +4836,7 @@
               </a:buClr>
               <a:buSzPts val="1800"/>
               <a:buChar char="•"/>
-              <a:defRPr sz="3811"/>
+              <a:defRPr/>
             </a:lvl9pPr>
           </a:lstStyle>
           <a:p/>
@@ -4852,8 +4852,8 @@
         </p:nvSpPr>
         <p:spPr>
           <a:xfrm>
-            <a:off x="871261" y="12847063"/>
-            <a:ext cx="4065900" cy="738000"/>
+            <a:off x="871274" y="12847249"/>
+            <a:ext cx="4065942" cy="737979"/>
           </a:xfrm>
           <a:prstGeom prst="rect">
             <a:avLst/>
@@ -4880,7 +4880,7 @@
               </a:spcAft>
               <a:buSzPts val="1400"/>
               <a:buNone/>
-              <a:defRPr sz="2287"/>
+              <a:defRPr/>
             </a:lvl1pPr>
             <a:lvl2pPr lvl="1" algn="l">
               <a:lnSpc>
@@ -4894,7 +4894,7 @@
               </a:spcAft>
               <a:buSzPts val="1400"/>
               <a:buNone/>
-              <a:defRPr sz="3552"/>
+              <a:defRPr/>
             </a:lvl2pPr>
             <a:lvl3pPr lvl="2" algn="l">
               <a:lnSpc>
@@ -4908,7 +4908,7 @@
               </a:spcAft>
               <a:buSzPts val="1400"/>
               <a:buNone/>
-              <a:defRPr sz="3552"/>
+              <a:defRPr/>
             </a:lvl3pPr>
             <a:lvl4pPr lvl="3" algn="l">
               <a:lnSpc>
@@ -4922,7 +4922,7 @@
               </a:spcAft>
               <a:buSzPts val="1400"/>
               <a:buNone/>
-              <a:defRPr sz="3552"/>
+              <a:defRPr/>
             </a:lvl4pPr>
             <a:lvl5pPr lvl="4" algn="l">
               <a:lnSpc>
@@ -4936,7 +4936,7 @@
               </a:spcAft>
               <a:buSzPts val="1400"/>
               <a:buNone/>
-              <a:defRPr sz="3552"/>
+              <a:defRPr/>
             </a:lvl5pPr>
             <a:lvl6pPr lvl="5" algn="l">
               <a:lnSpc>
@@ -4950,7 +4950,7 @@
               </a:spcAft>
               <a:buSzPts val="1400"/>
               <a:buNone/>
-              <a:defRPr sz="3552"/>
+              <a:defRPr/>
             </a:lvl6pPr>
             <a:lvl7pPr lvl="6" algn="l">
               <a:lnSpc>
@@ -4964,7 +4964,7 @@
               </a:spcAft>
               <a:buSzPts val="1400"/>
               <a:buNone/>
-              <a:defRPr sz="3552"/>
+              <a:defRPr/>
             </a:lvl7pPr>
             <a:lvl8pPr lvl="7" algn="l">
               <a:lnSpc>
@@ -4978,7 +4978,7 @@
               </a:spcAft>
               <a:buSzPts val="1400"/>
               <a:buNone/>
-              <a:defRPr sz="3552"/>
+              <a:defRPr/>
             </a:lvl8pPr>
             <a:lvl9pPr lvl="8" algn="l">
               <a:lnSpc>
@@ -4992,7 +4992,7 @@
               </a:spcAft>
               <a:buSzPts val="1400"/>
               <a:buNone/>
-              <a:defRPr sz="3552"/>
+              <a:defRPr/>
             </a:lvl9pPr>
           </a:lstStyle>
           <a:p/>
@@ -5008,8 +5008,8 @@
         </p:nvSpPr>
         <p:spPr>
           <a:xfrm>
-            <a:off x="5953613" y="12847063"/>
-            <a:ext cx="5517900" cy="738000"/>
+            <a:off x="5953701" y="12847249"/>
+            <a:ext cx="5518065" cy="737979"/>
           </a:xfrm>
           <a:prstGeom prst="rect">
             <a:avLst/>
@@ -5036,7 +5036,7 @@
               </a:spcAft>
               <a:buSzPts val="1400"/>
               <a:buNone/>
-              <a:defRPr sz="2287"/>
+              <a:defRPr/>
             </a:lvl1pPr>
             <a:lvl2pPr lvl="1" algn="l">
               <a:lnSpc>
@@ -5050,7 +5050,7 @@
               </a:spcAft>
               <a:buSzPts val="1400"/>
               <a:buNone/>
-              <a:defRPr sz="3552"/>
+              <a:defRPr/>
             </a:lvl2pPr>
             <a:lvl3pPr lvl="2" algn="l">
               <a:lnSpc>
@@ -5064,7 +5064,7 @@
               </a:spcAft>
               <a:buSzPts val="1400"/>
               <a:buNone/>
-              <a:defRPr sz="3552"/>
+              <a:defRPr/>
             </a:lvl3pPr>
             <a:lvl4pPr lvl="3" algn="l">
               <a:lnSpc>
@@ -5078,7 +5078,7 @@
               </a:spcAft>
               <a:buSzPts val="1400"/>
               <a:buNone/>
-              <a:defRPr sz="3552"/>
+              <a:defRPr/>
             </a:lvl4pPr>
             <a:lvl5pPr lvl="4" algn="l">
               <a:lnSpc>
@@ -5092,7 +5092,7 @@
               </a:spcAft>
               <a:buSzPts val="1400"/>
               <a:buNone/>
-              <a:defRPr sz="3552"/>
+              <a:defRPr/>
             </a:lvl5pPr>
             <a:lvl6pPr lvl="5" algn="l">
               <a:lnSpc>
@@ -5106,7 +5106,7 @@
               </a:spcAft>
               <a:buSzPts val="1400"/>
               <a:buNone/>
-              <a:defRPr sz="3552"/>
+              <a:defRPr/>
             </a:lvl6pPr>
             <a:lvl7pPr lvl="6" algn="l">
               <a:lnSpc>
@@ -5120,7 +5120,7 @@
               </a:spcAft>
               <a:buSzPts val="1400"/>
               <a:buNone/>
-              <a:defRPr sz="3552"/>
+              <a:defRPr/>
             </a:lvl7pPr>
             <a:lvl8pPr lvl="7" algn="l">
               <a:lnSpc>
@@ -5134,7 +5134,7 @@
               </a:spcAft>
               <a:buSzPts val="1400"/>
               <a:buNone/>
-              <a:defRPr sz="3552"/>
+              <a:defRPr/>
             </a:lvl8pPr>
             <a:lvl9pPr lvl="8" algn="l">
               <a:lnSpc>
@@ -5148,7 +5148,7 @@
               </a:spcAft>
               <a:buSzPts val="1400"/>
               <a:buNone/>
-              <a:defRPr sz="3552"/>
+              <a:defRPr/>
             </a:lvl9pPr>
           </a:lstStyle>
           <a:p/>
@@ -5164,8 +5164,8 @@
         </p:nvSpPr>
         <p:spPr>
           <a:xfrm>
-            <a:off x="12488068" y="12847063"/>
-            <a:ext cx="4065900" cy="738000"/>
+            <a:off x="12488252" y="12847249"/>
+            <a:ext cx="4065942" cy="737979"/>
           </a:xfrm>
           <a:prstGeom prst="rect">
             <a:avLst/>
@@ -5468,8 +5468,8 @@
         </p:nvSpPr>
         <p:spPr>
           <a:xfrm>
-            <a:off x="1376472" y="8906955"/>
-            <a:ext cx="14811300" cy="2752800"/>
+            <a:off x="1376492" y="8907084"/>
+            <a:ext cx="14811647" cy="2752982"/>
           </a:xfrm>
           <a:prstGeom prst="rect">
             <a:avLst/>
@@ -5514,7 +5514,7 @@
               </a:spcAft>
               <a:buSzPts val="1400"/>
               <a:buNone/>
-              <a:defRPr sz="1800"/>
+              <a:defRPr/>
             </a:lvl2pPr>
             <a:lvl3pPr lvl="2" algn="l">
               <a:lnSpc>
@@ -5528,7 +5528,7 @@
               </a:spcAft>
               <a:buSzPts val="1400"/>
               <a:buNone/>
-              <a:defRPr sz="1800"/>
+              <a:defRPr/>
             </a:lvl3pPr>
             <a:lvl4pPr lvl="3" algn="l">
               <a:lnSpc>
@@ -5542,7 +5542,7 @@
               </a:spcAft>
               <a:buSzPts val="1400"/>
               <a:buNone/>
-              <a:defRPr sz="1800"/>
+              <a:defRPr/>
             </a:lvl4pPr>
             <a:lvl5pPr lvl="4" algn="l">
               <a:lnSpc>
@@ -5556,7 +5556,7 @@
               </a:spcAft>
               <a:buSzPts val="1400"/>
               <a:buNone/>
-              <a:defRPr sz="1800"/>
+              <a:defRPr/>
             </a:lvl5pPr>
             <a:lvl6pPr lvl="5" algn="l">
               <a:lnSpc>
@@ -5570,7 +5570,7 @@
               </a:spcAft>
               <a:buSzPts val="1400"/>
               <a:buNone/>
-              <a:defRPr sz="1800"/>
+              <a:defRPr/>
             </a:lvl6pPr>
             <a:lvl7pPr lvl="6" algn="l">
               <a:lnSpc>
@@ -5584,7 +5584,7 @@
               </a:spcAft>
               <a:buSzPts val="1400"/>
               <a:buNone/>
-              <a:defRPr sz="1800"/>
+              <a:defRPr/>
             </a:lvl7pPr>
             <a:lvl8pPr lvl="7" algn="l">
               <a:lnSpc>
@@ -5598,7 +5598,7 @@
               </a:spcAft>
               <a:buSzPts val="1400"/>
               <a:buNone/>
-              <a:defRPr sz="1800"/>
+              <a:defRPr/>
             </a:lvl8pPr>
             <a:lvl9pPr lvl="8" algn="l">
               <a:lnSpc>
@@ -5612,7 +5612,7 @@
               </a:spcAft>
               <a:buSzPts val="1400"/>
               <a:buNone/>
-              <a:defRPr sz="1800"/>
+              <a:defRPr/>
             </a:lvl9pPr>
           </a:lstStyle>
           <a:p/>
@@ -5628,8 +5628,8 @@
         </p:nvSpPr>
         <p:spPr>
           <a:xfrm>
-            <a:off x="1376472" y="5874870"/>
-            <a:ext cx="14811300" cy="3032100"/>
+            <a:off x="1376492" y="5874955"/>
+            <a:ext cx="14811647" cy="3032129"/>
           </a:xfrm>
           <a:prstGeom prst="rect">
             <a:avLst/>
@@ -5847,8 +5847,8 @@
         </p:nvSpPr>
         <p:spPr>
           <a:xfrm>
-            <a:off x="871261" y="12847063"/>
-            <a:ext cx="4065900" cy="738000"/>
+            <a:off x="871274" y="12847249"/>
+            <a:ext cx="4065942" cy="737979"/>
           </a:xfrm>
           <a:prstGeom prst="rect">
             <a:avLst/>
@@ -5875,7 +5875,7 @@
               </a:spcAft>
               <a:buSzPts val="1400"/>
               <a:buNone/>
-              <a:defRPr sz="2287"/>
+              <a:defRPr/>
             </a:lvl1pPr>
             <a:lvl2pPr lvl="1" algn="l">
               <a:lnSpc>
@@ -5889,7 +5889,7 @@
               </a:spcAft>
               <a:buSzPts val="1400"/>
               <a:buNone/>
-              <a:defRPr sz="3552"/>
+              <a:defRPr/>
             </a:lvl2pPr>
             <a:lvl3pPr lvl="2" algn="l">
               <a:lnSpc>
@@ -5903,7 +5903,7 @@
               </a:spcAft>
               <a:buSzPts val="1400"/>
               <a:buNone/>
-              <a:defRPr sz="3552"/>
+              <a:defRPr/>
             </a:lvl3pPr>
             <a:lvl4pPr lvl="3" algn="l">
               <a:lnSpc>
@@ -5917,7 +5917,7 @@
               </a:spcAft>
               <a:buSzPts val="1400"/>
               <a:buNone/>
-              <a:defRPr sz="3552"/>
+              <a:defRPr/>
             </a:lvl4pPr>
             <a:lvl5pPr lvl="4" algn="l">
               <a:lnSpc>
@@ -5931,7 +5931,7 @@
               </a:spcAft>
               <a:buSzPts val="1400"/>
               <a:buNone/>
-              <a:defRPr sz="3552"/>
+              <a:defRPr/>
             </a:lvl5pPr>
             <a:lvl6pPr lvl="5" algn="l">
               <a:lnSpc>
@@ -5945,7 +5945,7 @@
               </a:spcAft>
               <a:buSzPts val="1400"/>
               <a:buNone/>
-              <a:defRPr sz="3552"/>
+              <a:defRPr/>
             </a:lvl6pPr>
             <a:lvl7pPr lvl="6" algn="l">
               <a:lnSpc>
@@ -5959,7 +5959,7 @@
               </a:spcAft>
               <a:buSzPts val="1400"/>
               <a:buNone/>
-              <a:defRPr sz="3552"/>
+              <a:defRPr/>
             </a:lvl7pPr>
             <a:lvl8pPr lvl="7" algn="l">
               <a:lnSpc>
@@ -5973,7 +5973,7 @@
               </a:spcAft>
               <a:buSzPts val="1400"/>
               <a:buNone/>
-              <a:defRPr sz="3552"/>
+              <a:defRPr/>
             </a:lvl8pPr>
             <a:lvl9pPr lvl="8" algn="l">
               <a:lnSpc>
@@ -5987,7 +5987,7 @@
               </a:spcAft>
               <a:buSzPts val="1400"/>
               <a:buNone/>
-              <a:defRPr sz="3552"/>
+              <a:defRPr/>
             </a:lvl9pPr>
           </a:lstStyle>
           <a:p/>
@@ -6003,8 +6003,8 @@
         </p:nvSpPr>
         <p:spPr>
           <a:xfrm>
-            <a:off x="5953613" y="12847063"/>
-            <a:ext cx="5517900" cy="738000"/>
+            <a:off x="5953701" y="12847249"/>
+            <a:ext cx="5518065" cy="737979"/>
           </a:xfrm>
           <a:prstGeom prst="rect">
             <a:avLst/>
@@ -6031,7 +6031,7 @@
               </a:spcAft>
               <a:buSzPts val="1400"/>
               <a:buNone/>
-              <a:defRPr sz="2287"/>
+              <a:defRPr/>
             </a:lvl1pPr>
             <a:lvl2pPr lvl="1" algn="l">
               <a:lnSpc>
@@ -6045,7 +6045,7 @@
               </a:spcAft>
               <a:buSzPts val="1400"/>
               <a:buNone/>
-              <a:defRPr sz="3552"/>
+              <a:defRPr/>
             </a:lvl2pPr>
             <a:lvl3pPr lvl="2" algn="l">
               <a:lnSpc>
@@ -6059,7 +6059,7 @@
               </a:spcAft>
               <a:buSzPts val="1400"/>
               <a:buNone/>
-              <a:defRPr sz="3552"/>
+              <a:defRPr/>
             </a:lvl3pPr>
             <a:lvl4pPr lvl="3" algn="l">
               <a:lnSpc>
@@ -6073,7 +6073,7 @@
               </a:spcAft>
               <a:buSzPts val="1400"/>
               <a:buNone/>
-              <a:defRPr sz="3552"/>
+              <a:defRPr/>
             </a:lvl4pPr>
             <a:lvl5pPr lvl="4" algn="l">
               <a:lnSpc>
@@ -6087,7 +6087,7 @@
               </a:spcAft>
               <a:buSzPts val="1400"/>
               <a:buNone/>
-              <a:defRPr sz="3552"/>
+              <a:defRPr/>
             </a:lvl5pPr>
             <a:lvl6pPr lvl="5" algn="l">
               <a:lnSpc>
@@ -6101,7 +6101,7 @@
               </a:spcAft>
               <a:buSzPts val="1400"/>
               <a:buNone/>
-              <a:defRPr sz="3552"/>
+              <a:defRPr/>
             </a:lvl6pPr>
             <a:lvl7pPr lvl="6" algn="l">
               <a:lnSpc>
@@ -6115,7 +6115,7 @@
               </a:spcAft>
               <a:buSzPts val="1400"/>
               <a:buNone/>
-              <a:defRPr sz="3552"/>
+              <a:defRPr/>
             </a:lvl7pPr>
             <a:lvl8pPr lvl="7" algn="l">
               <a:lnSpc>
@@ -6129,7 +6129,7 @@
               </a:spcAft>
               <a:buSzPts val="1400"/>
               <a:buNone/>
-              <a:defRPr sz="3552"/>
+              <a:defRPr/>
             </a:lvl8pPr>
             <a:lvl9pPr lvl="8" algn="l">
               <a:lnSpc>
@@ -6143,7 +6143,7 @@
               </a:spcAft>
               <a:buSzPts val="1400"/>
               <a:buNone/>
-              <a:defRPr sz="3552"/>
+              <a:defRPr/>
             </a:lvl9pPr>
           </a:lstStyle>
           <a:p/>
@@ -6159,8 +6159,8 @@
         </p:nvSpPr>
         <p:spPr>
           <a:xfrm>
-            <a:off x="12488068" y="12847063"/>
-            <a:ext cx="4065900" cy="738000"/>
+            <a:off x="12488252" y="12847249"/>
+            <a:ext cx="4065942" cy="737979"/>
           </a:xfrm>
           <a:prstGeom prst="rect">
             <a:avLst/>
@@ -6463,8 +6463,8 @@
         </p:nvSpPr>
         <p:spPr>
           <a:xfrm>
-            <a:off x="871260" y="555081"/>
-            <a:ext cx="15682800" cy="2310000"/>
+            <a:off x="871273" y="555089"/>
+            <a:ext cx="15682921" cy="2310195"/>
           </a:xfrm>
           <a:prstGeom prst="rect">
             <a:avLst/>
@@ -6494,7 +6494,7 @@
               </a:buClr>
               <a:buSzPts val="1800"/>
               <a:buNone/>
-              <a:defRPr sz="8385"/>
+              <a:defRPr/>
             </a:lvl1pPr>
             <a:lvl2pPr lvl="1" algn="l">
               <a:lnSpc>
@@ -6508,7 +6508,7 @@
               </a:spcAft>
               <a:buSzPts val="1400"/>
               <a:buNone/>
-              <a:defRPr sz="1800"/>
+              <a:defRPr/>
             </a:lvl2pPr>
             <a:lvl3pPr lvl="2" algn="l">
               <a:lnSpc>
@@ -6522,7 +6522,7 @@
               </a:spcAft>
               <a:buSzPts val="1400"/>
               <a:buNone/>
-              <a:defRPr sz="1800"/>
+              <a:defRPr/>
             </a:lvl3pPr>
             <a:lvl4pPr lvl="3" algn="l">
               <a:lnSpc>
@@ -6536,7 +6536,7 @@
               </a:spcAft>
               <a:buSzPts val="1400"/>
               <a:buNone/>
-              <a:defRPr sz="1800"/>
+              <a:defRPr/>
             </a:lvl4pPr>
             <a:lvl5pPr lvl="4" algn="l">
               <a:lnSpc>
@@ -6550,7 +6550,7 @@
               </a:spcAft>
               <a:buSzPts val="1400"/>
               <a:buNone/>
-              <a:defRPr sz="1800"/>
+              <a:defRPr/>
             </a:lvl5pPr>
             <a:lvl6pPr lvl="5" algn="l">
               <a:lnSpc>
@@ -6564,7 +6564,7 @@
               </a:spcAft>
               <a:buSzPts val="1400"/>
               <a:buNone/>
-              <a:defRPr sz="1800"/>
+              <a:defRPr/>
             </a:lvl6pPr>
             <a:lvl7pPr lvl="6" algn="l">
               <a:lnSpc>
@@ -6578,7 +6578,7 @@
               </a:spcAft>
               <a:buSzPts val="1400"/>
               <a:buNone/>
-              <a:defRPr sz="1800"/>
+              <a:defRPr/>
             </a:lvl7pPr>
             <a:lvl8pPr lvl="7" algn="l">
               <a:lnSpc>
@@ -6592,7 +6592,7 @@
               </a:spcAft>
               <a:buSzPts val="1400"/>
               <a:buNone/>
-              <a:defRPr sz="1800"/>
+              <a:defRPr/>
             </a:lvl8pPr>
             <a:lvl9pPr lvl="8" algn="l">
               <a:lnSpc>
@@ -6606,7 +6606,7 @@
               </a:spcAft>
               <a:buSzPts val="1400"/>
               <a:buNone/>
-              <a:defRPr sz="1800"/>
+              <a:defRPr/>
             </a:lvl9pPr>
           </a:lstStyle>
           <a:p/>
@@ -6622,8 +6622,8 @@
         </p:nvSpPr>
         <p:spPr>
           <a:xfrm>
-            <a:off x="871260" y="3234226"/>
-            <a:ext cx="7696200" cy="9147600"/>
+            <a:off x="871273" y="3234273"/>
+            <a:ext cx="7696248" cy="9147730"/>
           </a:xfrm>
           <a:prstGeom prst="rect">
             <a:avLst/>
@@ -6638,7 +6638,7 @@
             <a:normAutofit/>
           </a:bodyPr>
           <a:lstStyle>
-            <a:lvl1pPr indent="-567431" lvl="0" marL="457200" algn="l">
+            <a:lvl1pPr indent="-567436" lvl="0" marL="457200" algn="l">
               <a:lnSpc>
                 <a:spcPct val="100000"/>
               </a:lnSpc>
@@ -6655,7 +6655,7 @@
               <a:buChar char="•"/>
               <a:defRPr sz="5336"/>
             </a:lvl1pPr>
-            <a:lvl2pPr indent="-519045" lvl="1" marL="914400" algn="l">
+            <a:lvl2pPr indent="-519049" lvl="1" marL="914400" algn="l">
               <a:lnSpc>
                 <a:spcPct val="100000"/>
               </a:lnSpc>
@@ -6672,7 +6672,7 @@
               <a:buChar char="–"/>
               <a:defRPr sz="4574"/>
             </a:lvl2pPr>
-            <a:lvl3pPr indent="-470595" lvl="2" marL="1371600" algn="l">
+            <a:lvl3pPr indent="-470599" lvl="2" marL="1371600" algn="l">
               <a:lnSpc>
                 <a:spcPct val="100000"/>
               </a:lnSpc>
@@ -6689,7 +6689,7 @@
               <a:buChar char="•"/>
               <a:defRPr sz="3811"/>
             </a:lvl3pPr>
-            <a:lvl4pPr indent="-446402" lvl="3" marL="1828800" algn="l">
+            <a:lvl4pPr indent="-446405" lvl="3" marL="1828800" algn="l">
               <a:lnSpc>
                 <a:spcPct val="100000"/>
               </a:lnSpc>
@@ -6706,7 +6706,7 @@
               <a:buChar char="–"/>
               <a:defRPr sz="3430"/>
             </a:lvl4pPr>
-            <a:lvl5pPr indent="-446402" lvl="4" marL="2286000" algn="l">
+            <a:lvl5pPr indent="-446405" lvl="4" marL="2286000" algn="l">
               <a:lnSpc>
                 <a:spcPct val="100000"/>
               </a:lnSpc>
@@ -6723,7 +6723,7 @@
               <a:buChar char="»"/>
               <a:defRPr sz="3430"/>
             </a:lvl5pPr>
-            <a:lvl6pPr indent="-446402" lvl="5" marL="2743200" algn="l">
+            <a:lvl6pPr indent="-446405" lvl="5" marL="2743200" algn="l">
               <a:lnSpc>
                 <a:spcPct val="100000"/>
               </a:lnSpc>
@@ -6740,7 +6740,7 @@
               <a:buChar char="•"/>
               <a:defRPr sz="3430"/>
             </a:lvl6pPr>
-            <a:lvl7pPr indent="-446402" lvl="6" marL="3200400" algn="l">
+            <a:lvl7pPr indent="-446405" lvl="6" marL="3200400" algn="l">
               <a:lnSpc>
                 <a:spcPct val="100000"/>
               </a:lnSpc>
@@ -6757,7 +6757,7 @@
               <a:buChar char="•"/>
               <a:defRPr sz="3430"/>
             </a:lvl7pPr>
-            <a:lvl8pPr indent="-446402" lvl="7" marL="3657600" algn="l">
+            <a:lvl8pPr indent="-446405" lvl="7" marL="3657600" algn="l">
               <a:lnSpc>
                 <a:spcPct val="100000"/>
               </a:lnSpc>
@@ -6774,7 +6774,7 @@
               <a:buChar char="•"/>
               <a:defRPr sz="3430"/>
             </a:lvl8pPr>
-            <a:lvl9pPr indent="-446402" lvl="8" marL="4114800" algn="l">
+            <a:lvl9pPr indent="-446405" lvl="8" marL="4114800" algn="l">
               <a:lnSpc>
                 <a:spcPct val="100000"/>
               </a:lnSpc>
@@ -6805,8 +6805,8 @@
         </p:nvSpPr>
         <p:spPr>
           <a:xfrm>
-            <a:off x="8857815" y="3234226"/>
-            <a:ext cx="7696200" cy="9147600"/>
+            <a:off x="8857946" y="3234273"/>
+            <a:ext cx="7696248" cy="9147730"/>
           </a:xfrm>
           <a:prstGeom prst="rect">
             <a:avLst/>
@@ -6821,7 +6821,7 @@
             <a:normAutofit/>
           </a:bodyPr>
           <a:lstStyle>
-            <a:lvl1pPr indent="-567431" lvl="0" marL="457200" algn="l">
+            <a:lvl1pPr indent="-567436" lvl="0" marL="457200" algn="l">
               <a:lnSpc>
                 <a:spcPct val="100000"/>
               </a:lnSpc>
@@ -6838,7 +6838,7 @@
               <a:buChar char="•"/>
               <a:defRPr sz="5336"/>
             </a:lvl1pPr>
-            <a:lvl2pPr indent="-519045" lvl="1" marL="914400" algn="l">
+            <a:lvl2pPr indent="-519049" lvl="1" marL="914400" algn="l">
               <a:lnSpc>
                 <a:spcPct val="100000"/>
               </a:lnSpc>
@@ -6855,7 +6855,7 @@
               <a:buChar char="–"/>
               <a:defRPr sz="4574"/>
             </a:lvl2pPr>
-            <a:lvl3pPr indent="-470595" lvl="2" marL="1371600" algn="l">
+            <a:lvl3pPr indent="-470599" lvl="2" marL="1371600" algn="l">
               <a:lnSpc>
                 <a:spcPct val="100000"/>
               </a:lnSpc>
@@ -6872,7 +6872,7 @@
               <a:buChar char="•"/>
               <a:defRPr sz="3811"/>
             </a:lvl3pPr>
-            <a:lvl4pPr indent="-446402" lvl="3" marL="1828800" algn="l">
+            <a:lvl4pPr indent="-446405" lvl="3" marL="1828800" algn="l">
               <a:lnSpc>
                 <a:spcPct val="100000"/>
               </a:lnSpc>
@@ -6889,7 +6889,7 @@
               <a:buChar char="–"/>
               <a:defRPr sz="3430"/>
             </a:lvl4pPr>
-            <a:lvl5pPr indent="-446402" lvl="4" marL="2286000" algn="l">
+            <a:lvl5pPr indent="-446405" lvl="4" marL="2286000" algn="l">
               <a:lnSpc>
                 <a:spcPct val="100000"/>
               </a:lnSpc>
@@ -6906,7 +6906,7 @@
               <a:buChar char="»"/>
               <a:defRPr sz="3430"/>
             </a:lvl5pPr>
-            <a:lvl6pPr indent="-446402" lvl="5" marL="2743200" algn="l">
+            <a:lvl6pPr indent="-446405" lvl="5" marL="2743200" algn="l">
               <a:lnSpc>
                 <a:spcPct val="100000"/>
               </a:lnSpc>
@@ -6923,7 +6923,7 @@
               <a:buChar char="•"/>
               <a:defRPr sz="3430"/>
             </a:lvl6pPr>
-            <a:lvl7pPr indent="-446402" lvl="6" marL="3200400" algn="l">
+            <a:lvl7pPr indent="-446405" lvl="6" marL="3200400" algn="l">
               <a:lnSpc>
                 <a:spcPct val="100000"/>
               </a:lnSpc>
@@ -6940,7 +6940,7 @@
               <a:buChar char="•"/>
               <a:defRPr sz="3430"/>
             </a:lvl7pPr>
-            <a:lvl8pPr indent="-446402" lvl="7" marL="3657600" algn="l">
+            <a:lvl8pPr indent="-446405" lvl="7" marL="3657600" algn="l">
               <a:lnSpc>
                 <a:spcPct val="100000"/>
               </a:lnSpc>
@@ -6957,7 +6957,7 @@
               <a:buChar char="•"/>
               <a:defRPr sz="3430"/>
             </a:lvl8pPr>
-            <a:lvl9pPr indent="-446402" lvl="8" marL="4114800" algn="l">
+            <a:lvl9pPr indent="-446405" lvl="8" marL="4114800" algn="l">
               <a:lnSpc>
                 <a:spcPct val="100000"/>
               </a:lnSpc>
@@ -6988,8 +6988,8 @@
         </p:nvSpPr>
         <p:spPr>
           <a:xfrm>
-            <a:off x="871261" y="12847063"/>
-            <a:ext cx="4065900" cy="738000"/>
+            <a:off x="871274" y="12847249"/>
+            <a:ext cx="4065942" cy="737979"/>
           </a:xfrm>
           <a:prstGeom prst="rect">
             <a:avLst/>
@@ -7016,7 +7016,7 @@
               </a:spcAft>
               <a:buSzPts val="1400"/>
               <a:buNone/>
-              <a:defRPr sz="2287"/>
+              <a:defRPr/>
             </a:lvl1pPr>
             <a:lvl2pPr lvl="1" algn="l">
               <a:lnSpc>
@@ -7030,7 +7030,7 @@
               </a:spcAft>
               <a:buSzPts val="1400"/>
               <a:buNone/>
-              <a:defRPr sz="3552"/>
+              <a:defRPr/>
             </a:lvl2pPr>
             <a:lvl3pPr lvl="2" algn="l">
               <a:lnSpc>
@@ -7044,7 +7044,7 @@
               </a:spcAft>
               <a:buSzPts val="1400"/>
               <a:buNone/>
-              <a:defRPr sz="3552"/>
+              <a:defRPr/>
             </a:lvl3pPr>
             <a:lvl4pPr lvl="3" algn="l">
               <a:lnSpc>
@@ -7058,7 +7058,7 @@
               </a:spcAft>
               <a:buSzPts val="1400"/>
               <a:buNone/>
-              <a:defRPr sz="3552"/>
+              <a:defRPr/>
             </a:lvl4pPr>
             <a:lvl5pPr lvl="4" algn="l">
               <a:lnSpc>
@@ -7072,7 +7072,7 @@
               </a:spcAft>
               <a:buSzPts val="1400"/>
               <a:buNone/>
-              <a:defRPr sz="3552"/>
+              <a:defRPr/>
             </a:lvl5pPr>
             <a:lvl6pPr lvl="5" algn="l">
               <a:lnSpc>
@@ -7086,7 +7086,7 @@
               </a:spcAft>
               <a:buSzPts val="1400"/>
               <a:buNone/>
-              <a:defRPr sz="3552"/>
+              <a:defRPr/>
             </a:lvl6pPr>
             <a:lvl7pPr lvl="6" algn="l">
               <a:lnSpc>
@@ -7100,7 +7100,7 @@
               </a:spcAft>
               <a:buSzPts val="1400"/>
               <a:buNone/>
-              <a:defRPr sz="3552"/>
+              <a:defRPr/>
             </a:lvl7pPr>
             <a:lvl8pPr lvl="7" algn="l">
               <a:lnSpc>
@@ -7114,7 +7114,7 @@
               </a:spcAft>
               <a:buSzPts val="1400"/>
               <a:buNone/>
-              <a:defRPr sz="3552"/>
+              <a:defRPr/>
             </a:lvl8pPr>
             <a:lvl9pPr lvl="8" algn="l">
               <a:lnSpc>
@@ -7128,7 +7128,7 @@
               </a:spcAft>
               <a:buSzPts val="1400"/>
               <a:buNone/>
-              <a:defRPr sz="3552"/>
+              <a:defRPr/>
             </a:lvl9pPr>
           </a:lstStyle>
           <a:p/>
@@ -7144,8 +7144,8 @@
         </p:nvSpPr>
         <p:spPr>
           <a:xfrm>
-            <a:off x="5953613" y="12847063"/>
-            <a:ext cx="5517900" cy="738000"/>
+            <a:off x="5953701" y="12847249"/>
+            <a:ext cx="5518065" cy="737979"/>
           </a:xfrm>
           <a:prstGeom prst="rect">
             <a:avLst/>
@@ -7172,7 +7172,7 @@
               </a:spcAft>
               <a:buSzPts val="1400"/>
               <a:buNone/>
-              <a:defRPr sz="2287"/>
+              <a:defRPr/>
             </a:lvl1pPr>
             <a:lvl2pPr lvl="1" algn="l">
               <a:lnSpc>
@@ -7186,7 +7186,7 @@
               </a:spcAft>
               <a:buSzPts val="1400"/>
               <a:buNone/>
-              <a:defRPr sz="3552"/>
+              <a:defRPr/>
             </a:lvl2pPr>
             <a:lvl3pPr lvl="2" algn="l">
               <a:lnSpc>
@@ -7200,7 +7200,7 @@
               </a:spcAft>
               <a:buSzPts val="1400"/>
               <a:buNone/>
-              <a:defRPr sz="3552"/>
+              <a:defRPr/>
             </a:lvl3pPr>
             <a:lvl4pPr lvl="3" algn="l">
               <a:lnSpc>
@@ -7214,7 +7214,7 @@
               </a:spcAft>
               <a:buSzPts val="1400"/>
               <a:buNone/>
-              <a:defRPr sz="3552"/>
+              <a:defRPr/>
             </a:lvl4pPr>
             <a:lvl5pPr lvl="4" algn="l">
               <a:lnSpc>
@@ -7228,7 +7228,7 @@
               </a:spcAft>
               <a:buSzPts val="1400"/>
               <a:buNone/>
-              <a:defRPr sz="3552"/>
+              <a:defRPr/>
             </a:lvl5pPr>
             <a:lvl6pPr lvl="5" algn="l">
               <a:lnSpc>
@@ -7242,7 +7242,7 @@
               </a:spcAft>
               <a:buSzPts val="1400"/>
               <a:buNone/>
-              <a:defRPr sz="3552"/>
+              <a:defRPr/>
             </a:lvl6pPr>
             <a:lvl7pPr lvl="6" algn="l">
               <a:lnSpc>
@@ -7256,7 +7256,7 @@
               </a:spcAft>
               <a:buSzPts val="1400"/>
               <a:buNone/>
-              <a:defRPr sz="3552"/>
+              <a:defRPr/>
             </a:lvl7pPr>
             <a:lvl8pPr lvl="7" algn="l">
               <a:lnSpc>
@@ -7270,7 +7270,7 @@
               </a:spcAft>
               <a:buSzPts val="1400"/>
               <a:buNone/>
-              <a:defRPr sz="3552"/>
+              <a:defRPr/>
             </a:lvl8pPr>
             <a:lvl9pPr lvl="8" algn="l">
               <a:lnSpc>
@@ -7284,7 +7284,7 @@
               </a:spcAft>
               <a:buSzPts val="1400"/>
               <a:buNone/>
-              <a:defRPr sz="3552"/>
+              <a:defRPr/>
             </a:lvl9pPr>
           </a:lstStyle>
           <a:p/>
@@ -7300,8 +7300,8 @@
         </p:nvSpPr>
         <p:spPr>
           <a:xfrm>
-            <a:off x="12488068" y="12847063"/>
-            <a:ext cx="4065900" cy="738000"/>
+            <a:off x="12488252" y="12847249"/>
+            <a:ext cx="4065942" cy="737979"/>
           </a:xfrm>
           <a:prstGeom prst="rect">
             <a:avLst/>
@@ -7604,8 +7604,8 @@
         </p:nvSpPr>
         <p:spPr>
           <a:xfrm>
-            <a:off x="871260" y="555081"/>
-            <a:ext cx="15682800" cy="2310000"/>
+            <a:off x="871273" y="555089"/>
+            <a:ext cx="15682921" cy="2310195"/>
           </a:xfrm>
           <a:prstGeom prst="rect">
             <a:avLst/>
@@ -7636,7 +7636,7 @@
               <a:buSzPts val="8385"/>
               <a:buFont typeface="Calibri"/>
               <a:buNone/>
-              <a:defRPr sz="8385"/>
+              <a:defRPr/>
             </a:lvl1pPr>
             <a:lvl2pPr lvl="1" algn="l">
               <a:lnSpc>
@@ -7650,7 +7650,7 @@
               </a:spcAft>
               <a:buSzPts val="1400"/>
               <a:buNone/>
-              <a:defRPr sz="1800"/>
+              <a:defRPr/>
             </a:lvl2pPr>
             <a:lvl3pPr lvl="2" algn="l">
               <a:lnSpc>
@@ -7664,7 +7664,7 @@
               </a:spcAft>
               <a:buSzPts val="1400"/>
               <a:buNone/>
-              <a:defRPr sz="1800"/>
+              <a:defRPr/>
             </a:lvl3pPr>
             <a:lvl4pPr lvl="3" algn="l">
               <a:lnSpc>
@@ -7678,7 +7678,7 @@
               </a:spcAft>
               <a:buSzPts val="1400"/>
               <a:buNone/>
-              <a:defRPr sz="1800"/>
+              <a:defRPr/>
             </a:lvl4pPr>
             <a:lvl5pPr lvl="4" algn="l">
               <a:lnSpc>
@@ -7692,7 +7692,7 @@
               </a:spcAft>
               <a:buSzPts val="1400"/>
               <a:buNone/>
-              <a:defRPr sz="1800"/>
+              <a:defRPr/>
             </a:lvl5pPr>
             <a:lvl6pPr lvl="5" algn="l">
               <a:lnSpc>
@@ -7706,7 +7706,7 @@
               </a:spcAft>
               <a:buSzPts val="1400"/>
               <a:buNone/>
-              <a:defRPr sz="1800"/>
+              <a:defRPr/>
             </a:lvl6pPr>
             <a:lvl7pPr lvl="6" algn="l">
               <a:lnSpc>
@@ -7720,7 +7720,7 @@
               </a:spcAft>
               <a:buSzPts val="1400"/>
               <a:buNone/>
-              <a:defRPr sz="1800"/>
+              <a:defRPr/>
             </a:lvl7pPr>
             <a:lvl8pPr lvl="7" algn="l">
               <a:lnSpc>
@@ -7734,7 +7734,7 @@
               </a:spcAft>
               <a:buSzPts val="1400"/>
               <a:buNone/>
-              <a:defRPr sz="1800"/>
+              <a:defRPr/>
             </a:lvl8pPr>
             <a:lvl9pPr lvl="8" algn="l">
               <a:lnSpc>
@@ -7748,7 +7748,7 @@
               </a:spcAft>
               <a:buSzPts val="1400"/>
               <a:buNone/>
-              <a:defRPr sz="1800"/>
+              <a:defRPr/>
             </a:lvl9pPr>
           </a:lstStyle>
           <a:p/>
@@ -7764,8 +7764,8 @@
         </p:nvSpPr>
         <p:spPr>
           <a:xfrm>
-            <a:off x="871260" y="3102676"/>
-            <a:ext cx="7699200" cy="1293000"/>
+            <a:off x="871273" y="3102721"/>
+            <a:ext cx="7699274" cy="1293066"/>
           </a:xfrm>
           <a:prstGeom prst="rect">
             <a:avLst/>
@@ -7947,8 +7947,8 @@
         </p:nvSpPr>
         <p:spPr>
           <a:xfrm>
-            <a:off x="871260" y="4395723"/>
-            <a:ext cx="7699200" cy="7986000"/>
+            <a:off x="871273" y="4395787"/>
+            <a:ext cx="7699274" cy="7986215"/>
           </a:xfrm>
           <a:prstGeom prst="rect">
             <a:avLst/>
@@ -7963,7 +7963,7 @@
             <a:normAutofit/>
           </a:bodyPr>
           <a:lstStyle>
-            <a:lvl1pPr indent="-519045" lvl="0" marL="457200" algn="l">
+            <a:lvl1pPr indent="-519049" lvl="0" marL="457200" algn="l">
               <a:lnSpc>
                 <a:spcPct val="100000"/>
               </a:lnSpc>
@@ -7980,7 +7980,7 @@
               <a:buChar char="•"/>
               <a:defRPr sz="4574"/>
             </a:lvl1pPr>
-            <a:lvl2pPr indent="-470595" lvl="1" marL="914400" algn="l">
+            <a:lvl2pPr indent="-470599" lvl="1" marL="914400" algn="l">
               <a:lnSpc>
                 <a:spcPct val="100000"/>
               </a:lnSpc>
@@ -7997,7 +7997,7 @@
               <a:buChar char="–"/>
               <a:defRPr sz="3811"/>
             </a:lvl2pPr>
-            <a:lvl3pPr indent="-446402" lvl="2" marL="1371600" algn="l">
+            <a:lvl3pPr indent="-446405" lvl="2" marL="1371600" algn="l">
               <a:lnSpc>
                 <a:spcPct val="100000"/>
               </a:lnSpc>
@@ -8014,7 +8014,7 @@
               <a:buChar char="•"/>
               <a:defRPr sz="3430"/>
             </a:lvl3pPr>
-            <a:lvl4pPr indent="-422209" lvl="3" marL="1828800" algn="l">
+            <a:lvl4pPr indent="-422212" lvl="3" marL="1828800" algn="l">
               <a:lnSpc>
                 <a:spcPct val="100000"/>
               </a:lnSpc>
@@ -8031,7 +8031,7 @@
               <a:buChar char="–"/>
               <a:defRPr sz="3049"/>
             </a:lvl4pPr>
-            <a:lvl5pPr indent="-422209" lvl="4" marL="2286000" algn="l">
+            <a:lvl5pPr indent="-422211" lvl="4" marL="2286000" algn="l">
               <a:lnSpc>
                 <a:spcPct val="100000"/>
               </a:lnSpc>
@@ -8048,7 +8048,7 @@
               <a:buChar char="»"/>
               <a:defRPr sz="3049"/>
             </a:lvl5pPr>
-            <a:lvl6pPr indent="-422209" lvl="5" marL="2743200" algn="l">
+            <a:lvl6pPr indent="-422211" lvl="5" marL="2743200" algn="l">
               <a:lnSpc>
                 <a:spcPct val="100000"/>
               </a:lnSpc>
@@ -8065,7 +8065,7 @@
               <a:buChar char="•"/>
               <a:defRPr sz="3049"/>
             </a:lvl6pPr>
-            <a:lvl7pPr indent="-422209" lvl="6" marL="3200400" algn="l">
+            <a:lvl7pPr indent="-422211" lvl="6" marL="3200400" algn="l">
               <a:lnSpc>
                 <a:spcPct val="100000"/>
               </a:lnSpc>
@@ -8082,7 +8082,7 @@
               <a:buChar char="•"/>
               <a:defRPr sz="3049"/>
             </a:lvl7pPr>
-            <a:lvl8pPr indent="-422209" lvl="7" marL="3657600" algn="l">
+            <a:lvl8pPr indent="-422211" lvl="7" marL="3657600" algn="l">
               <a:lnSpc>
                 <a:spcPct val="100000"/>
               </a:lnSpc>
@@ -8099,7 +8099,7 @@
               <a:buChar char="•"/>
               <a:defRPr sz="3049"/>
             </a:lvl8pPr>
-            <a:lvl9pPr indent="-422209" lvl="8" marL="4114800" algn="l">
+            <a:lvl9pPr indent="-422211" lvl="8" marL="4114800" algn="l">
               <a:lnSpc>
                 <a:spcPct val="100000"/>
               </a:lnSpc>
@@ -8130,8 +8130,8 @@
         </p:nvSpPr>
         <p:spPr>
           <a:xfrm>
-            <a:off x="8851765" y="3102676"/>
-            <a:ext cx="7702200" cy="1293000"/>
+            <a:off x="8851896" y="3102721"/>
+            <a:ext cx="7702299" cy="1293066"/>
           </a:xfrm>
           <a:prstGeom prst="rect">
             <a:avLst/>
@@ -8313,8 +8313,8 @@
         </p:nvSpPr>
         <p:spPr>
           <a:xfrm>
-            <a:off x="8851765" y="4395723"/>
-            <a:ext cx="7702200" cy="7986000"/>
+            <a:off x="8851896" y="4395787"/>
+            <a:ext cx="7702299" cy="7986215"/>
           </a:xfrm>
           <a:prstGeom prst="rect">
             <a:avLst/>
@@ -8329,7 +8329,7 @@
             <a:normAutofit/>
           </a:bodyPr>
           <a:lstStyle>
-            <a:lvl1pPr indent="-519045" lvl="0" marL="457200" algn="l">
+            <a:lvl1pPr indent="-519049" lvl="0" marL="457200" algn="l">
               <a:lnSpc>
                 <a:spcPct val="100000"/>
               </a:lnSpc>
@@ -8346,7 +8346,7 @@
               <a:buChar char="•"/>
               <a:defRPr sz="4574"/>
             </a:lvl1pPr>
-            <a:lvl2pPr indent="-470595" lvl="1" marL="914400" algn="l">
+            <a:lvl2pPr indent="-470599" lvl="1" marL="914400" algn="l">
               <a:lnSpc>
                 <a:spcPct val="100000"/>
               </a:lnSpc>
@@ -8363,7 +8363,7 @@
               <a:buChar char="–"/>
               <a:defRPr sz="3811"/>
             </a:lvl2pPr>
-            <a:lvl3pPr indent="-446402" lvl="2" marL="1371600" algn="l">
+            <a:lvl3pPr indent="-446405" lvl="2" marL="1371600" algn="l">
               <a:lnSpc>
                 <a:spcPct val="100000"/>
               </a:lnSpc>
@@ -8380,7 +8380,7 @@
               <a:buChar char="•"/>
               <a:defRPr sz="3430"/>
             </a:lvl3pPr>
-            <a:lvl4pPr indent="-422209" lvl="3" marL="1828800" algn="l">
+            <a:lvl4pPr indent="-422212" lvl="3" marL="1828800" algn="l">
               <a:lnSpc>
                 <a:spcPct val="100000"/>
               </a:lnSpc>
@@ -8397,7 +8397,7 @@
               <a:buChar char="–"/>
               <a:defRPr sz="3049"/>
             </a:lvl4pPr>
-            <a:lvl5pPr indent="-422209" lvl="4" marL="2286000" algn="l">
+            <a:lvl5pPr indent="-422211" lvl="4" marL="2286000" algn="l">
               <a:lnSpc>
                 <a:spcPct val="100000"/>
               </a:lnSpc>
@@ -8414,7 +8414,7 @@
               <a:buChar char="»"/>
               <a:defRPr sz="3049"/>
             </a:lvl5pPr>
-            <a:lvl6pPr indent="-422209" lvl="5" marL="2743200" algn="l">
+            <a:lvl6pPr indent="-422211" lvl="5" marL="2743200" algn="l">
               <a:lnSpc>
                 <a:spcPct val="100000"/>
               </a:lnSpc>
@@ -8431,7 +8431,7 @@
               <a:buChar char="•"/>
               <a:defRPr sz="3049"/>
             </a:lvl6pPr>
-            <a:lvl7pPr indent="-422209" lvl="6" marL="3200400" algn="l">
+            <a:lvl7pPr indent="-422211" lvl="6" marL="3200400" algn="l">
               <a:lnSpc>
                 <a:spcPct val="100000"/>
               </a:lnSpc>
@@ -8448,7 +8448,7 @@
               <a:buChar char="•"/>
               <a:defRPr sz="3049"/>
             </a:lvl7pPr>
-            <a:lvl8pPr indent="-422209" lvl="7" marL="3657600" algn="l">
+            <a:lvl8pPr indent="-422211" lvl="7" marL="3657600" algn="l">
               <a:lnSpc>
                 <a:spcPct val="100000"/>
               </a:lnSpc>
@@ -8465,7 +8465,7 @@
               <a:buChar char="•"/>
               <a:defRPr sz="3049"/>
             </a:lvl8pPr>
-            <a:lvl9pPr indent="-422209" lvl="8" marL="4114800" algn="l">
+            <a:lvl9pPr indent="-422211" lvl="8" marL="4114800" algn="l">
               <a:lnSpc>
                 <a:spcPct val="100000"/>
               </a:lnSpc>
@@ -8496,8 +8496,8 @@
         </p:nvSpPr>
         <p:spPr>
           <a:xfrm>
-            <a:off x="871261" y="12847063"/>
-            <a:ext cx="4065900" cy="738000"/>
+            <a:off x="871274" y="12847249"/>
+            <a:ext cx="4065942" cy="737979"/>
           </a:xfrm>
           <a:prstGeom prst="rect">
             <a:avLst/>
@@ -8524,7 +8524,7 @@
               </a:spcAft>
               <a:buSzPts val="1400"/>
               <a:buNone/>
-              <a:defRPr sz="2287"/>
+              <a:defRPr/>
             </a:lvl1pPr>
             <a:lvl2pPr lvl="1" algn="l">
               <a:lnSpc>
@@ -8538,7 +8538,7 @@
               </a:spcAft>
               <a:buSzPts val="1400"/>
               <a:buNone/>
-              <a:defRPr sz="3552"/>
+              <a:defRPr/>
             </a:lvl2pPr>
             <a:lvl3pPr lvl="2" algn="l">
               <a:lnSpc>
@@ -8552,7 +8552,7 @@
               </a:spcAft>
               <a:buSzPts val="1400"/>
               <a:buNone/>
-              <a:defRPr sz="3552"/>
+              <a:defRPr/>
             </a:lvl3pPr>
             <a:lvl4pPr lvl="3" algn="l">
               <a:lnSpc>
@@ -8566,7 +8566,7 @@
               </a:spcAft>
               <a:buSzPts val="1400"/>
               <a:buNone/>
-              <a:defRPr sz="3552"/>
+              <a:defRPr/>
             </a:lvl4pPr>
             <a:lvl5pPr lvl="4" algn="l">
               <a:lnSpc>
@@ -8580,7 +8580,7 @@
               </a:spcAft>
               <a:buSzPts val="1400"/>
               <a:buNone/>
-              <a:defRPr sz="3552"/>
+              <a:defRPr/>
             </a:lvl5pPr>
             <a:lvl6pPr lvl="5" algn="l">
               <a:lnSpc>
@@ -8594,7 +8594,7 @@
               </a:spcAft>
               <a:buSzPts val="1400"/>
               <a:buNone/>
-              <a:defRPr sz="3552"/>
+              <a:defRPr/>
             </a:lvl6pPr>
             <a:lvl7pPr lvl="6" algn="l">
               <a:lnSpc>
@@ -8608,7 +8608,7 @@
               </a:spcAft>
               <a:buSzPts val="1400"/>
               <a:buNone/>
-              <a:defRPr sz="3552"/>
+              <a:defRPr/>
             </a:lvl7pPr>
             <a:lvl8pPr lvl="7" algn="l">
               <a:lnSpc>
@@ -8622,7 +8622,7 @@
               </a:spcAft>
               <a:buSzPts val="1400"/>
               <a:buNone/>
-              <a:defRPr sz="3552"/>
+              <a:defRPr/>
             </a:lvl8pPr>
             <a:lvl9pPr lvl="8" algn="l">
               <a:lnSpc>
@@ -8636,7 +8636,7 @@
               </a:spcAft>
               <a:buSzPts val="1400"/>
               <a:buNone/>
-              <a:defRPr sz="3552"/>
+              <a:defRPr/>
             </a:lvl9pPr>
           </a:lstStyle>
           <a:p/>
@@ -8652,8 +8652,8 @@
         </p:nvSpPr>
         <p:spPr>
           <a:xfrm>
-            <a:off x="5953613" y="12847063"/>
-            <a:ext cx="5517900" cy="738000"/>
+            <a:off x="5953701" y="12847249"/>
+            <a:ext cx="5518065" cy="737979"/>
           </a:xfrm>
           <a:prstGeom prst="rect">
             <a:avLst/>
@@ -8680,7 +8680,7 @@
               </a:spcAft>
               <a:buSzPts val="1400"/>
               <a:buNone/>
-              <a:defRPr sz="2287"/>
+              <a:defRPr/>
             </a:lvl1pPr>
             <a:lvl2pPr lvl="1" algn="l">
               <a:lnSpc>
@@ -8694,7 +8694,7 @@
               </a:spcAft>
               <a:buSzPts val="1400"/>
               <a:buNone/>
-              <a:defRPr sz="3552"/>
+              <a:defRPr/>
             </a:lvl2pPr>
             <a:lvl3pPr lvl="2" algn="l">
               <a:lnSpc>
@@ -8708,7 +8708,7 @@
               </a:spcAft>
               <a:buSzPts val="1400"/>
               <a:buNone/>
-              <a:defRPr sz="3552"/>
+              <a:defRPr/>
             </a:lvl3pPr>
             <a:lvl4pPr lvl="3" algn="l">
               <a:lnSpc>
@@ -8722,7 +8722,7 @@
               </a:spcAft>
               <a:buSzPts val="1400"/>
               <a:buNone/>
-              <a:defRPr sz="3552"/>
+              <a:defRPr/>
             </a:lvl4pPr>
             <a:lvl5pPr lvl="4" algn="l">
               <a:lnSpc>
@@ -8736,7 +8736,7 @@
               </a:spcAft>
               <a:buSzPts val="1400"/>
               <a:buNone/>
-              <a:defRPr sz="3552"/>
+              <a:defRPr/>
             </a:lvl5pPr>
             <a:lvl6pPr lvl="5" algn="l">
               <a:lnSpc>
@@ -8750,7 +8750,7 @@
               </a:spcAft>
               <a:buSzPts val="1400"/>
               <a:buNone/>
-              <a:defRPr sz="3552"/>
+              <a:defRPr/>
             </a:lvl6pPr>
             <a:lvl7pPr lvl="6" algn="l">
               <a:lnSpc>
@@ -8764,7 +8764,7 @@
               </a:spcAft>
               <a:buSzPts val="1400"/>
               <a:buNone/>
-              <a:defRPr sz="3552"/>
+              <a:defRPr/>
             </a:lvl7pPr>
             <a:lvl8pPr lvl="7" algn="l">
               <a:lnSpc>
@@ -8778,7 +8778,7 @@
               </a:spcAft>
               <a:buSzPts val="1400"/>
               <a:buNone/>
-              <a:defRPr sz="3552"/>
+              <a:defRPr/>
             </a:lvl8pPr>
             <a:lvl9pPr lvl="8" algn="l">
               <a:lnSpc>
@@ -8792,7 +8792,7 @@
               </a:spcAft>
               <a:buSzPts val="1400"/>
               <a:buNone/>
-              <a:defRPr sz="3552"/>
+              <a:defRPr/>
             </a:lvl9pPr>
           </a:lstStyle>
           <a:p/>
@@ -8808,8 +8808,8 @@
         </p:nvSpPr>
         <p:spPr>
           <a:xfrm>
-            <a:off x="12488068" y="12847063"/>
-            <a:ext cx="4065900" cy="738000"/>
+            <a:off x="12488252" y="12847249"/>
+            <a:ext cx="4065942" cy="737979"/>
           </a:xfrm>
           <a:prstGeom prst="rect">
             <a:avLst/>
@@ -9112,8 +9112,8 @@
         </p:nvSpPr>
         <p:spPr>
           <a:xfrm>
-            <a:off x="871260" y="555081"/>
-            <a:ext cx="15682800" cy="2310000"/>
+            <a:off x="871273" y="555089"/>
+            <a:ext cx="15682921" cy="2310195"/>
           </a:xfrm>
           <a:prstGeom prst="rect">
             <a:avLst/>
@@ -9143,7 +9143,7 @@
               </a:buClr>
               <a:buSzPts val="1800"/>
               <a:buNone/>
-              <a:defRPr sz="8385"/>
+              <a:defRPr/>
             </a:lvl1pPr>
             <a:lvl2pPr lvl="1" algn="l">
               <a:lnSpc>
@@ -9157,7 +9157,7 @@
               </a:spcAft>
               <a:buSzPts val="1400"/>
               <a:buNone/>
-              <a:defRPr sz="1800"/>
+              <a:defRPr/>
             </a:lvl2pPr>
             <a:lvl3pPr lvl="2" algn="l">
               <a:lnSpc>
@@ -9171,7 +9171,7 @@
               </a:spcAft>
               <a:buSzPts val="1400"/>
               <a:buNone/>
-              <a:defRPr sz="1800"/>
+              <a:defRPr/>
             </a:lvl3pPr>
             <a:lvl4pPr lvl="3" algn="l">
               <a:lnSpc>
@@ -9185,7 +9185,7 @@
               </a:spcAft>
               <a:buSzPts val="1400"/>
               <a:buNone/>
-              <a:defRPr sz="1800"/>
+              <a:defRPr/>
             </a:lvl4pPr>
             <a:lvl5pPr lvl="4" algn="l">
               <a:lnSpc>
@@ -9199,7 +9199,7 @@
               </a:spcAft>
               <a:buSzPts val="1400"/>
               <a:buNone/>
-              <a:defRPr sz="1800"/>
+              <a:defRPr/>
             </a:lvl5pPr>
             <a:lvl6pPr lvl="5" algn="l">
               <a:lnSpc>
@@ -9213,7 +9213,7 @@
               </a:spcAft>
               <a:buSzPts val="1400"/>
               <a:buNone/>
-              <a:defRPr sz="1800"/>
+              <a:defRPr/>
             </a:lvl6pPr>
             <a:lvl7pPr lvl="6" algn="l">
               <a:lnSpc>
@@ -9227,7 +9227,7 @@
               </a:spcAft>
               <a:buSzPts val="1400"/>
               <a:buNone/>
-              <a:defRPr sz="1800"/>
+              <a:defRPr/>
             </a:lvl7pPr>
             <a:lvl8pPr lvl="7" algn="l">
               <a:lnSpc>
@@ -9241,7 +9241,7 @@
               </a:spcAft>
               <a:buSzPts val="1400"/>
               <a:buNone/>
-              <a:defRPr sz="1800"/>
+              <a:defRPr/>
             </a:lvl8pPr>
             <a:lvl9pPr lvl="8" algn="l">
               <a:lnSpc>
@@ -9255,7 +9255,7 @@
               </a:spcAft>
               <a:buSzPts val="1400"/>
               <a:buNone/>
-              <a:defRPr sz="1800"/>
+              <a:defRPr/>
             </a:lvl9pPr>
           </a:lstStyle>
           <a:p/>
@@ -9271,8 +9271,8 @@
         </p:nvSpPr>
         <p:spPr>
           <a:xfrm>
-            <a:off x="871261" y="12847063"/>
-            <a:ext cx="4065900" cy="738000"/>
+            <a:off x="871274" y="12847249"/>
+            <a:ext cx="4065942" cy="737979"/>
           </a:xfrm>
           <a:prstGeom prst="rect">
             <a:avLst/>
@@ -9299,7 +9299,7 @@
               </a:spcAft>
               <a:buSzPts val="1400"/>
               <a:buNone/>
-              <a:defRPr sz="2287"/>
+              <a:defRPr/>
             </a:lvl1pPr>
             <a:lvl2pPr lvl="1" algn="l">
               <a:lnSpc>
@@ -9313,7 +9313,7 @@
               </a:spcAft>
               <a:buSzPts val="1400"/>
               <a:buNone/>
-              <a:defRPr sz="3552"/>
+              <a:defRPr/>
             </a:lvl2pPr>
             <a:lvl3pPr lvl="2" algn="l">
               <a:lnSpc>
@@ -9327,7 +9327,7 @@
               </a:spcAft>
               <a:buSzPts val="1400"/>
               <a:buNone/>
-              <a:defRPr sz="3552"/>
+              <a:defRPr/>
             </a:lvl3pPr>
             <a:lvl4pPr lvl="3" algn="l">
               <a:lnSpc>
@@ -9341,7 +9341,7 @@
               </a:spcAft>
               <a:buSzPts val="1400"/>
               <a:buNone/>
-              <a:defRPr sz="3552"/>
+              <a:defRPr/>
             </a:lvl4pPr>
             <a:lvl5pPr lvl="4" algn="l">
               <a:lnSpc>
@@ -9355,7 +9355,7 @@
               </a:spcAft>
               <a:buSzPts val="1400"/>
               <a:buNone/>
-              <a:defRPr sz="3552"/>
+              <a:defRPr/>
             </a:lvl5pPr>
             <a:lvl6pPr lvl="5" algn="l">
               <a:lnSpc>
@@ -9369,7 +9369,7 @@
               </a:spcAft>
               <a:buSzPts val="1400"/>
               <a:buNone/>
-              <a:defRPr sz="3552"/>
+              <a:defRPr/>
             </a:lvl6pPr>
             <a:lvl7pPr lvl="6" algn="l">
               <a:lnSpc>
@@ -9383,7 +9383,7 @@
               </a:spcAft>
               <a:buSzPts val="1400"/>
               <a:buNone/>
-              <a:defRPr sz="3552"/>
+              <a:defRPr/>
             </a:lvl7pPr>
             <a:lvl8pPr lvl="7" algn="l">
               <a:lnSpc>
@@ -9397,7 +9397,7 @@
               </a:spcAft>
               <a:buSzPts val="1400"/>
               <a:buNone/>
-              <a:defRPr sz="3552"/>
+              <a:defRPr/>
             </a:lvl8pPr>
             <a:lvl9pPr lvl="8" algn="l">
               <a:lnSpc>
@@ -9411,7 +9411,7 @@
               </a:spcAft>
               <a:buSzPts val="1400"/>
               <a:buNone/>
-              <a:defRPr sz="3552"/>
+              <a:defRPr/>
             </a:lvl9pPr>
           </a:lstStyle>
           <a:p/>
@@ -9427,8 +9427,8 @@
         </p:nvSpPr>
         <p:spPr>
           <a:xfrm>
-            <a:off x="5953613" y="12847063"/>
-            <a:ext cx="5517900" cy="738000"/>
+            <a:off x="5953701" y="12847249"/>
+            <a:ext cx="5518065" cy="737979"/>
           </a:xfrm>
           <a:prstGeom prst="rect">
             <a:avLst/>
@@ -9455,7 +9455,7 @@
               </a:spcAft>
               <a:buSzPts val="1400"/>
               <a:buNone/>
-              <a:defRPr sz="2287"/>
+              <a:defRPr/>
             </a:lvl1pPr>
             <a:lvl2pPr lvl="1" algn="l">
               <a:lnSpc>
@@ -9469,7 +9469,7 @@
               </a:spcAft>
               <a:buSzPts val="1400"/>
               <a:buNone/>
-              <a:defRPr sz="3552"/>
+              <a:defRPr/>
             </a:lvl2pPr>
             <a:lvl3pPr lvl="2" algn="l">
               <a:lnSpc>
@@ -9483,7 +9483,7 @@
               </a:spcAft>
               <a:buSzPts val="1400"/>
               <a:buNone/>
-              <a:defRPr sz="3552"/>
+              <a:defRPr/>
             </a:lvl3pPr>
             <a:lvl4pPr lvl="3" algn="l">
               <a:lnSpc>
@@ -9497,7 +9497,7 @@
               </a:spcAft>
               <a:buSzPts val="1400"/>
               <a:buNone/>
-              <a:defRPr sz="3552"/>
+              <a:defRPr/>
             </a:lvl4pPr>
             <a:lvl5pPr lvl="4" algn="l">
               <a:lnSpc>
@@ -9511,7 +9511,7 @@
               </a:spcAft>
               <a:buSzPts val="1400"/>
               <a:buNone/>
-              <a:defRPr sz="3552"/>
+              <a:defRPr/>
             </a:lvl5pPr>
             <a:lvl6pPr lvl="5" algn="l">
               <a:lnSpc>
@@ -9525,7 +9525,7 @@
               </a:spcAft>
               <a:buSzPts val="1400"/>
               <a:buNone/>
-              <a:defRPr sz="3552"/>
+              <a:defRPr/>
             </a:lvl6pPr>
             <a:lvl7pPr lvl="6" algn="l">
               <a:lnSpc>
@@ -9539,7 +9539,7 @@
               </a:spcAft>
               <a:buSzPts val="1400"/>
               <a:buNone/>
-              <a:defRPr sz="3552"/>
+              <a:defRPr/>
             </a:lvl7pPr>
             <a:lvl8pPr lvl="7" algn="l">
               <a:lnSpc>
@@ -9553,7 +9553,7 @@
               </a:spcAft>
               <a:buSzPts val="1400"/>
               <a:buNone/>
-              <a:defRPr sz="3552"/>
+              <a:defRPr/>
             </a:lvl8pPr>
             <a:lvl9pPr lvl="8" algn="l">
               <a:lnSpc>
@@ -9567,7 +9567,7 @@
               </a:spcAft>
               <a:buSzPts val="1400"/>
               <a:buNone/>
-              <a:defRPr sz="3552"/>
+              <a:defRPr/>
             </a:lvl9pPr>
           </a:lstStyle>
           <a:p/>
@@ -9583,8 +9583,8 @@
         </p:nvSpPr>
         <p:spPr>
           <a:xfrm>
-            <a:off x="12488068" y="12847063"/>
-            <a:ext cx="4065900" cy="738000"/>
+            <a:off x="12488252" y="12847249"/>
+            <a:ext cx="4065942" cy="737979"/>
           </a:xfrm>
           <a:prstGeom prst="rect">
             <a:avLst/>
@@ -9887,8 +9887,8 @@
         </p:nvSpPr>
         <p:spPr>
           <a:xfrm>
-            <a:off x="871261" y="551872"/>
-            <a:ext cx="5732700" cy="2348700"/>
+            <a:off x="871274" y="551880"/>
+            <a:ext cx="5732859" cy="2348698"/>
           </a:xfrm>
           <a:prstGeom prst="rect">
             <a:avLst/>
@@ -9933,7 +9933,7 @@
               </a:spcAft>
               <a:buSzPts val="1400"/>
               <a:buNone/>
-              <a:defRPr sz="1800"/>
+              <a:defRPr/>
             </a:lvl2pPr>
             <a:lvl3pPr lvl="2" algn="l">
               <a:lnSpc>
@@ -9947,7 +9947,7 @@
               </a:spcAft>
               <a:buSzPts val="1400"/>
               <a:buNone/>
-              <a:defRPr sz="1800"/>
+              <a:defRPr/>
             </a:lvl3pPr>
             <a:lvl4pPr lvl="3" algn="l">
               <a:lnSpc>
@@ -9961,7 +9961,7 @@
               </a:spcAft>
               <a:buSzPts val="1400"/>
               <a:buNone/>
-              <a:defRPr sz="1800"/>
+              <a:defRPr/>
             </a:lvl4pPr>
             <a:lvl5pPr lvl="4" algn="l">
               <a:lnSpc>
@@ -9975,7 +9975,7 @@
               </a:spcAft>
               <a:buSzPts val="1400"/>
               <a:buNone/>
-              <a:defRPr sz="1800"/>
+              <a:defRPr/>
             </a:lvl5pPr>
             <a:lvl6pPr lvl="5" algn="l">
               <a:lnSpc>
@@ -9989,7 +9989,7 @@
               </a:spcAft>
               <a:buSzPts val="1400"/>
               <a:buNone/>
-              <a:defRPr sz="1800"/>
+              <a:defRPr/>
             </a:lvl6pPr>
             <a:lvl7pPr lvl="6" algn="l">
               <a:lnSpc>
@@ -10003,7 +10003,7 @@
               </a:spcAft>
               <a:buSzPts val="1400"/>
               <a:buNone/>
-              <a:defRPr sz="1800"/>
+              <a:defRPr/>
             </a:lvl7pPr>
             <a:lvl8pPr lvl="7" algn="l">
               <a:lnSpc>
@@ -10017,7 +10017,7 @@
               </a:spcAft>
               <a:buSzPts val="1400"/>
               <a:buNone/>
-              <a:defRPr sz="1800"/>
+              <a:defRPr/>
             </a:lvl8pPr>
             <a:lvl9pPr lvl="8" algn="l">
               <a:lnSpc>
@@ -10031,7 +10031,7 @@
               </a:spcAft>
               <a:buSzPts val="1400"/>
               <a:buNone/>
-              <a:defRPr sz="1800"/>
+              <a:defRPr/>
             </a:lvl9pPr>
           </a:lstStyle>
           <a:p/>
@@ -10047,8 +10047,8 @@
         </p:nvSpPr>
         <p:spPr>
           <a:xfrm>
-            <a:off x="6812773" y="551873"/>
-            <a:ext cx="9741000" cy="11829900"/>
+            <a:off x="6812874" y="551881"/>
+            <a:ext cx="9741320" cy="11830122"/>
           </a:xfrm>
           <a:prstGeom prst="rect">
             <a:avLst/>
@@ -10063,7 +10063,7 @@
             <a:normAutofit/>
           </a:bodyPr>
           <a:lstStyle>
-            <a:lvl1pPr indent="-615817" lvl="0" marL="457200" algn="l">
+            <a:lvl1pPr indent="-615823" lvl="0" marL="457200" algn="l">
               <a:lnSpc>
                 <a:spcPct val="100000"/>
               </a:lnSpc>
@@ -10080,7 +10080,7 @@
               <a:buChar char="•"/>
               <a:defRPr sz="6098"/>
             </a:lvl1pPr>
-            <a:lvl2pPr indent="-567431" lvl="1" marL="914400" algn="l">
+            <a:lvl2pPr indent="-567436" lvl="1" marL="914400" algn="l">
               <a:lnSpc>
                 <a:spcPct val="100000"/>
               </a:lnSpc>
@@ -10097,7 +10097,7 @@
               <a:buChar char="–"/>
               <a:defRPr sz="5336"/>
             </a:lvl2pPr>
-            <a:lvl3pPr indent="-519045" lvl="2" marL="1371600" algn="l">
+            <a:lvl3pPr indent="-519049" lvl="2" marL="1371600" algn="l">
               <a:lnSpc>
                 <a:spcPct val="100000"/>
               </a:lnSpc>
@@ -10114,7 +10114,7 @@
               <a:buChar char="•"/>
               <a:defRPr sz="4574"/>
             </a:lvl3pPr>
-            <a:lvl4pPr indent="-470595" lvl="3" marL="1828800" algn="l">
+            <a:lvl4pPr indent="-470599" lvl="3" marL="1828800" algn="l">
               <a:lnSpc>
                 <a:spcPct val="100000"/>
               </a:lnSpc>
@@ -10131,7 +10131,7 @@
               <a:buChar char="–"/>
               <a:defRPr sz="3811"/>
             </a:lvl4pPr>
-            <a:lvl5pPr indent="-470595" lvl="4" marL="2286000" algn="l">
+            <a:lvl5pPr indent="-470598" lvl="4" marL="2286000" algn="l">
               <a:lnSpc>
                 <a:spcPct val="100000"/>
               </a:lnSpc>
@@ -10148,7 +10148,7 @@
               <a:buChar char="»"/>
               <a:defRPr sz="3811"/>
             </a:lvl5pPr>
-            <a:lvl6pPr indent="-470595" lvl="5" marL="2743200" algn="l">
+            <a:lvl6pPr indent="-470598" lvl="5" marL="2743200" algn="l">
               <a:lnSpc>
                 <a:spcPct val="100000"/>
               </a:lnSpc>
@@ -10165,7 +10165,7 @@
               <a:buChar char="•"/>
               <a:defRPr sz="3811"/>
             </a:lvl6pPr>
-            <a:lvl7pPr indent="-470595" lvl="6" marL="3200400" algn="l">
+            <a:lvl7pPr indent="-470598" lvl="6" marL="3200400" algn="l">
               <a:lnSpc>
                 <a:spcPct val="100000"/>
               </a:lnSpc>
@@ -10182,7 +10182,7 @@
               <a:buChar char="•"/>
               <a:defRPr sz="3811"/>
             </a:lvl7pPr>
-            <a:lvl8pPr indent="-470595" lvl="7" marL="3657600" algn="l">
+            <a:lvl8pPr indent="-470598" lvl="7" marL="3657600" algn="l">
               <a:lnSpc>
                 <a:spcPct val="100000"/>
               </a:lnSpc>
@@ -10199,7 +10199,7 @@
               <a:buChar char="•"/>
               <a:defRPr sz="3811"/>
             </a:lvl8pPr>
-            <a:lvl9pPr indent="-470595" lvl="8" marL="4114800" algn="l">
+            <a:lvl9pPr indent="-470598" lvl="8" marL="4114800" algn="l">
               <a:lnSpc>
                 <a:spcPct val="100000"/>
               </a:lnSpc>
@@ -10230,8 +10230,8 @@
         </p:nvSpPr>
         <p:spPr>
           <a:xfrm>
-            <a:off x="871261" y="2900537"/>
-            <a:ext cx="5732700" cy="9481200"/>
+            <a:off x="871274" y="2900579"/>
+            <a:ext cx="5732859" cy="9481424"/>
           </a:xfrm>
           <a:prstGeom prst="rect">
             <a:avLst/>
@@ -10413,8 +10413,8 @@
         </p:nvSpPr>
         <p:spPr>
           <a:xfrm>
-            <a:off x="871261" y="12847063"/>
-            <a:ext cx="4065900" cy="738000"/>
+            <a:off x="871274" y="12847249"/>
+            <a:ext cx="4065942" cy="737979"/>
           </a:xfrm>
           <a:prstGeom prst="rect">
             <a:avLst/>
@@ -10441,7 +10441,7 @@
               </a:spcAft>
               <a:buSzPts val="1400"/>
               <a:buNone/>
-              <a:defRPr sz="2287"/>
+              <a:defRPr/>
             </a:lvl1pPr>
             <a:lvl2pPr lvl="1" algn="l">
               <a:lnSpc>
@@ -10455,7 +10455,7 @@
               </a:spcAft>
               <a:buSzPts val="1400"/>
               <a:buNone/>
-              <a:defRPr sz="3552"/>
+              <a:defRPr/>
             </a:lvl2pPr>
             <a:lvl3pPr lvl="2" algn="l">
               <a:lnSpc>
@@ -10469,7 +10469,7 @@
               </a:spcAft>
               <a:buSzPts val="1400"/>
               <a:buNone/>
-              <a:defRPr sz="3552"/>
+              <a:defRPr/>
             </a:lvl3pPr>
             <a:lvl4pPr lvl="3" algn="l">
               <a:lnSpc>
@@ -10483,7 +10483,7 @@
               </a:spcAft>
               <a:buSzPts val="1400"/>
               <a:buNone/>
-              <a:defRPr sz="3552"/>
+              <a:defRPr/>
             </a:lvl4pPr>
             <a:lvl5pPr lvl="4" algn="l">
               <a:lnSpc>
@@ -10497,7 +10497,7 @@
               </a:spcAft>
               <a:buSzPts val="1400"/>
               <a:buNone/>
-              <a:defRPr sz="3552"/>
+              <a:defRPr/>
             </a:lvl5pPr>
             <a:lvl6pPr lvl="5" algn="l">
               <a:lnSpc>
@@ -10511,7 +10511,7 @@
               </a:spcAft>
               <a:buSzPts val="1400"/>
               <a:buNone/>
-              <a:defRPr sz="3552"/>
+              <a:defRPr/>
             </a:lvl6pPr>
             <a:lvl7pPr lvl="6" algn="l">
               <a:lnSpc>
@@ -10525,7 +10525,7 @@
               </a:spcAft>
               <a:buSzPts val="1400"/>
               <a:buNone/>
-              <a:defRPr sz="3552"/>
+              <a:defRPr/>
             </a:lvl7pPr>
             <a:lvl8pPr lvl="7" algn="l">
               <a:lnSpc>
@@ -10539,7 +10539,7 @@
               </a:spcAft>
               <a:buSzPts val="1400"/>
               <a:buNone/>
-              <a:defRPr sz="3552"/>
+              <a:defRPr/>
             </a:lvl8pPr>
             <a:lvl9pPr lvl="8" algn="l">
               <a:lnSpc>
@@ -10553,7 +10553,7 @@
               </a:spcAft>
               <a:buSzPts val="1400"/>
               <a:buNone/>
-              <a:defRPr sz="3552"/>
+              <a:defRPr/>
             </a:lvl9pPr>
           </a:lstStyle>
           <a:p/>
@@ -10569,8 +10569,8 @@
         </p:nvSpPr>
         <p:spPr>
           <a:xfrm>
-            <a:off x="5953613" y="12847063"/>
-            <a:ext cx="5517900" cy="738000"/>
+            <a:off x="5953701" y="12847249"/>
+            <a:ext cx="5518065" cy="737979"/>
           </a:xfrm>
           <a:prstGeom prst="rect">
             <a:avLst/>
@@ -10597,7 +10597,7 @@
               </a:spcAft>
               <a:buSzPts val="1400"/>
               <a:buNone/>
-              <a:defRPr sz="2287"/>
+              <a:defRPr/>
             </a:lvl1pPr>
             <a:lvl2pPr lvl="1" algn="l">
               <a:lnSpc>
@@ -10611,7 +10611,7 @@
               </a:spcAft>
               <a:buSzPts val="1400"/>
               <a:buNone/>
-              <a:defRPr sz="3552"/>
+              <a:defRPr/>
             </a:lvl2pPr>
             <a:lvl3pPr lvl="2" algn="l">
               <a:lnSpc>
@@ -10625,7 +10625,7 @@
               </a:spcAft>
               <a:buSzPts val="1400"/>
               <a:buNone/>
-              <a:defRPr sz="3552"/>
+              <a:defRPr/>
             </a:lvl3pPr>
             <a:lvl4pPr lvl="3" algn="l">
               <a:lnSpc>
@@ -10639,7 +10639,7 @@
               </a:spcAft>
               <a:buSzPts val="1400"/>
               <a:buNone/>
-              <a:defRPr sz="3552"/>
+              <a:defRPr/>
             </a:lvl4pPr>
             <a:lvl5pPr lvl="4" algn="l">
               <a:lnSpc>
@@ -10653,7 +10653,7 @@
               </a:spcAft>
               <a:buSzPts val="1400"/>
               <a:buNone/>
-              <a:defRPr sz="3552"/>
+              <a:defRPr/>
             </a:lvl5pPr>
             <a:lvl6pPr lvl="5" algn="l">
               <a:lnSpc>
@@ -10667,7 +10667,7 @@
               </a:spcAft>
               <a:buSzPts val="1400"/>
               <a:buNone/>
-              <a:defRPr sz="3552"/>
+              <a:defRPr/>
             </a:lvl6pPr>
             <a:lvl7pPr lvl="6" algn="l">
               <a:lnSpc>
@@ -10681,7 +10681,7 @@
               </a:spcAft>
               <a:buSzPts val="1400"/>
               <a:buNone/>
-              <a:defRPr sz="3552"/>
+              <a:defRPr/>
             </a:lvl7pPr>
             <a:lvl8pPr lvl="7" algn="l">
               <a:lnSpc>
@@ -10695,7 +10695,7 @@
               </a:spcAft>
               <a:buSzPts val="1400"/>
               <a:buNone/>
-              <a:defRPr sz="3552"/>
+              <a:defRPr/>
             </a:lvl8pPr>
             <a:lvl9pPr lvl="8" algn="l">
               <a:lnSpc>
@@ -10709,7 +10709,7 @@
               </a:spcAft>
               <a:buSzPts val="1400"/>
               <a:buNone/>
-              <a:defRPr sz="3552"/>
+              <a:defRPr/>
             </a:lvl9pPr>
           </a:lstStyle>
           <a:p/>
@@ -10725,8 +10725,8 @@
         </p:nvSpPr>
         <p:spPr>
           <a:xfrm>
-            <a:off x="12488068" y="12847063"/>
-            <a:ext cx="4065900" cy="738000"/>
+            <a:off x="12488252" y="12847249"/>
+            <a:ext cx="4065942" cy="737979"/>
           </a:xfrm>
           <a:prstGeom prst="rect">
             <a:avLst/>
@@ -11029,8 +11029,8 @@
         </p:nvSpPr>
         <p:spPr>
           <a:xfrm>
-            <a:off x="3415464" y="9702677"/>
-            <a:ext cx="10455000" cy="1145400"/>
+            <a:off x="3415514" y="9702817"/>
+            <a:ext cx="10455280" cy="1145472"/>
           </a:xfrm>
           <a:prstGeom prst="rect">
             <a:avLst/>
@@ -11075,7 +11075,7 @@
               </a:spcAft>
               <a:buSzPts val="1400"/>
               <a:buNone/>
-              <a:defRPr sz="1800"/>
+              <a:defRPr/>
             </a:lvl2pPr>
             <a:lvl3pPr lvl="2" algn="l">
               <a:lnSpc>
@@ -11089,7 +11089,7 @@
               </a:spcAft>
               <a:buSzPts val="1400"/>
               <a:buNone/>
-              <a:defRPr sz="1800"/>
+              <a:defRPr/>
             </a:lvl3pPr>
             <a:lvl4pPr lvl="3" algn="l">
               <a:lnSpc>
@@ -11103,7 +11103,7 @@
               </a:spcAft>
               <a:buSzPts val="1400"/>
               <a:buNone/>
-              <a:defRPr sz="1800"/>
+              <a:defRPr/>
             </a:lvl4pPr>
             <a:lvl5pPr lvl="4" algn="l">
               <a:lnSpc>
@@ -11117,7 +11117,7 @@
               </a:spcAft>
               <a:buSzPts val="1400"/>
               <a:buNone/>
-              <a:defRPr sz="1800"/>
+              <a:defRPr/>
             </a:lvl5pPr>
             <a:lvl6pPr lvl="5" algn="l">
               <a:lnSpc>
@@ -11131,7 +11131,7 @@
               </a:spcAft>
               <a:buSzPts val="1400"/>
               <a:buNone/>
-              <a:defRPr sz="1800"/>
+              <a:defRPr/>
             </a:lvl6pPr>
             <a:lvl7pPr lvl="6" algn="l">
               <a:lnSpc>
@@ -11145,7 +11145,7 @@
               </a:spcAft>
               <a:buSzPts val="1400"/>
               <a:buNone/>
-              <a:defRPr sz="1800"/>
+              <a:defRPr/>
             </a:lvl7pPr>
             <a:lvl8pPr lvl="7" algn="l">
               <a:lnSpc>
@@ -11159,7 +11159,7 @@
               </a:spcAft>
               <a:buSzPts val="1400"/>
               <a:buNone/>
-              <a:defRPr sz="1800"/>
+              <a:defRPr/>
             </a:lvl8pPr>
             <a:lvl9pPr lvl="8" algn="l">
               <a:lnSpc>
@@ -11173,7 +11173,7 @@
               </a:spcAft>
               <a:buSzPts val="1400"/>
               <a:buNone/>
-              <a:defRPr sz="1800"/>
+              <a:defRPr/>
             </a:lvl9pPr>
           </a:lstStyle>
           <a:p/>
@@ -11189,8 +11189,8 @@
         </p:nvSpPr>
         <p:spPr>
           <a:xfrm>
-            <a:off x="3415464" y="1238503"/>
-            <a:ext cx="10455000" cy="8316600"/>
+            <a:off x="3415514" y="1238521"/>
+            <a:ext cx="10455280" cy="8316700"/>
           </a:xfrm>
           <a:prstGeom prst="rect">
             <a:avLst/>
@@ -11211,8 +11211,8 @@
         </p:nvSpPr>
         <p:spPr>
           <a:xfrm>
-            <a:off x="3415464" y="10848133"/>
-            <a:ext cx="10455000" cy="1626600"/>
+            <a:off x="3415514" y="10848290"/>
+            <a:ext cx="10455280" cy="1626761"/>
           </a:xfrm>
           <a:prstGeom prst="rect">
             <a:avLst/>
@@ -11394,8 +11394,8 @@
         </p:nvSpPr>
         <p:spPr>
           <a:xfrm>
-            <a:off x="871261" y="12847063"/>
-            <a:ext cx="4065900" cy="738000"/>
+            <a:off x="871274" y="12847249"/>
+            <a:ext cx="4065942" cy="737979"/>
           </a:xfrm>
           <a:prstGeom prst="rect">
             <a:avLst/>
@@ -11422,7 +11422,7 @@
               </a:spcAft>
               <a:buSzPts val="1400"/>
               <a:buNone/>
-              <a:defRPr sz="2287"/>
+              <a:defRPr/>
             </a:lvl1pPr>
             <a:lvl2pPr lvl="1" algn="l">
               <a:lnSpc>
@@ -11436,7 +11436,7 @@
               </a:spcAft>
               <a:buSzPts val="1400"/>
               <a:buNone/>
-              <a:defRPr sz="3552"/>
+              <a:defRPr/>
             </a:lvl2pPr>
             <a:lvl3pPr lvl="2" algn="l">
               <a:lnSpc>
@@ -11450,7 +11450,7 @@
               </a:spcAft>
               <a:buSzPts val="1400"/>
               <a:buNone/>
-              <a:defRPr sz="3552"/>
+              <a:defRPr/>
             </a:lvl3pPr>
             <a:lvl4pPr lvl="3" algn="l">
               <a:lnSpc>
@@ -11464,7 +11464,7 @@
               </a:spcAft>
               <a:buSzPts val="1400"/>
               <a:buNone/>
-              <a:defRPr sz="3552"/>
+              <a:defRPr/>
             </a:lvl4pPr>
             <a:lvl5pPr lvl="4" algn="l">
               <a:lnSpc>
@@ -11478,7 +11478,7 @@
               </a:spcAft>
               <a:buSzPts val="1400"/>
               <a:buNone/>
-              <a:defRPr sz="3552"/>
+              <a:defRPr/>
             </a:lvl5pPr>
             <a:lvl6pPr lvl="5" algn="l">
               <a:lnSpc>
@@ -11492,7 +11492,7 @@
               </a:spcAft>
               <a:buSzPts val="1400"/>
               <a:buNone/>
-              <a:defRPr sz="3552"/>
+              <a:defRPr/>
             </a:lvl6pPr>
             <a:lvl7pPr lvl="6" algn="l">
               <a:lnSpc>
@@ -11506,7 +11506,7 @@
               </a:spcAft>
               <a:buSzPts val="1400"/>
               <a:buNone/>
-              <a:defRPr sz="3552"/>
+              <a:defRPr/>
             </a:lvl7pPr>
             <a:lvl8pPr lvl="7" algn="l">
               <a:lnSpc>
@@ -11520,7 +11520,7 @@
               </a:spcAft>
               <a:buSzPts val="1400"/>
               <a:buNone/>
-              <a:defRPr sz="3552"/>
+              <a:defRPr/>
             </a:lvl8pPr>
             <a:lvl9pPr lvl="8" algn="l">
               <a:lnSpc>
@@ -11534,7 +11534,7 @@
               </a:spcAft>
               <a:buSzPts val="1400"/>
               <a:buNone/>
-              <a:defRPr sz="3552"/>
+              <a:defRPr/>
             </a:lvl9pPr>
           </a:lstStyle>
           <a:p/>
@@ -11550,8 +11550,8 @@
         </p:nvSpPr>
         <p:spPr>
           <a:xfrm>
-            <a:off x="5953613" y="12847063"/>
-            <a:ext cx="5517900" cy="738000"/>
+            <a:off x="5953701" y="12847249"/>
+            <a:ext cx="5518065" cy="737979"/>
           </a:xfrm>
           <a:prstGeom prst="rect">
             <a:avLst/>
@@ -11578,7 +11578,7 @@
               </a:spcAft>
               <a:buSzPts val="1400"/>
               <a:buNone/>
-              <a:defRPr sz="2287"/>
+              <a:defRPr/>
             </a:lvl1pPr>
             <a:lvl2pPr lvl="1" algn="l">
               <a:lnSpc>
@@ -11592,7 +11592,7 @@
               </a:spcAft>
               <a:buSzPts val="1400"/>
               <a:buNone/>
-              <a:defRPr sz="3552"/>
+              <a:defRPr/>
             </a:lvl2pPr>
             <a:lvl3pPr lvl="2" algn="l">
               <a:lnSpc>
@@ -11606,7 +11606,7 @@
               </a:spcAft>
               <a:buSzPts val="1400"/>
               <a:buNone/>
-              <a:defRPr sz="3552"/>
+              <a:defRPr/>
             </a:lvl3pPr>
             <a:lvl4pPr lvl="3" algn="l">
               <a:lnSpc>
@@ -11620,7 +11620,7 @@
               </a:spcAft>
               <a:buSzPts val="1400"/>
               <a:buNone/>
-              <a:defRPr sz="3552"/>
+              <a:defRPr/>
             </a:lvl4pPr>
             <a:lvl5pPr lvl="4" algn="l">
               <a:lnSpc>
@@ -11634,7 +11634,7 @@
               </a:spcAft>
               <a:buSzPts val="1400"/>
               <a:buNone/>
-              <a:defRPr sz="3552"/>
+              <a:defRPr/>
             </a:lvl5pPr>
             <a:lvl6pPr lvl="5" algn="l">
               <a:lnSpc>
@@ -11648,7 +11648,7 @@
               </a:spcAft>
               <a:buSzPts val="1400"/>
               <a:buNone/>
-              <a:defRPr sz="3552"/>
+              <a:defRPr/>
             </a:lvl6pPr>
             <a:lvl7pPr lvl="6" algn="l">
               <a:lnSpc>
@@ -11662,7 +11662,7 @@
               </a:spcAft>
               <a:buSzPts val="1400"/>
               <a:buNone/>
-              <a:defRPr sz="3552"/>
+              <a:defRPr/>
             </a:lvl7pPr>
             <a:lvl8pPr lvl="7" algn="l">
               <a:lnSpc>
@@ -11676,7 +11676,7 @@
               </a:spcAft>
               <a:buSzPts val="1400"/>
               <a:buNone/>
-              <a:defRPr sz="3552"/>
+              <a:defRPr/>
             </a:lvl8pPr>
             <a:lvl9pPr lvl="8" algn="l">
               <a:lnSpc>
@@ -11690,7 +11690,7 @@
               </a:spcAft>
               <a:buSzPts val="1400"/>
               <a:buNone/>
-              <a:defRPr sz="3552"/>
+              <a:defRPr/>
             </a:lvl9pPr>
           </a:lstStyle>
           <a:p/>
@@ -11706,8 +11706,8 @@
         </p:nvSpPr>
         <p:spPr>
           <a:xfrm>
-            <a:off x="12488068" y="12847063"/>
-            <a:ext cx="4065900" cy="738000"/>
+            <a:off x="12488252" y="12847249"/>
+            <a:ext cx="4065942" cy="737979"/>
           </a:xfrm>
           <a:prstGeom prst="rect">
             <a:avLst/>
@@ -12017,8 +12017,8 @@
         </p:nvSpPr>
         <p:spPr>
           <a:xfrm>
-            <a:off x="871260" y="555081"/>
-            <a:ext cx="15682800" cy="2310000"/>
+            <a:off x="871273" y="555089"/>
+            <a:ext cx="15682921" cy="2310195"/>
           </a:xfrm>
           <a:prstGeom prst="rect">
             <a:avLst/>
@@ -12281,8 +12281,8 @@
         </p:nvSpPr>
         <p:spPr>
           <a:xfrm>
-            <a:off x="871260" y="3234226"/>
-            <a:ext cx="15682800" cy="9147600"/>
+            <a:off x="871273" y="3234273"/>
+            <a:ext cx="15682921" cy="9147730"/>
           </a:xfrm>
           <a:prstGeom prst="rect">
             <a:avLst/>
@@ -12297,7 +12297,7 @@
             <a:normAutofit/>
           </a:bodyPr>
           <a:lstStyle>
-            <a:lvl1pPr indent="-615817" lvl="0" marL="457200" marR="0" rtl="0" algn="l">
+            <a:lvl1pPr indent="-615823" lvl="0" marL="457200" marR="0" rtl="0" algn="l">
               <a:lnSpc>
                 <a:spcPct val="100000"/>
               </a:lnSpc>
@@ -12323,7 +12323,7 @@
                 <a:sym typeface="Calibri"/>
               </a:defRPr>
             </a:lvl1pPr>
-            <a:lvl2pPr indent="-567431" lvl="1" marL="914400" marR="0" rtl="0" algn="l">
+            <a:lvl2pPr indent="-567436" lvl="1" marL="914400" marR="0" rtl="0" algn="l">
               <a:lnSpc>
                 <a:spcPct val="100000"/>
               </a:lnSpc>
@@ -12349,7 +12349,7 @@
                 <a:sym typeface="Calibri"/>
               </a:defRPr>
             </a:lvl2pPr>
-            <a:lvl3pPr indent="-519045" lvl="2" marL="1371600" marR="0" rtl="0" algn="l">
+            <a:lvl3pPr indent="-519049" lvl="2" marL="1371600" marR="0" rtl="0" algn="l">
               <a:lnSpc>
                 <a:spcPct val="100000"/>
               </a:lnSpc>
@@ -12375,7 +12375,7 @@
                 <a:sym typeface="Calibri"/>
               </a:defRPr>
             </a:lvl3pPr>
-            <a:lvl4pPr indent="-470595" lvl="3" marL="1828800" marR="0" rtl="0" algn="l">
+            <a:lvl4pPr indent="-470599" lvl="3" marL="1828800" marR="0" rtl="0" algn="l">
               <a:lnSpc>
                 <a:spcPct val="100000"/>
               </a:lnSpc>
@@ -12401,7 +12401,7 @@
                 <a:sym typeface="Calibri"/>
               </a:defRPr>
             </a:lvl4pPr>
-            <a:lvl5pPr indent="-470595" lvl="4" marL="2286000" marR="0" rtl="0" algn="l">
+            <a:lvl5pPr indent="-470598" lvl="4" marL="2286000" marR="0" rtl="0" algn="l">
               <a:lnSpc>
                 <a:spcPct val="100000"/>
               </a:lnSpc>
@@ -12427,7 +12427,7 @@
                 <a:sym typeface="Calibri"/>
               </a:defRPr>
             </a:lvl5pPr>
-            <a:lvl6pPr indent="-470595" lvl="5" marL="2743200" marR="0" rtl="0" algn="l">
+            <a:lvl6pPr indent="-470598" lvl="5" marL="2743200" marR="0" rtl="0" algn="l">
               <a:lnSpc>
                 <a:spcPct val="100000"/>
               </a:lnSpc>
@@ -12453,7 +12453,7 @@
                 <a:sym typeface="Calibri"/>
               </a:defRPr>
             </a:lvl6pPr>
-            <a:lvl7pPr indent="-470595" lvl="6" marL="3200400" marR="0" rtl="0" algn="l">
+            <a:lvl7pPr indent="-470598" lvl="6" marL="3200400" marR="0" rtl="0" algn="l">
               <a:lnSpc>
                 <a:spcPct val="100000"/>
               </a:lnSpc>
@@ -12479,7 +12479,7 @@
                 <a:sym typeface="Calibri"/>
               </a:defRPr>
             </a:lvl7pPr>
-            <a:lvl8pPr indent="-470595" lvl="7" marL="3657600" marR="0" rtl="0" algn="l">
+            <a:lvl8pPr indent="-470598" lvl="7" marL="3657600" marR="0" rtl="0" algn="l">
               <a:lnSpc>
                 <a:spcPct val="100000"/>
               </a:lnSpc>
@@ -12505,7 +12505,7 @@
                 <a:sym typeface="Calibri"/>
               </a:defRPr>
             </a:lvl8pPr>
-            <a:lvl9pPr indent="-470595" lvl="8" marL="4114800" marR="0" rtl="0" algn="l">
+            <a:lvl9pPr indent="-470598" lvl="8" marL="4114800" marR="0" rtl="0" algn="l">
               <a:lnSpc>
                 <a:spcPct val="100000"/>
               </a:lnSpc>
@@ -12545,8 +12545,8 @@
         </p:nvSpPr>
         <p:spPr>
           <a:xfrm>
-            <a:off x="871261" y="12847063"/>
-            <a:ext cx="4065900" cy="738000"/>
+            <a:off x="871274" y="12847249"/>
+            <a:ext cx="4065942" cy="737979"/>
           </a:xfrm>
           <a:prstGeom prst="rect">
             <a:avLst/>
@@ -12809,8 +12809,8 @@
         </p:nvSpPr>
         <p:spPr>
           <a:xfrm>
-            <a:off x="5953613" y="12847063"/>
-            <a:ext cx="5517900" cy="738000"/>
+            <a:off x="5953701" y="12847249"/>
+            <a:ext cx="5518065" cy="737979"/>
           </a:xfrm>
           <a:prstGeom prst="rect">
             <a:avLst/>
@@ -13073,8 +13073,8 @@
         </p:nvSpPr>
         <p:spPr>
           <a:xfrm>
-            <a:off x="12488068" y="12847063"/>
-            <a:ext cx="4065900" cy="738000"/>
+            <a:off x="12488252" y="12847249"/>
+            <a:ext cx="4065942" cy="737979"/>
           </a:xfrm>
           <a:prstGeom prst="rect">
             <a:avLst/>
@@ -14083,8 +14083,8 @@
         </p:nvGrpSpPr>
         <p:grpSpPr>
           <a:xfrm>
-            <a:off x="-234718" y="36272512"/>
-            <a:ext cx="29324581" cy="6967953"/>
+            <a:off x="-234721" y="36273035"/>
+            <a:ext cx="29324843" cy="6968084"/>
             <a:chOff x="0" y="-47625"/>
             <a:chExt cx="3032124" cy="655203"/>
           </a:xfrm>
@@ -14231,8 +14231,8 @@
         </p:nvSpPr>
         <p:spPr>
           <a:xfrm>
-            <a:off x="3163190" y="34829191"/>
-            <a:ext cx="22761119" cy="14305961"/>
+            <a:off x="3163237" y="34829695"/>
+            <a:ext cx="22769151" cy="14311010"/>
           </a:xfrm>
           <a:custGeom>
             <a:rect b="b" l="l" r="r" t="t"/>
@@ -14315,8 +14315,8 @@
         </p:nvGrpSpPr>
         <p:grpSpPr>
           <a:xfrm>
-            <a:off x="-234717" y="28799949"/>
-            <a:ext cx="29303652" cy="9759567"/>
+            <a:off x="-234720" y="28800364"/>
+            <a:ext cx="29304069" cy="9759747"/>
             <a:chOff x="0" y="-47625"/>
             <a:chExt cx="3163653" cy="917701"/>
           </a:xfrm>
@@ -14463,8 +14463,8 @@
         </p:nvGrpSpPr>
         <p:grpSpPr>
           <a:xfrm>
-            <a:off x="-234722" y="21009998"/>
-            <a:ext cx="29303786" cy="9460356"/>
+            <a:off x="-234725" y="21010299"/>
+            <a:ext cx="29324751" cy="9460534"/>
             <a:chOff x="0" y="-47625"/>
             <a:chExt cx="3225442" cy="889566"/>
           </a:xfrm>
@@ -14611,8 +14611,8 @@
         </p:nvGrpSpPr>
         <p:grpSpPr>
           <a:xfrm>
-            <a:off x="-234722" y="15561152"/>
-            <a:ext cx="29303659" cy="8372799"/>
+            <a:off x="-234720" y="15561373"/>
+            <a:ext cx="29303962" cy="8372957"/>
             <a:chOff x="0" y="-47625"/>
             <a:chExt cx="3032124" cy="787302"/>
           </a:xfrm>
@@ -14759,8 +14759,8 @@
         </p:nvGrpSpPr>
         <p:grpSpPr>
           <a:xfrm>
-            <a:off x="-234722" y="6816054"/>
-            <a:ext cx="29303622" cy="9460349"/>
+            <a:off x="-234719" y="6854247"/>
+            <a:ext cx="29303943" cy="9226118"/>
             <a:chOff x="0" y="-47625"/>
             <a:chExt cx="3218728" cy="867524"/>
           </a:xfrm>
@@ -14907,8 +14907,8 @@
         </p:nvGrpSpPr>
         <p:grpSpPr>
           <a:xfrm>
-            <a:off x="-234722" y="-573864"/>
-            <a:ext cx="29303511" cy="9049853"/>
+            <a:off x="-234719" y="-573881"/>
+            <a:ext cx="29324841" cy="9050021"/>
             <a:chOff x="0" y="-47625"/>
             <a:chExt cx="2755436" cy="850966"/>
           </a:xfrm>
@@ -15055,8 +15055,8 @@
         </p:nvGrpSpPr>
         <p:grpSpPr>
           <a:xfrm rot="-5400000">
-            <a:off x="11084248" y="13184337"/>
-            <a:ext cx="20463723" cy="13033876"/>
+            <a:off x="10939017" y="13420436"/>
+            <a:ext cx="20731171" cy="13057756"/>
             <a:chOff x="0" y="-47625"/>
             <a:chExt cx="1922704" cy="1224620"/>
           </a:xfrm>
@@ -15209,8 +15209,8 @@
         </p:nvGrpSpPr>
         <p:grpSpPr>
           <a:xfrm>
-            <a:off x="927161" y="30010788"/>
-            <a:ext cx="13848275" cy="8125737"/>
+            <a:off x="927175" y="30011224"/>
+            <a:ext cx="13848535" cy="8372959"/>
             <a:chOff x="0" y="-47625"/>
             <a:chExt cx="1302166" cy="868357"/>
           </a:xfrm>
@@ -15363,8 +15363,8 @@
         </p:nvGrpSpPr>
         <p:grpSpPr>
           <a:xfrm>
-            <a:off x="15403073" y="29988572"/>
-            <a:ext cx="12527629" cy="8126059"/>
+            <a:off x="15289000" y="30011233"/>
+            <a:ext cx="12527629" cy="8372803"/>
             <a:chOff x="0" y="-314078"/>
             <a:chExt cx="8764870" cy="5685342"/>
           </a:xfrm>
@@ -15531,8 +15531,8 @@
           </p:nvSpPr>
           <p:spPr>
             <a:xfrm>
-              <a:off x="2636738" y="146577"/>
-              <a:ext cx="3491400" cy="512700"/>
+              <a:off x="1064599" y="213115"/>
+              <a:ext cx="6635700" cy="497700"/>
             </a:xfrm>
             <a:prstGeom prst="rect">
               <a:avLst/>
@@ -15598,8 +15598,8 @@
         </p:nvSpPr>
         <p:spPr>
           <a:xfrm>
-            <a:off x="-916529" y="1525331"/>
-            <a:ext cx="8568160" cy="2453356"/>
+            <a:off x="-916543" y="1525353"/>
+            <a:ext cx="8571184" cy="2454222"/>
           </a:xfrm>
           <a:custGeom>
             <a:rect b="b" l="l" r="r" t="t"/>
@@ -15682,8 +15682,8 @@
         </p:nvSpPr>
         <p:spPr>
           <a:xfrm>
-            <a:off x="3163203" y="-5046437"/>
-            <a:ext cx="22761119" cy="14305961"/>
+            <a:off x="3163237" y="-4997460"/>
+            <a:ext cx="22769151" cy="14311010"/>
           </a:xfrm>
           <a:custGeom>
             <a:rect b="b" l="l" r="r" t="t"/>
@@ -15766,8 +15766,8 @@
         </p:nvSpPr>
         <p:spPr>
           <a:xfrm>
-            <a:off x="21153369" y="1584882"/>
-            <a:ext cx="7225835" cy="2334237"/>
+            <a:off x="21014306" y="1712017"/>
+            <a:ext cx="7228385" cy="2335060"/>
           </a:xfrm>
           <a:custGeom>
             <a:rect b="b" l="l" r="r" t="t"/>
@@ -15850,8 +15850,8 @@
         </p:nvSpPr>
         <p:spPr>
           <a:xfrm>
-            <a:off x="5431978" y="12099702"/>
-            <a:ext cx="4989900" cy="781500"/>
+            <a:off x="5432058" y="12099877"/>
+            <a:ext cx="4989818" cy="658642"/>
           </a:xfrm>
           <a:prstGeom prst="rect">
             <a:avLst/>
@@ -15916,8 +15916,8 @@
         </p:nvGrpSpPr>
         <p:grpSpPr>
           <a:xfrm rot="-5400000">
-            <a:off x="2462253" y="7444806"/>
-            <a:ext cx="10271251" cy="14355165"/>
+            <a:off x="2494601" y="7477176"/>
+            <a:ext cx="10206805" cy="14355430"/>
             <a:chOff x="0" y="-47625"/>
             <a:chExt cx="958980" cy="1348764"/>
           </a:xfrm>
@@ -16070,8 +16070,8 @@
         </p:nvGrpSpPr>
         <p:grpSpPr>
           <a:xfrm rot="-5400000">
-            <a:off x="2615958" y="17805178"/>
-            <a:ext cx="9963813" cy="14355165"/>
+            <a:off x="2460145" y="17961211"/>
+            <a:ext cx="10275743" cy="14355435"/>
             <a:chOff x="0" y="-47625"/>
             <a:chExt cx="936167" cy="1348764"/>
           </a:xfrm>
@@ -16224,8 +16224,8 @@
         </p:nvSpPr>
         <p:spPr>
           <a:xfrm>
-            <a:off x="22526919" y="36800907"/>
-            <a:ext cx="5607114" cy="5640292"/>
+            <a:off x="22527251" y="36801439"/>
+            <a:ext cx="5609093" cy="5642282"/>
           </a:xfrm>
           <a:custGeom>
             <a:rect b="b" l="l" r="r" t="t"/>
@@ -16308,8 +16308,8 @@
         </p:nvSpPr>
         <p:spPr>
           <a:xfrm>
-            <a:off x="6388918" y="3475675"/>
-            <a:ext cx="16022100" cy="1759800"/>
+            <a:off x="20799" y="4287667"/>
+            <a:ext cx="28813800" cy="1759800"/>
           </a:xfrm>
           <a:prstGeom prst="rect">
             <a:avLst/>
@@ -16325,7 +16325,7 @@
           </a:bodyPr>
           <a:lstStyle/>
           <a:p>
-            <a:pPr indent="0" lvl="0" marL="0" marR="0" rtl="0" algn="ctr">
+            <a:pPr indent="0" lvl="0" marL="0" rtl="0" algn="ctr">
               <a:lnSpc>
                 <a:spcPct val="101005"/>
               </a:lnSpc>
@@ -16336,41 +16336,29 @@
                 <a:spcPts val="0"/>
               </a:spcAft>
               <a:buClr>
-                <a:srgbClr val="000000"/>
+                <a:schemeClr val="dk1"/>
               </a:buClr>
               <a:buSzPts val="11434"/>
               <a:buFont typeface="Arial"/>
               <a:buNone/>
             </a:pPr>
             <a:r>
-              <a:rPr b="1" i="0" lang="en-US" sz="11434" u="none" cap="none" strike="noStrike">
-                <a:solidFill>
-                  <a:srgbClr val="000000"/>
+              <a:rPr b="1" lang="en-US" sz="11434">
+                <a:solidFill>
+                  <a:schemeClr val="dk1"/>
                 </a:solidFill>
                 <a:latin typeface="Open Sans"/>
                 <a:ea typeface="Open Sans"/>
                 <a:cs typeface="Open Sans"/>
                 <a:sym typeface="Open Sans"/>
               </a:rPr>
-              <a:t>PROJETO </a:t>
+              <a:t>PROJETO SmartSaúde</a:t>
             </a:r>
-            <a:r>
-              <a:rPr b="1" lang="en-US" sz="11434">
-                <a:latin typeface="Open Sans"/>
-                <a:ea typeface="Open Sans"/>
-                <a:cs typeface="Open Sans"/>
-                <a:sym typeface="Open Sans"/>
-              </a:rPr>
-              <a:t>SmartSaúde</a:t>
-            </a:r>
-            <a:endParaRPr b="0" i="0" sz="1400" u="none" cap="none" strike="noStrike">
-              <a:solidFill>
-                <a:srgbClr val="000000"/>
-              </a:solidFill>
-              <a:latin typeface="Arial"/>
-              <a:ea typeface="Arial"/>
-              <a:cs typeface="Arial"/>
-              <a:sym typeface="Arial"/>
+            <a:endParaRPr b="1" sz="11434">
+              <a:latin typeface="Open Sans"/>
+              <a:ea typeface="Open Sans"/>
+              <a:cs typeface="Open Sans"/>
+              <a:sym typeface="Open Sans"/>
             </a:endParaRPr>
           </a:p>
         </p:txBody>
@@ -16383,8 +16371,8 @@
         </p:nvSpPr>
         <p:spPr>
           <a:xfrm>
-            <a:off x="927161" y="5559620"/>
-            <a:ext cx="26906100" cy="2785800"/>
+            <a:off x="2404768" y="6355587"/>
+            <a:ext cx="24286200" cy="1759200"/>
           </a:xfrm>
           <a:prstGeom prst="rect">
             <a:avLst/>
@@ -16400,7 +16388,7 @@
           </a:bodyPr>
           <a:lstStyle/>
           <a:p>
-            <a:pPr indent="0" lvl="0" marL="0" marR="0" rtl="0" algn="ctr">
+            <a:pPr indent="0" lvl="0" marL="0" rtl="0" algn="ctr">
               <a:lnSpc>
                 <a:spcPct val="140025"/>
               </a:lnSpc>
@@ -16411,7 +16399,7 @@
                 <a:spcPts val="0"/>
               </a:spcAft>
               <a:buClr>
-                <a:srgbClr val="000000"/>
+                <a:schemeClr val="dk1"/>
               </a:buClr>
               <a:buSzPts val="4762"/>
               <a:buFont typeface="Arial"/>
@@ -16419,6 +16407,9 @@
             </a:pPr>
             <a:r>
               <a:rPr b="1" lang="en-US" sz="4762">
+                <a:solidFill>
+                  <a:schemeClr val="dk1"/>
+                </a:solidFill>
                 <a:latin typeface="Open Sans"/>
                 <a:ea typeface="Open Sans"/>
                 <a:cs typeface="Open Sans"/>
@@ -16468,54 +16459,15 @@
             </a:r>
             <a:r>
               <a:rPr lang="en-US" sz="4762">
+                <a:solidFill>
+                  <a:schemeClr val="dk1"/>
+                </a:solidFill>
                 <a:latin typeface="Open Sans"/>
                 <a:ea typeface="Open Sans"/>
                 <a:cs typeface="Open Sans"/>
                 <a:sym typeface="Open Sans"/>
               </a:rPr>
-              <a:t>Victor Bruno Alexander Rosetti de Quiroz</a:t>
-            </a:r>
-            <a:r>
-              <a:rPr b="0" i="0" lang="en-US" sz="4762" u="none" cap="none" strike="noStrike">
-                <a:solidFill>
-                  <a:srgbClr val="000000"/>
-                </a:solidFill>
-                <a:latin typeface="Open Sans"/>
-                <a:ea typeface="Open Sans"/>
-                <a:cs typeface="Open Sans"/>
-                <a:sym typeface="Open Sans"/>
-              </a:rPr>
-              <a:t>, </a:t>
-            </a:r>
-            <a:r>
-              <a:rPr lang="en-US" sz="4762">
-                <a:latin typeface="Open Sans"/>
-                <a:ea typeface="Open Sans"/>
-                <a:cs typeface="Open Sans"/>
-                <a:sym typeface="Open Sans"/>
-              </a:rPr>
-              <a:t>Marco Aurelio Zanote</a:t>
-            </a:r>
-            <a:r>
-              <a:rPr b="0" i="0" lang="en-US" sz="4762" u="none" cap="none" strike="noStrike">
-                <a:solidFill>
-                  <a:srgbClr val="000000"/>
-                </a:solidFill>
-                <a:latin typeface="Open Sans"/>
-                <a:ea typeface="Open Sans"/>
-                <a:cs typeface="Open Sans"/>
-                <a:sym typeface="Open Sans"/>
-              </a:rPr>
-              <a:t>, </a:t>
-            </a:r>
-            <a:r>
-              <a:rPr lang="en-US" sz="4762">
-                <a:latin typeface="Open Sans"/>
-                <a:ea typeface="Open Sans"/>
-                <a:cs typeface="Open Sans"/>
-                <a:sym typeface="Open Sans"/>
-              </a:rPr>
-              <a:t>Katia Milani Lara Bossi e Rodrigo da Rosa.</a:t>
+              <a:t>Victor Rosetti de Quiroz, Marco Aurelio, Katia Milani e Rodrigo da Rosa.</a:t>
             </a:r>
             <a:endParaRPr b="0" i="0" sz="1400" u="none" cap="none" strike="noStrike">
               <a:solidFill>
@@ -16537,8 +16489,8 @@
         </p:nvSpPr>
         <p:spPr>
           <a:xfrm>
-            <a:off x="16131649" y="28850895"/>
-            <a:ext cx="4989900" cy="1061400"/>
+            <a:off x="12262131" y="19214420"/>
+            <a:ext cx="12433200" cy="1594500"/>
           </a:xfrm>
           <a:prstGeom prst="rect">
             <a:avLst/>
@@ -16578,7 +16530,7 @@
                 <a:cs typeface="Inter"/>
                 <a:sym typeface="Inter"/>
               </a:rPr>
-              <a:t>Tela de relatórios</a:t>
+              <a:t>Tela de relatórios do</a:t>
             </a:r>
             <a:endParaRPr sz="3430">
               <a:latin typeface="Inter"/>
@@ -16612,7 +16564,41 @@
                 <a:cs typeface="Inter"/>
                 <a:sym typeface="Inter"/>
               </a:rPr>
-              <a:t> dos pacientes</a:t>
+              <a:t> pacientes</a:t>
+            </a:r>
+            <a:endParaRPr sz="3430">
+              <a:latin typeface="Inter"/>
+              <a:ea typeface="Inter"/>
+              <a:cs typeface="Inter"/>
+              <a:sym typeface="Inter"/>
+            </a:endParaRPr>
+          </a:p>
+          <a:p>
+            <a:pPr indent="0" lvl="0" marL="0" marR="0" rtl="0" algn="ctr">
+              <a:lnSpc>
+                <a:spcPct val="101020"/>
+              </a:lnSpc>
+              <a:spcBef>
+                <a:spcPts val="0"/>
+              </a:spcBef>
+              <a:spcAft>
+                <a:spcPts val="0"/>
+              </a:spcAft>
+              <a:buClr>
+                <a:srgbClr val="000000"/>
+              </a:buClr>
+              <a:buSzPts val="3430"/>
+              <a:buFont typeface="Arial"/>
+              <a:buNone/>
+            </a:pPr>
+            <a:r>
+              <a:rPr lang="en-US" sz="3430">
+                <a:latin typeface="Inter"/>
+                <a:ea typeface="Inter"/>
+                <a:cs typeface="Inter"/>
+                <a:sym typeface="Inter"/>
+              </a:rPr>
+              <a:t>(Tela profissional)</a:t>
             </a:r>
             <a:endParaRPr b="0" i="0" sz="1400" u="none" cap="none" strike="noStrike">
               <a:solidFill>
@@ -16634,8 +16620,95 @@
         </p:nvSpPr>
         <p:spPr>
           <a:xfrm>
-            <a:off x="2758145" y="30792409"/>
-            <a:ext cx="10186200" cy="732900"/>
+            <a:off x="12262143" y="28578304"/>
+            <a:ext cx="12433200" cy="528000"/>
+          </a:xfrm>
+          <a:prstGeom prst="rect">
+            <a:avLst/>
+          </a:prstGeom>
+          <a:noFill/>
+          <a:ln>
+            <a:noFill/>
+          </a:ln>
+        </p:spPr>
+        <p:txBody>
+          <a:bodyPr anchorCtr="0" anchor="t" bIns="0" lIns="0" spcFirstLastPara="1" rIns="0" wrap="square" tIns="0">
+            <a:spAutoFit/>
+          </a:bodyPr>
+          <a:lstStyle/>
+          <a:p>
+            <a:pPr indent="0" lvl="0" marL="0" marR="0" rtl="0" algn="ctr">
+              <a:lnSpc>
+                <a:spcPct val="101020"/>
+              </a:lnSpc>
+              <a:spcBef>
+                <a:spcPts val="0"/>
+              </a:spcBef>
+              <a:spcAft>
+                <a:spcPts val="0"/>
+              </a:spcAft>
+              <a:buClr>
+                <a:srgbClr val="000000"/>
+              </a:buClr>
+              <a:buSzPts val="3430"/>
+              <a:buFont typeface="Arial"/>
+              <a:buNone/>
+            </a:pPr>
+            <a:r>
+              <a:rPr b="0" i="0" lang="en-US" sz="3430" u="none" cap="none" strike="noStrike">
+                <a:solidFill>
+                  <a:srgbClr val="000000"/>
+                </a:solidFill>
+                <a:latin typeface="Inter"/>
+                <a:ea typeface="Inter"/>
+                <a:cs typeface="Inter"/>
+                <a:sym typeface="Inter"/>
+              </a:rPr>
+              <a:t>Fonte: Autoria Própria (202</a:t>
+            </a:r>
+            <a:r>
+              <a:rPr lang="en-US" sz="3430">
+                <a:latin typeface="Inter"/>
+                <a:ea typeface="Inter"/>
+                <a:cs typeface="Inter"/>
+                <a:sym typeface="Inter"/>
+              </a:rPr>
+              <a:t>6</a:t>
+            </a:r>
+            <a:r>
+              <a:rPr b="0" i="0" lang="en-US" sz="3430" u="none" cap="none" strike="noStrike">
+                <a:solidFill>
+                  <a:srgbClr val="000000"/>
+                </a:solidFill>
+                <a:latin typeface="Inter"/>
+                <a:ea typeface="Inter"/>
+                <a:cs typeface="Inter"/>
+                <a:sym typeface="Inter"/>
+              </a:rPr>
+              <a:t>)</a:t>
+            </a:r>
+            <a:endParaRPr b="0" i="0" sz="1400" u="none" cap="none" strike="noStrike">
+              <a:solidFill>
+                <a:srgbClr val="000000"/>
+              </a:solidFill>
+              <a:latin typeface="Arial"/>
+              <a:ea typeface="Arial"/>
+              <a:cs typeface="Arial"/>
+              <a:sym typeface="Arial"/>
+            </a:endParaRPr>
+          </a:p>
+        </p:txBody>
+      </p:sp>
+      <p:sp>
+        <p:nvSpPr>
+          <p:cNvPr id="129" name="Google Shape;129;p1"/>
+          <p:cNvSpPr txBox="1"/>
+          <p:nvPr/>
+        </p:nvSpPr>
+        <p:spPr>
+          <a:xfrm>
+            <a:off x="2758173" y="30800871"/>
+            <a:ext cx="10186500" cy="732900"/>
           </a:xfrm>
           <a:prstGeom prst="rect">
             <a:avLst/>
@@ -16694,14 +16767,14 @@
       </p:sp>
       <p:sp>
         <p:nvSpPr>
-          <p:cNvPr id="129" name="Google Shape;129;p1"/>
+          <p:cNvPr id="130" name="Google Shape;130;p1"/>
           <p:cNvSpPr txBox="1"/>
           <p:nvPr/>
         </p:nvSpPr>
         <p:spPr>
           <a:xfrm>
-            <a:off x="16608110" y="9857952"/>
-            <a:ext cx="10186200" cy="732900"/>
+            <a:off x="16608355" y="9858095"/>
+            <a:ext cx="10186386" cy="619337"/>
           </a:xfrm>
           <a:prstGeom prst="rect">
             <a:avLst/>
@@ -16760,14 +16833,14 @@
       </p:sp>
       <p:sp>
         <p:nvSpPr>
-          <p:cNvPr id="130" name="Google Shape;130;p1"/>
+          <p:cNvPr id="131" name="Google Shape;131;p1"/>
           <p:cNvSpPr txBox="1"/>
           <p:nvPr/>
         </p:nvSpPr>
         <p:spPr>
           <a:xfrm>
-            <a:off x="5072638" y="9921419"/>
-            <a:ext cx="5609100" cy="732900"/>
+            <a:off x="2644303" y="9858095"/>
+            <a:ext cx="10186386" cy="619337"/>
           </a:xfrm>
           <a:prstGeom prst="rect">
             <a:avLst/>
@@ -16826,14 +16899,14 @@
       </p:sp>
       <p:sp>
         <p:nvSpPr>
-          <p:cNvPr id="131" name="Google Shape;131;p1"/>
+          <p:cNvPr id="132" name="Google Shape;132;p1"/>
           <p:cNvSpPr txBox="1"/>
           <p:nvPr/>
         </p:nvSpPr>
         <p:spPr>
           <a:xfrm>
-            <a:off x="5356383" y="20356905"/>
-            <a:ext cx="4989900" cy="732900"/>
+            <a:off x="2758179" y="20150252"/>
+            <a:ext cx="10186500" cy="732900"/>
           </a:xfrm>
           <a:prstGeom prst="rect">
             <a:avLst/>
@@ -16892,226 +16965,14 @@
       </p:sp>
       <p:sp>
         <p:nvSpPr>
-          <p:cNvPr id="132" name="Google Shape;132;p1"/>
-          <p:cNvSpPr txBox="1"/>
-          <p:nvPr/>
-        </p:nvSpPr>
-        <p:spPr>
-          <a:xfrm>
-            <a:off x="15582395" y="31855364"/>
-            <a:ext cx="12168300" cy="6441000"/>
-          </a:xfrm>
-          <a:prstGeom prst="rect">
-            <a:avLst/>
-          </a:prstGeom>
-          <a:noFill/>
-          <a:ln>
-            <a:noFill/>
-          </a:ln>
-        </p:spPr>
-        <p:txBody>
-          <a:bodyPr anchorCtr="0" anchor="t" bIns="0" lIns="0" spcFirstLastPara="1" rIns="0" wrap="square" tIns="0">
-            <a:spAutoFit/>
-          </a:bodyPr>
-          <a:lstStyle/>
-          <a:p>
-            <a:pPr indent="-446398" lvl="1" marL="914386" marR="0" rtl="0" algn="l">
-              <a:lnSpc>
-                <a:spcPct val="140000"/>
-              </a:lnSpc>
-              <a:spcBef>
-                <a:spcPts val="0"/>
-              </a:spcBef>
-              <a:spcAft>
-                <a:spcPts val="0"/>
-              </a:spcAft>
-              <a:buSzPts val="3430"/>
-              <a:buFont typeface="Open Sans"/>
-              <a:buChar char="•"/>
-            </a:pPr>
-            <a:r>
-              <a:rPr lang="en-US" sz="3430">
-                <a:latin typeface="Open Sans"/>
-                <a:ea typeface="Open Sans"/>
-                <a:cs typeface="Open Sans"/>
-                <a:sym typeface="Open Sans"/>
-              </a:rPr>
-              <a:t>YAMAMOTO, Maya Yoshiko. Site oficial da clínica RPG Maya. Disponível em:</a:t>
-            </a:r>
-            <a:r>
-              <a:rPr lang="en-US" sz="3430">
-                <a:uFill>
-                  <a:noFill/>
-                </a:uFill>
-                <a:latin typeface="Open Sans"/>
-                <a:ea typeface="Open Sans"/>
-                <a:cs typeface="Open Sans"/>
-                <a:sym typeface="Open Sans"/>
-                <a:hlinkClick r:id="rId7"/>
-              </a:rPr>
-              <a:t>https://mayayamamoto.com.br/</a:t>
-            </a:r>
-            <a:r>
-              <a:rPr lang="en-US" sz="3430">
-                <a:latin typeface="Open Sans"/>
-                <a:ea typeface="Open Sans"/>
-                <a:cs typeface="Open Sans"/>
-                <a:sym typeface="Open Sans"/>
-              </a:rPr>
-              <a:t>. </a:t>
-            </a:r>
-            <a:endParaRPr sz="3430">
-              <a:latin typeface="Open Sans"/>
-              <a:ea typeface="Open Sans"/>
-              <a:cs typeface="Open Sans"/>
-              <a:sym typeface="Open Sans"/>
-            </a:endParaRPr>
-          </a:p>
-          <a:p>
-            <a:pPr indent="-446398" lvl="1" marL="914386" marR="0" rtl="0" algn="l">
-              <a:lnSpc>
-                <a:spcPct val="140000"/>
-              </a:lnSpc>
-              <a:spcBef>
-                <a:spcPts val="0"/>
-              </a:spcBef>
-              <a:spcAft>
-                <a:spcPts val="0"/>
-              </a:spcAft>
-              <a:buSzPts val="3430"/>
-              <a:buFont typeface="Open Sans"/>
-              <a:buChar char="•"/>
-            </a:pPr>
-            <a:r>
-              <a:rPr lang="en-US" sz="3430">
-                <a:latin typeface="Open Sans"/>
-                <a:ea typeface="Open Sans"/>
-                <a:cs typeface="Open Sans"/>
-                <a:sym typeface="Open Sans"/>
-              </a:rPr>
-              <a:t>YAMAMOTO, Maya Yoshiko. Perfil profissional no LinkedIn. Disponível em: </a:t>
-            </a:r>
-            <a:r>
-              <a:rPr lang="en-US" sz="3430">
-                <a:uFill>
-                  <a:noFill/>
-                </a:uFill>
-                <a:latin typeface="Open Sans"/>
-                <a:ea typeface="Open Sans"/>
-                <a:cs typeface="Open Sans"/>
-                <a:sym typeface="Open Sans"/>
-                <a:hlinkClick r:id="rId8"/>
-              </a:rPr>
-              <a:t>https://br.linkedin.com/in/maya-yoshiko-yamamoto-bb18a736</a:t>
-            </a:r>
-            <a:r>
-              <a:rPr lang="en-US" sz="3430">
-                <a:latin typeface="Open Sans"/>
-                <a:ea typeface="Open Sans"/>
-                <a:cs typeface="Open Sans"/>
-                <a:sym typeface="Open Sans"/>
-              </a:rPr>
-              <a:t>. </a:t>
-            </a:r>
-            <a:endParaRPr sz="3430">
-              <a:latin typeface="Open Sans"/>
-              <a:ea typeface="Open Sans"/>
-              <a:cs typeface="Open Sans"/>
-              <a:sym typeface="Open Sans"/>
-            </a:endParaRPr>
-          </a:p>
-          <a:p>
-            <a:pPr indent="-446398" lvl="1" marL="914386" marR="0" rtl="0" algn="l">
-              <a:lnSpc>
-                <a:spcPct val="140000"/>
-              </a:lnSpc>
-              <a:spcBef>
-                <a:spcPts val="0"/>
-              </a:spcBef>
-              <a:spcAft>
-                <a:spcPts val="0"/>
-              </a:spcAft>
-              <a:buSzPts val="3430"/>
-              <a:buFont typeface="Open Sans"/>
-              <a:buChar char="•"/>
-            </a:pPr>
-            <a:r>
-              <a:rPr lang="en-US" sz="3430">
-                <a:latin typeface="Open Sans"/>
-                <a:ea typeface="Open Sans"/>
-                <a:cs typeface="Open Sans"/>
-                <a:sym typeface="Open Sans"/>
-              </a:rPr>
-              <a:t>CLÍNICA RPG MAYA. Perfil no Instagram. Disponível em:</a:t>
-            </a:r>
-            <a:r>
-              <a:rPr lang="en-US" sz="3430">
-                <a:uFill>
-                  <a:noFill/>
-                </a:uFill>
-                <a:latin typeface="Open Sans"/>
-                <a:ea typeface="Open Sans"/>
-                <a:cs typeface="Open Sans"/>
-                <a:sym typeface="Open Sans"/>
-                <a:hlinkClick r:id="rId9"/>
-              </a:rPr>
-              <a:t> https://www.instagram.com/rpg.maya/</a:t>
-            </a:r>
-            <a:r>
-              <a:rPr lang="en-US" sz="3430">
-                <a:latin typeface="Open Sans"/>
-                <a:ea typeface="Open Sans"/>
-                <a:cs typeface="Open Sans"/>
-                <a:sym typeface="Open Sans"/>
-              </a:rPr>
-              <a:t>.</a:t>
-            </a:r>
-            <a:endParaRPr sz="1100">
-              <a:solidFill>
-                <a:schemeClr val="dk1"/>
-              </a:solidFill>
-            </a:endParaRPr>
-          </a:p>
-          <a:p>
-            <a:pPr indent="0" lvl="0" marL="0" marR="0" rtl="0" algn="just">
-              <a:lnSpc>
-                <a:spcPct val="140000"/>
-              </a:lnSpc>
-              <a:spcBef>
-                <a:spcPts val="0"/>
-              </a:spcBef>
-              <a:spcAft>
-                <a:spcPts val="0"/>
-              </a:spcAft>
-              <a:buClr>
-                <a:srgbClr val="000000"/>
-              </a:buClr>
-              <a:buSzPts val="3430"/>
-              <a:buFont typeface="Arial"/>
-              <a:buNone/>
-            </a:pPr>
-            <a:r>
-              <a:t/>
-            </a:r>
-            <a:endParaRPr sz="3430">
-              <a:latin typeface="Open Sans"/>
-              <a:ea typeface="Open Sans"/>
-              <a:cs typeface="Open Sans"/>
-              <a:sym typeface="Open Sans"/>
-            </a:endParaRPr>
-          </a:p>
-        </p:txBody>
-      </p:sp>
-      <p:sp>
-        <p:nvSpPr>
           <p:cNvPr id="133" name="Google Shape;133;p1"/>
           <p:cNvSpPr txBox="1"/>
           <p:nvPr/>
         </p:nvSpPr>
         <p:spPr>
           <a:xfrm>
-            <a:off x="1595851" y="31719391"/>
-            <a:ext cx="12562500" cy="3911100"/>
+            <a:off x="15410263" y="31905309"/>
+            <a:ext cx="12280800" cy="5702100"/>
           </a:xfrm>
           <a:prstGeom prst="rect">
             <a:avLst/>
@@ -17138,9 +16999,9 @@
                 <a:spcPts val="0"/>
               </a:spcAft>
               <a:buClr>
-                <a:srgbClr val="000000"/>
-              </a:buClr>
-              <a:buSzPts val="3430"/>
+                <a:schemeClr val="dk1"/>
+              </a:buClr>
+              <a:buSzPts val="1100"/>
               <a:buFont typeface="Arial"/>
               <a:buNone/>
             </a:pPr>
@@ -17151,20 +17012,17 @@
                 <a:cs typeface="Open Sans"/>
                 <a:sym typeface="Open Sans"/>
               </a:rPr>
-              <a:t>As tecnologias utilizadas no desenvolvimento do sistema foram selecionadas com o objetivo de garantir desempenho, escalabilidade e eficiência na comunicação entre frontend e backend. </a:t>
+              <a:t>[1] SILVA, Luiz Fernando Tavares; SILVA, Hugo Henrique. Desenvolvimento de aplicação web: prontuário digital para a área de fisioterapia. Belo Horizonte: PUC Minas, 2025.</a:t>
             </a:r>
-            <a:endParaRPr b="0" i="0" sz="1400" u="none" cap="none" strike="noStrike">
-              <a:solidFill>
-                <a:srgbClr val="000000"/>
-              </a:solidFill>
-              <a:latin typeface="Arial"/>
-              <a:ea typeface="Arial"/>
-              <a:cs typeface="Arial"/>
-              <a:sym typeface="Arial"/>
+            <a:endParaRPr sz="3430">
+              <a:latin typeface="Open Sans"/>
+              <a:ea typeface="Open Sans"/>
+              <a:cs typeface="Open Sans"/>
+              <a:sym typeface="Open Sans"/>
             </a:endParaRPr>
           </a:p>
           <a:p>
-            <a:pPr indent="0" lvl="0" marL="0" marR="0" rtl="0" algn="l">
+            <a:pPr indent="0" lvl="0" marL="0" marR="0" rtl="0" algn="just">
               <a:lnSpc>
                 <a:spcPct val="140000"/>
               </a:lnSpc>
@@ -17174,6 +17032,11 @@
               <a:spcAft>
                 <a:spcPts val="0"/>
               </a:spcAft>
+              <a:buClr>
+                <a:schemeClr val="dk1"/>
+              </a:buClr>
+              <a:buSzPts val="1100"/>
+              <a:buFont typeface="Arial"/>
               <a:buNone/>
             </a:pPr>
             <a:r>
@@ -17198,7 +17061,41 @@
                 <a:spcPts val="0"/>
               </a:spcAft>
               <a:buClr>
-                <a:srgbClr val="000000"/>
+                <a:schemeClr val="dk1"/>
+              </a:buClr>
+              <a:buSzPts val="1100"/>
+              <a:buFont typeface="Arial"/>
+              <a:buNone/>
+            </a:pPr>
+            <a:r>
+              <a:rPr lang="en-US" sz="3430">
+                <a:latin typeface="Open Sans"/>
+                <a:ea typeface="Open Sans"/>
+                <a:cs typeface="Open Sans"/>
+                <a:sym typeface="Open Sans"/>
+              </a:rPr>
+              <a:t>[2] FREIRE, Tiago Magalhães. Aplicativo para avaliação e orientação do tratamento. Fortaleza: Centro Universitário Christus, 2023. </a:t>
+            </a:r>
+            <a:endParaRPr sz="3430">
+              <a:latin typeface="Open Sans"/>
+              <a:ea typeface="Open Sans"/>
+              <a:cs typeface="Open Sans"/>
+              <a:sym typeface="Open Sans"/>
+            </a:endParaRPr>
+          </a:p>
+          <a:p>
+            <a:pPr indent="0" lvl="0" marL="0" rtl="0" algn="just">
+              <a:lnSpc>
+                <a:spcPct val="140000"/>
+              </a:lnSpc>
+              <a:spcBef>
+                <a:spcPts val="0"/>
+              </a:spcBef>
+              <a:spcAft>
+                <a:spcPts val="0"/>
+              </a:spcAft>
+              <a:buClr>
+                <a:schemeClr val="dk1"/>
               </a:buClr>
               <a:buSzPts val="3430"/>
               <a:buFont typeface="Arial"/>
@@ -17207,14 +17104,11 @@
             <a:r>
               <a:t/>
             </a:r>
-            <a:endParaRPr b="0" i="0" sz="1400" u="none" cap="none" strike="noStrike">
-              <a:solidFill>
-                <a:srgbClr val="000000"/>
-              </a:solidFill>
-              <a:latin typeface="Arial"/>
-              <a:ea typeface="Arial"/>
-              <a:cs typeface="Arial"/>
-              <a:sym typeface="Arial"/>
+            <a:endParaRPr sz="3430">
+              <a:latin typeface="Open Sans"/>
+              <a:ea typeface="Open Sans"/>
+              <a:cs typeface="Open Sans"/>
+              <a:sym typeface="Open Sans"/>
             </a:endParaRPr>
           </a:p>
         </p:txBody>
@@ -17227,8 +17121,8 @@
         </p:nvSpPr>
         <p:spPr>
           <a:xfrm>
-            <a:off x="1570002" y="10992504"/>
-            <a:ext cx="12562500" cy="9036600"/>
+            <a:off x="1545950" y="31751700"/>
+            <a:ext cx="12762000" cy="6441000"/>
           </a:xfrm>
           <a:prstGeom prst="rect">
             <a:avLst/>
@@ -17244,21 +17138,16 @@
           </a:bodyPr>
           <a:lstStyle/>
           <a:p>
-            <a:pPr indent="0" lvl="0" marL="0" marR="0" rtl="0" algn="l">
-              <a:lnSpc>
-                <a:spcPct val="115000"/>
-              </a:lnSpc>
-              <a:spcBef>
-                <a:spcPts val="1200"/>
-              </a:spcBef>
-              <a:spcAft>
-                <a:spcPts val="0"/>
-              </a:spcAft>
-              <a:buClr>
-                <a:schemeClr val="dk1"/>
-              </a:buClr>
-              <a:buSzPts val="1100"/>
-              <a:buFont typeface="Arial"/>
+            <a:pPr indent="0" lvl="0" marL="0" marR="0" rtl="0" algn="just">
+              <a:lnSpc>
+                <a:spcPct val="140000"/>
+              </a:lnSpc>
+              <a:spcBef>
+                <a:spcPts val="0"/>
+              </a:spcBef>
+              <a:spcAft>
+                <a:spcPts val="0"/>
+              </a:spcAft>
               <a:buNone/>
             </a:pPr>
             <a:r>
@@ -17268,7 +17157,61 @@
                 <a:cs typeface="Open Sans"/>
                 <a:sym typeface="Open Sans"/>
               </a:rPr>
-              <a:t>A clínica RPG Maya enfrenta dificuldades na organização e no acompanhamento dos pacientes. Antes, a própria Maya realizava o registro manual em papel, como dados dos pacientes, sessões, datas e histórico, o que tornava o controle pouco eficiente diante do grande volume de informações.</a:t>
+              <a:t>Com base nessa proposta, iniciamos o desenvolvimento de um sistema em que o mobile foi desenvolvido utilizando </a:t>
+            </a:r>
+            <a:r>
+              <a:rPr b="1" lang="en-US" sz="3430">
+                <a:latin typeface="Open Sans"/>
+                <a:ea typeface="Open Sans"/>
+                <a:cs typeface="Open Sans"/>
+                <a:sym typeface="Open Sans"/>
+              </a:rPr>
+              <a:t>Java</a:t>
+            </a:r>
+            <a:r>
+              <a:rPr lang="en-US" sz="3430">
+                <a:latin typeface="Open Sans"/>
+                <a:ea typeface="Open Sans"/>
+                <a:cs typeface="Open Sans"/>
+                <a:sym typeface="Open Sans"/>
+              </a:rPr>
+              <a:t> e </a:t>
+            </a:r>
+            <a:r>
+              <a:rPr b="1" lang="en-US" sz="3430">
+                <a:latin typeface="Open Sans"/>
+                <a:ea typeface="Open Sans"/>
+                <a:cs typeface="Open Sans"/>
+                <a:sym typeface="Open Sans"/>
+              </a:rPr>
+              <a:t>Android Studio </a:t>
+            </a:r>
+            <a:r>
+              <a:rPr lang="en-US" sz="3430">
+                <a:latin typeface="Open Sans"/>
+                <a:ea typeface="Open Sans"/>
+                <a:cs typeface="Open Sans"/>
+                <a:sym typeface="Open Sans"/>
+              </a:rPr>
+              <a:t>, com prototipação das interfaces no </a:t>
+            </a:r>
+            <a:r>
+              <a:rPr b="1" lang="en-US" sz="3430">
+                <a:latin typeface="Open Sans"/>
+                <a:ea typeface="Open Sans"/>
+                <a:cs typeface="Open Sans"/>
+                <a:sym typeface="Open Sans"/>
+              </a:rPr>
+              <a:t>Figma</a:t>
+            </a:r>
+            <a:r>
+              <a:rPr lang="en-US" sz="3430">
+                <a:latin typeface="Open Sans"/>
+                <a:ea typeface="Open Sans"/>
+                <a:cs typeface="Open Sans"/>
+                <a:sym typeface="Open Sans"/>
+              </a:rPr>
+              <a:t>.</a:t>
             </a:r>
             <a:endParaRPr sz="3430">
               <a:latin typeface="Open Sans"/>
@@ -17278,82 +17221,16 @@
             </a:endParaRPr>
           </a:p>
           <a:p>
-            <a:pPr indent="0" lvl="0" marL="0" marR="0" rtl="0" algn="l">
-              <a:lnSpc>
-                <a:spcPct val="115000"/>
-              </a:lnSpc>
-              <a:spcBef>
-                <a:spcPts val="1200"/>
-              </a:spcBef>
-              <a:spcAft>
-                <a:spcPts val="0"/>
-              </a:spcAft>
-              <a:buClr>
-                <a:schemeClr val="dk1"/>
-              </a:buClr>
-              <a:buSzPts val="1100"/>
-              <a:buFont typeface="Arial"/>
-              <a:buNone/>
-            </a:pPr>
-            <a:r>
-              <a:t/>
-            </a:r>
-            <a:endParaRPr sz="3430">
-              <a:latin typeface="Open Sans"/>
-              <a:ea typeface="Open Sans"/>
-              <a:cs typeface="Open Sans"/>
-              <a:sym typeface="Open Sans"/>
-            </a:endParaRPr>
-          </a:p>
-          <a:p>
-            <a:pPr indent="0" lvl="0" marL="0" marR="0" rtl="0" algn="l">
-              <a:lnSpc>
-                <a:spcPct val="115000"/>
-              </a:lnSpc>
-              <a:spcBef>
-                <a:spcPts val="1200"/>
-              </a:spcBef>
-              <a:spcAft>
-                <a:spcPts val="0"/>
-              </a:spcAft>
-              <a:buClr>
-                <a:schemeClr val="dk1"/>
-              </a:buClr>
-              <a:buSzPts val="1100"/>
-              <a:buFont typeface="Arial"/>
-              <a:buNone/>
-            </a:pPr>
-            <a:r>
-              <a:rPr lang="en-US" sz="3430">
-                <a:latin typeface="Open Sans"/>
-                <a:ea typeface="Open Sans"/>
-                <a:cs typeface="Open Sans"/>
-                <a:sym typeface="Open Sans"/>
-              </a:rPr>
-              <a:t>Além disso, havia problemas relacionados ao controle de datas e retornos, já que muitos pacientes esqueciam consultas por falta de um sistema de agendamento com lembretes. Outro ponto crítico era a dificuldade na geração de relatórios, o que prejudicava o monitoramento do progresso dos pacientes e a análise das informações clínicas.</a:t>
-            </a:r>
-            <a:endParaRPr sz="1100">
-              <a:solidFill>
-                <a:schemeClr val="dk1"/>
-              </a:solidFill>
-            </a:endParaRPr>
-          </a:p>
-          <a:p>
-            <a:pPr indent="0" lvl="0" marL="0" rtl="0" algn="l">
-              <a:lnSpc>
-                <a:spcPct val="115000"/>
-              </a:lnSpc>
-              <a:spcBef>
-                <a:spcPts val="1200"/>
-              </a:spcBef>
-              <a:spcAft>
-                <a:spcPts val="0"/>
-              </a:spcAft>
-              <a:buClr>
-                <a:schemeClr val="dk1"/>
-              </a:buClr>
-              <a:buSzPts val="1100"/>
-              <a:buFont typeface="Arial"/>
+            <a:pPr indent="0" lvl="0" marL="0" marR="0" rtl="0" algn="just">
+              <a:lnSpc>
+                <a:spcPct val="140000"/>
+              </a:lnSpc>
+              <a:spcBef>
+                <a:spcPts val="0"/>
+              </a:spcBef>
+              <a:spcAft>
+                <a:spcPts val="0"/>
+              </a:spcAft>
               <a:buNone/>
             </a:pPr>
             <a:r>
@@ -17372,22 +17249,138 @@
                 <a:spcPct val="140000"/>
               </a:lnSpc>
               <a:spcBef>
-                <a:spcPts val="1200"/>
-              </a:spcBef>
-              <a:spcAft>
-                <a:spcPts val="0"/>
-              </a:spcAft>
-              <a:buClr>
-                <a:srgbClr val="000000"/>
-              </a:buClr>
-              <a:buSzPts val="3430"/>
-              <a:buFont typeface="Arial"/>
+                <a:spcPts val="0"/>
+              </a:spcBef>
+              <a:spcAft>
+                <a:spcPts val="0"/>
+              </a:spcAft>
+              <a:buNone/>
+            </a:pPr>
+            <a:r>
+              <a:rPr lang="en-US" sz="3430">
+                <a:latin typeface="Open Sans"/>
+                <a:ea typeface="Open Sans"/>
+                <a:cs typeface="Open Sans"/>
+                <a:sym typeface="Open Sans"/>
+              </a:rPr>
+              <a:t>Na camada de servidor e banco de dados, utilizamos </a:t>
+            </a:r>
+            <a:r>
+              <a:rPr b="1" lang="en-US" sz="3430">
+                <a:latin typeface="Open Sans"/>
+                <a:ea typeface="Open Sans"/>
+                <a:cs typeface="Open Sans"/>
+                <a:sym typeface="Open Sans"/>
+              </a:rPr>
+              <a:t>Python</a:t>
+            </a:r>
+            <a:r>
+              <a:rPr lang="en-US" sz="3430">
+                <a:latin typeface="Open Sans"/>
+                <a:ea typeface="Open Sans"/>
+                <a:cs typeface="Open Sans"/>
+                <a:sym typeface="Open Sans"/>
+              </a:rPr>
+              <a:t> e </a:t>
+            </a:r>
+            <a:r>
+              <a:rPr b="1" lang="en-US" sz="3430">
+                <a:latin typeface="Open Sans"/>
+                <a:ea typeface="Open Sans"/>
+                <a:cs typeface="Open Sans"/>
+                <a:sym typeface="Open Sans"/>
+              </a:rPr>
+              <a:t>FastAPI</a:t>
+            </a:r>
+            <a:r>
+              <a:rPr lang="en-US" sz="3430">
+                <a:latin typeface="Open Sans"/>
+                <a:ea typeface="Open Sans"/>
+                <a:cs typeface="Open Sans"/>
+                <a:sym typeface="Open Sans"/>
+              </a:rPr>
+              <a:t> para a construção da API, </a:t>
+            </a:r>
+            <a:r>
+              <a:rPr b="1" lang="en-US" sz="3430">
+                <a:latin typeface="Open Sans"/>
+                <a:ea typeface="Open Sans"/>
+                <a:cs typeface="Open Sans"/>
+                <a:sym typeface="Open Sans"/>
+              </a:rPr>
+              <a:t>MySQL</a:t>
+            </a:r>
+            <a:r>
+              <a:rPr lang="en-US" sz="3430">
+                <a:latin typeface="Open Sans"/>
+                <a:ea typeface="Open Sans"/>
+                <a:cs typeface="Open Sans"/>
+                <a:sym typeface="Open Sans"/>
+              </a:rPr>
+              <a:t> para o armazenamento das informações, </a:t>
+            </a:r>
+            <a:r>
+              <a:rPr b="1" lang="en-US" sz="3430">
+                <a:latin typeface="Open Sans"/>
+                <a:ea typeface="Open Sans"/>
+                <a:cs typeface="Open Sans"/>
+                <a:sym typeface="Open Sans"/>
+              </a:rPr>
+              <a:t>Docker</a:t>
+            </a:r>
+            <a:r>
+              <a:rPr lang="en-US" sz="3430">
+                <a:latin typeface="Open Sans"/>
+                <a:ea typeface="Open Sans"/>
+                <a:cs typeface="Open Sans"/>
+                <a:sym typeface="Open Sans"/>
+              </a:rPr>
+              <a:t> para padronização do ambiente e </a:t>
+            </a:r>
+            <a:r>
+              <a:rPr b="1" lang="en-US" sz="3430">
+                <a:latin typeface="Open Sans"/>
+                <a:ea typeface="Open Sans"/>
+                <a:cs typeface="Open Sans"/>
+                <a:sym typeface="Open Sans"/>
+              </a:rPr>
+              <a:t>Render</a:t>
+            </a:r>
+            <a:r>
+              <a:rPr lang="en-US" sz="3430">
+                <a:latin typeface="Open Sans"/>
+                <a:ea typeface="Open Sans"/>
+                <a:cs typeface="Open Sans"/>
+                <a:sym typeface="Open Sans"/>
+              </a:rPr>
+              <a:t> para hospedagem do sistema.</a:t>
+            </a:r>
+            <a:endParaRPr sz="1100">
+              <a:solidFill>
+                <a:schemeClr val="dk1"/>
+              </a:solidFill>
+            </a:endParaRPr>
+          </a:p>
+          <a:p>
+            <a:pPr indent="0" lvl="0" marL="0" marR="0" rtl="0" algn="just">
+              <a:lnSpc>
+                <a:spcPct val="140000"/>
+              </a:lnSpc>
+              <a:spcBef>
+                <a:spcPts val="0"/>
+              </a:spcBef>
+              <a:spcAft>
+                <a:spcPts val="0"/>
+              </a:spcAft>
               <a:buNone/>
             </a:pPr>
             <a:r>
               <a:t/>
             </a:r>
             <a:endParaRPr sz="3430">
+              <a:solidFill>
+                <a:schemeClr val="dk1"/>
+              </a:solidFill>
               <a:latin typeface="Open Sans"/>
               <a:ea typeface="Open Sans"/>
               <a:cs typeface="Open Sans"/>
@@ -17404,8 +17397,8 @@
         </p:nvSpPr>
         <p:spPr>
           <a:xfrm>
-            <a:off x="1779636" y="21417715"/>
-            <a:ext cx="12294300" cy="8275500"/>
+            <a:off x="1595870" y="10749184"/>
+            <a:ext cx="12562800" cy="8658300"/>
           </a:xfrm>
           <a:prstGeom prst="rect">
             <a:avLst/>
@@ -17421,12 +17414,12 @@
           </a:bodyPr>
           <a:lstStyle/>
           <a:p>
-            <a:pPr indent="0" lvl="0" marL="0" marR="0" rtl="0" algn="l">
-              <a:lnSpc>
-                <a:spcPct val="115000"/>
-              </a:lnSpc>
-              <a:spcBef>
-                <a:spcPts val="1200"/>
+            <a:pPr indent="0" lvl="0" marL="0" rtl="0" algn="just">
+              <a:lnSpc>
+                <a:spcPct val="140000"/>
+              </a:lnSpc>
+              <a:spcBef>
+                <a:spcPts val="0"/>
               </a:spcBef>
               <a:spcAft>
                 <a:spcPts val="0"/>
@@ -17440,14 +17433,20 @@
             </a:pPr>
             <a:r>
               <a:rPr lang="en-US" sz="3430">
+                <a:solidFill>
+                  <a:schemeClr val="dk1"/>
+                </a:solidFill>
                 <a:latin typeface="Open Sans"/>
                 <a:ea typeface="Open Sans"/>
                 <a:cs typeface="Open Sans"/>
                 <a:sym typeface="Open Sans"/>
               </a:rPr>
-              <a:t>A proposta do projeto é um aplicativo, com o objetivo de otimizar a gestão e o acompanhamento dos pacientes, substituindo o controle manual por uma solução digital estruturada.</a:t>
+              <a:t>A clínica RPG Maya enfrenta dificuldades na organização e no acompanhamento dos pacientes, cenário comum em atendimentos fisioterapêuticos que ainda utilizam métodos manuais[1]. Os registros eram feitos em papel, incluindo dados, sessões, datas e histórico, o que tornava o controle pouco eficiente diante do grande volume de informações.</a:t>
             </a:r>
             <a:endParaRPr sz="3430">
+              <a:solidFill>
+                <a:schemeClr val="dk1"/>
+              </a:solidFill>
               <a:latin typeface="Open Sans"/>
               <a:ea typeface="Open Sans"/>
               <a:cs typeface="Open Sans"/>
@@ -17455,12 +17454,12 @@
             </a:endParaRPr>
           </a:p>
           <a:p>
-            <a:pPr indent="0" lvl="0" marL="0" marR="0" rtl="0" algn="l">
-              <a:lnSpc>
-                <a:spcPct val="115000"/>
-              </a:lnSpc>
-              <a:spcBef>
-                <a:spcPts val="1200"/>
+            <a:pPr indent="0" lvl="0" marL="0" rtl="0" algn="just">
+              <a:lnSpc>
+                <a:spcPct val="140000"/>
+              </a:lnSpc>
+              <a:spcBef>
+                <a:spcPts val="0"/>
               </a:spcBef>
               <a:spcAft>
                 <a:spcPts val="0"/>
@@ -17473,15 +17472,12 @@
               <a:buNone/>
             </a:pPr>
             <a:r>
-              <a:rPr lang="en-US" sz="3430">
-                <a:latin typeface="Open Sans"/>
-                <a:ea typeface="Open Sans"/>
-                <a:cs typeface="Open Sans"/>
-                <a:sym typeface="Open Sans"/>
-              </a:rPr>
-              <a:t>O sistema permite o armazenamento e gerenciamento dos dados clínicos, controle de sessões e agendamento com lembretes automatizados, reduzindo esquecimentos de consultas. Além disso, possibilita a geração de relatórios, facilitando o monitoramento do progresso dos pacientes.</a:t>
+              <a:t/>
             </a:r>
             <a:endParaRPr sz="3430">
+              <a:solidFill>
+                <a:schemeClr val="dk1"/>
+              </a:solidFill>
               <a:latin typeface="Open Sans"/>
               <a:ea typeface="Open Sans"/>
               <a:cs typeface="Open Sans"/>
@@ -17489,43 +17485,15 @@
             </a:endParaRPr>
           </a:p>
           <a:p>
-            <a:pPr indent="0" lvl="0" marL="0" marR="0" rtl="0" algn="l">
-              <a:lnSpc>
-                <a:spcPct val="115000"/>
-              </a:lnSpc>
-              <a:spcBef>
-                <a:spcPts val="1200"/>
-              </a:spcBef>
-              <a:spcAft>
-                <a:spcPts val="0"/>
-              </a:spcAft>
-              <a:buClr>
-                <a:schemeClr val="dk1"/>
-              </a:buClr>
-              <a:buSzPts val="1100"/>
-              <a:buFont typeface="Arial"/>
-              <a:buNone/>
-            </a:pPr>
-            <a:r>
-              <a:t/>
-            </a:r>
-            <a:endParaRPr sz="3430">
-              <a:latin typeface="Open Sans"/>
-              <a:ea typeface="Open Sans"/>
-              <a:cs typeface="Open Sans"/>
-              <a:sym typeface="Open Sans"/>
-            </a:endParaRPr>
-          </a:p>
-          <a:p>
-            <a:pPr indent="0" lvl="0" marL="0" marR="0" rtl="0" algn="l">
-              <a:lnSpc>
-                <a:spcPct val="115000"/>
-              </a:lnSpc>
-              <a:spcBef>
-                <a:spcPts val="1200"/>
-              </a:spcBef>
-              <a:spcAft>
-                <a:spcPts val="1200"/>
+            <a:pPr indent="0" lvl="0" marL="0" rtl="0" algn="just">
+              <a:lnSpc>
+                <a:spcPct val="140000"/>
+              </a:lnSpc>
+              <a:spcBef>
+                <a:spcPts val="0"/>
+              </a:spcBef>
+              <a:spcAft>
+                <a:spcPts val="0"/>
               </a:spcAft>
               <a:buClr>
                 <a:schemeClr val="dk1"/>
@@ -17536,14 +17504,20 @@
             </a:pPr>
             <a:r>
               <a:rPr lang="en-US" sz="3430">
+                <a:solidFill>
+                  <a:schemeClr val="dk1"/>
+                </a:solidFill>
                 <a:latin typeface="Open Sans"/>
                 <a:ea typeface="Open Sans"/>
                 <a:cs typeface="Open Sans"/>
                 <a:sym typeface="Open Sans"/>
               </a:rPr>
-              <a:t>Adicionalmente, o aplicativo inclui funcionalidades como desafios e metas, contribuindo para o incentivo dos pacientes à realização dos exercícios. </a:t>
+              <a:t>Além disso, havia problemas no controle de retornos, já que muitos pacientes esqueciam consultas por falta de lembretes. Outro ponto crítico era a dificuldade na geração de relatórios, prejudicando o monitoramento do progresso e a análise das informações clínicas.</a:t>
             </a:r>
             <a:endParaRPr sz="3430">
+              <a:solidFill>
+                <a:schemeClr val="dk1"/>
+              </a:solidFill>
               <a:latin typeface="Open Sans"/>
               <a:ea typeface="Open Sans"/>
               <a:cs typeface="Open Sans"/>
@@ -17560,8 +17534,136 @@
         </p:nvSpPr>
         <p:spPr>
           <a:xfrm>
-            <a:off x="136931" y="39681259"/>
-            <a:ext cx="28242300" cy="1830300"/>
+            <a:off x="1294963" y="21117888"/>
+            <a:ext cx="13164600" cy="8658600"/>
+          </a:xfrm>
+          <a:prstGeom prst="rect">
+            <a:avLst/>
+          </a:prstGeom>
+          <a:noFill/>
+          <a:ln>
+            <a:noFill/>
+          </a:ln>
+        </p:spPr>
+        <p:txBody>
+          <a:bodyPr anchorCtr="0" anchor="t" bIns="0" lIns="0" spcFirstLastPara="1" rIns="0" wrap="square" tIns="0">
+            <a:spAutoFit/>
+          </a:bodyPr>
+          <a:lstStyle/>
+          <a:p>
+            <a:pPr indent="0" lvl="0" marL="0" rtl="0" algn="just">
+              <a:lnSpc>
+                <a:spcPct val="140000"/>
+              </a:lnSpc>
+              <a:spcBef>
+                <a:spcPts val="0"/>
+              </a:spcBef>
+              <a:spcAft>
+                <a:spcPts val="0"/>
+              </a:spcAft>
+              <a:buClr>
+                <a:schemeClr val="dk1"/>
+              </a:buClr>
+              <a:buSzPts val="1100"/>
+              <a:buFont typeface="Arial"/>
+              <a:buNone/>
+            </a:pPr>
+            <a:r>
+              <a:rPr lang="en-US" sz="3430">
+                <a:latin typeface="Open Sans"/>
+                <a:ea typeface="Open Sans"/>
+                <a:cs typeface="Open Sans"/>
+                <a:sym typeface="Open Sans"/>
+              </a:rPr>
+              <a:t>A proposta do projeto é um sistema que otimiza a gestão e o acompanhamento dos pacientes, substituindo o controle manual por uma solução digital estruturada[1]. Para isso, pensamos em uma solução capaz de centralizar as informações e melhorar a organização dos atendimentos.</a:t>
+            </a:r>
+            <a:endParaRPr sz="3430">
+              <a:latin typeface="Open Sans"/>
+              <a:ea typeface="Open Sans"/>
+              <a:cs typeface="Open Sans"/>
+              <a:sym typeface="Open Sans"/>
+            </a:endParaRPr>
+          </a:p>
+          <a:p>
+            <a:pPr indent="0" lvl="0" marL="0" rtl="0" algn="just">
+              <a:lnSpc>
+                <a:spcPct val="140000"/>
+              </a:lnSpc>
+              <a:spcBef>
+                <a:spcPts val="0"/>
+              </a:spcBef>
+              <a:spcAft>
+                <a:spcPts val="0"/>
+              </a:spcAft>
+              <a:buClr>
+                <a:schemeClr val="dk1"/>
+              </a:buClr>
+              <a:buSzPts val="1100"/>
+              <a:buFont typeface="Arial"/>
+              <a:buNone/>
+            </a:pPr>
+            <a:r>
+              <a:rPr lang="en-US" sz="3430">
+                <a:latin typeface="Open Sans"/>
+                <a:ea typeface="Open Sans"/>
+                <a:cs typeface="Open Sans"/>
+                <a:sym typeface="Open Sans"/>
+              </a:rPr>
+              <a:t>O sistema permite o gerenciamento dos dados clínicos, controle de sessões e agendamento com lembretes automatizados, reduzindo esquecimentos de consultas, além de possibilitar a geração de relatórios para acompanhamento do progresso[2].</a:t>
+            </a:r>
+            <a:endParaRPr sz="3430">
+              <a:latin typeface="Open Sans"/>
+              <a:ea typeface="Open Sans"/>
+              <a:cs typeface="Open Sans"/>
+              <a:sym typeface="Open Sans"/>
+            </a:endParaRPr>
+          </a:p>
+          <a:p>
+            <a:pPr indent="0" lvl="0" marL="0" rtl="0" algn="just">
+              <a:lnSpc>
+                <a:spcPct val="140000"/>
+              </a:lnSpc>
+              <a:spcBef>
+                <a:spcPts val="0"/>
+              </a:spcBef>
+              <a:spcAft>
+                <a:spcPts val="0"/>
+              </a:spcAft>
+              <a:buClr>
+                <a:schemeClr val="dk1"/>
+              </a:buClr>
+              <a:buSzPts val="1100"/>
+              <a:buFont typeface="Arial"/>
+              <a:buNone/>
+            </a:pPr>
+            <a:r>
+              <a:rPr lang="en-US" sz="3430">
+                <a:latin typeface="Open Sans"/>
+                <a:ea typeface="Open Sans"/>
+                <a:cs typeface="Open Sans"/>
+                <a:sym typeface="Open Sans"/>
+              </a:rPr>
+              <a:t>Também inclui funcionalidades como desafios e metas, contribuindo para o incentivo dos pacientes à realização dos exercícios.</a:t>
+            </a:r>
+            <a:endParaRPr sz="3430">
+              <a:latin typeface="Open Sans"/>
+              <a:ea typeface="Open Sans"/>
+              <a:cs typeface="Open Sans"/>
+              <a:sym typeface="Open Sans"/>
+            </a:endParaRPr>
+          </a:p>
+        </p:txBody>
+      </p:sp>
+      <p:sp>
+        <p:nvSpPr>
+          <p:cNvPr id="137" name="Google Shape;137;p1"/>
+          <p:cNvSpPr txBox="1"/>
+          <p:nvPr/>
+        </p:nvSpPr>
+        <p:spPr>
+          <a:xfrm>
+            <a:off x="136933" y="39681833"/>
+            <a:ext cx="28242600" cy="1830600"/>
           </a:xfrm>
           <a:prstGeom prst="rect">
             <a:avLst/>
@@ -17660,14 +17762,14 @@
       </p:sp>
       <p:sp>
         <p:nvSpPr>
-          <p:cNvPr id="137" name="Google Shape;137;p1"/>
+          <p:cNvPr id="138" name="Google Shape;138;p1"/>
           <p:cNvSpPr txBox="1"/>
           <p:nvPr/>
         </p:nvSpPr>
         <p:spPr>
           <a:xfrm>
-            <a:off x="15617586" y="10880473"/>
-            <a:ext cx="11904000" cy="8882700"/>
+            <a:off x="15598525" y="10986015"/>
+            <a:ext cx="11904300" cy="7919400"/>
           </a:xfrm>
           <a:prstGeom prst="rect">
             <a:avLst/>
@@ -17683,12 +17785,12 @@
           </a:bodyPr>
           <a:lstStyle/>
           <a:p>
-            <a:pPr indent="0" lvl="0" marL="0" marR="0" rtl="0" algn="l">
-              <a:lnSpc>
-                <a:spcPct val="115000"/>
-              </a:lnSpc>
-              <a:spcBef>
-                <a:spcPts val="1200"/>
+            <a:pPr indent="0" lvl="0" marL="0" rtl="0" algn="just">
+              <a:lnSpc>
+                <a:spcPct val="140000"/>
+              </a:lnSpc>
+              <a:spcBef>
+                <a:spcPts val="0"/>
               </a:spcBef>
               <a:spcAft>
                 <a:spcPts val="0"/>
@@ -17707,7 +17809,7 @@
                 <a:cs typeface="Open Sans"/>
                 <a:sym typeface="Open Sans"/>
               </a:rPr>
-              <a:t>A implementação do aplicativo trouxe melhorias significativas para a clínica RPG Maya, principalmente na organização e no controle das informações dos pacientes. O processo manual foi substituído por um sistema digital, reduzindo erros e facilitando o acesso aos dados.</a:t>
+              <a:t>Com base na proposta, foi desenvolvido um sistema funcional que digitaliza e centraliza a gestão da clínica, substituindo processos manuais por uma solução estruturada[1]. O aplicativo contempla funcionalidades como agendamento de sessões, geração de relatórios, definição de metas, gerenciamento de pacientes, envio de alertas e suporte via chat com IA.</a:t>
             </a:r>
             <a:endParaRPr sz="3430">
               <a:latin typeface="Open Sans"/>
@@ -17717,40 +17819,12 @@
             </a:endParaRPr>
           </a:p>
           <a:p>
-            <a:pPr indent="0" lvl="0" marL="0" marR="0" rtl="0" algn="l">
-              <a:lnSpc>
-                <a:spcPct val="115000"/>
-              </a:lnSpc>
-              <a:spcBef>
-                <a:spcPts val="1200"/>
-              </a:spcBef>
-              <a:spcAft>
-                <a:spcPts val="0"/>
-              </a:spcAft>
-              <a:buClr>
-                <a:schemeClr val="dk1"/>
-              </a:buClr>
-              <a:buSzPts val="1100"/>
-              <a:buFont typeface="Arial"/>
-              <a:buNone/>
-            </a:pPr>
-            <a:r>
-              <a:t/>
-            </a:r>
-            <a:endParaRPr sz="3430">
-              <a:latin typeface="Open Sans"/>
-              <a:ea typeface="Open Sans"/>
-              <a:cs typeface="Open Sans"/>
-              <a:sym typeface="Open Sans"/>
-            </a:endParaRPr>
-          </a:p>
-          <a:p>
-            <a:pPr indent="0" lvl="0" marL="0" marR="0" rtl="0" algn="l">
-              <a:lnSpc>
-                <a:spcPct val="115000"/>
-              </a:lnSpc>
-              <a:spcBef>
-                <a:spcPts val="1200"/>
+            <a:pPr indent="0" lvl="0" marL="0" rtl="0" algn="l">
+              <a:lnSpc>
+                <a:spcPct val="140000"/>
+              </a:lnSpc>
+              <a:spcBef>
+                <a:spcPts val="0"/>
               </a:spcBef>
               <a:spcAft>
                 <a:spcPts val="0"/>
@@ -17764,40 +17838,15 @@
             </a:pPr>
             <a:r>
               <a:rPr lang="en-US" sz="3430">
+                <a:solidFill>
+                  <a:schemeClr val="dk1"/>
+                </a:solidFill>
                 <a:latin typeface="Open Sans"/>
                 <a:ea typeface="Open Sans"/>
                 <a:cs typeface="Open Sans"/>
                 <a:sym typeface="Open Sans"/>
               </a:rPr>
-              <a:t>Além disso, a funcionalidade de agendamento com lembretes contribuiu para a redução de faltas, auxiliando os pacientes a não esquecerem consultas e retornos. O sistema também possibilitou a geração de relatórios, permitindo um acompanhamento mais eficiente do progresso dos pacientes e apoiando a tomada de decisões da profissional.</a:t>
-            </a:r>
-            <a:endParaRPr sz="3430">
-              <a:latin typeface="Open Sans"/>
-              <a:ea typeface="Open Sans"/>
-              <a:cs typeface="Open Sans"/>
-              <a:sym typeface="Open Sans"/>
-            </a:endParaRPr>
-          </a:p>
-          <a:p>
-            <a:pPr indent="0" lvl="0" marL="0" marR="0" rtl="0" algn="just">
-              <a:lnSpc>
-                <a:spcPct val="140000"/>
-              </a:lnSpc>
-              <a:spcBef>
-                <a:spcPts val="1200"/>
-              </a:spcBef>
-              <a:spcAft>
-                <a:spcPts val="0"/>
-              </a:spcAft>
-              <a:buClr>
-                <a:srgbClr val="000000"/>
-              </a:buClr>
-              <a:buSzPts val="3430"/>
-              <a:buFont typeface="Arial"/>
-              <a:buNone/>
-            </a:pPr>
-            <a:r>
-              <a:t/>
+              <a:t>Esses recursos têm potencial para melhorar a organização das informações, reduzir falhas operacionais e otimizar o acompanhamento dos pacientes, contribuindo para maior eficiência nos processos clínicos[2].</a:t>
             </a:r>
             <a:endParaRPr sz="3430">
               <a:latin typeface="Open Sans"/>
@@ -17808,145 +17857,23 @@
           </a:p>
         </p:txBody>
       </p:sp>
-      <p:sp>
-        <p:nvSpPr>
-          <p:cNvPr id="138" name="Google Shape;138;p1"/>
-          <p:cNvSpPr txBox="1"/>
-          <p:nvPr/>
-        </p:nvSpPr>
-        <p:spPr>
-          <a:xfrm>
-            <a:off x="10637368" y="34007558"/>
-            <a:ext cx="2933700" cy="2265000"/>
-          </a:xfrm>
-          <a:prstGeom prst="rect">
-            <a:avLst/>
-          </a:prstGeom>
-          <a:noFill/>
-          <a:ln>
-            <a:noFill/>
-          </a:ln>
-        </p:spPr>
-        <p:txBody>
-          <a:bodyPr anchorCtr="0" anchor="t" bIns="91425" lIns="91425" spcFirstLastPara="1" rIns="91425" wrap="square" tIns="91425">
-            <a:noAutofit/>
-          </a:bodyPr>
-          <a:lstStyle/>
-          <a:p>
-            <a:pPr indent="0" lvl="0" marL="0" rtl="0" algn="l">
-              <a:spcBef>
-                <a:spcPts val="0"/>
-              </a:spcBef>
-              <a:spcAft>
-                <a:spcPts val="0"/>
-              </a:spcAft>
-              <a:buNone/>
-            </a:pPr>
-            <a:r>
-              <a:t/>
-            </a:r>
-            <a:endParaRPr sz="6098">
-              <a:solidFill>
-                <a:schemeClr val="dk1"/>
-              </a:solidFill>
-              <a:latin typeface="Calibri"/>
-              <a:ea typeface="Calibri"/>
-              <a:cs typeface="Calibri"/>
-              <a:sym typeface="Calibri"/>
-            </a:endParaRPr>
-          </a:p>
-        </p:txBody>
-      </p:sp>
-      <p:sp>
-        <p:nvSpPr>
-          <p:cNvPr id="139" name="Google Shape;139;p1"/>
-          <p:cNvSpPr txBox="1"/>
-          <p:nvPr/>
-        </p:nvSpPr>
-        <p:spPr>
-          <a:xfrm>
-            <a:off x="5986612" y="34007558"/>
-            <a:ext cx="3222600" cy="3877200"/>
-          </a:xfrm>
-          <a:prstGeom prst="rect">
-            <a:avLst/>
-          </a:prstGeom>
-          <a:noFill/>
-          <a:ln>
-            <a:noFill/>
-          </a:ln>
-        </p:spPr>
-        <p:txBody>
-          <a:bodyPr anchorCtr="0" anchor="t" bIns="91425" lIns="91425" spcFirstLastPara="1" rIns="91425" wrap="square" tIns="91425">
-            <a:noAutofit/>
-          </a:bodyPr>
-          <a:lstStyle/>
-          <a:p>
-            <a:pPr indent="0" lvl="0" marL="0" rtl="0" algn="l">
-              <a:lnSpc>
-                <a:spcPct val="115000"/>
-              </a:lnSpc>
-              <a:spcBef>
-                <a:spcPts val="1200"/>
-              </a:spcBef>
-              <a:spcAft>
-                <a:spcPts val="0"/>
-              </a:spcAft>
-              <a:buClr>
-                <a:schemeClr val="dk1"/>
-              </a:buClr>
-              <a:buSzPts val="1100"/>
-              <a:buFont typeface="Arial"/>
-              <a:buNone/>
-            </a:pPr>
-            <a:r>
-              <a:t/>
-            </a:r>
-            <a:endParaRPr sz="1100">
-              <a:solidFill>
-                <a:schemeClr val="dk1"/>
-              </a:solidFill>
-            </a:endParaRPr>
-          </a:p>
-          <a:p>
-            <a:pPr indent="0" lvl="0" marL="0" rtl="0" algn="l">
-              <a:spcBef>
-                <a:spcPts val="1200"/>
-              </a:spcBef>
-              <a:spcAft>
-                <a:spcPts val="0"/>
-              </a:spcAft>
-              <a:buNone/>
-            </a:pPr>
-            <a:r>
-              <a:t/>
-            </a:r>
-            <a:endParaRPr b="1" sz="1100">
-              <a:solidFill>
-                <a:schemeClr val="dk1"/>
-              </a:solidFill>
-            </a:endParaRPr>
-          </a:p>
-        </p:txBody>
-      </p:sp>
       <p:pic>
         <p:nvPicPr>
-          <p:cNvPr id="140" name="Google Shape;140;p1" title="Screenshot_20260430_200353_SmartSaude.jpg"/>
+          <p:cNvPr id="139" name="Google Shape;139;p1" title="Screenshot_20260430_200008_SmartSaude.jpg"/>
           <p:cNvPicPr preferRelativeResize="0"/>
           <p:nvPr/>
         </p:nvPicPr>
-        <p:blipFill>
-          <a:blip r:embed="rId10">
+        <p:blipFill rotWithShape="1">
+          <a:blip r:embed="rId7">
             <a:alphaModFix/>
           </a:blip>
-          <a:stretch>
-            <a:fillRect/>
-          </a:stretch>
+          <a:srcRect b="37336" l="0" r="0" t="0"/>
+          <a:stretch/>
         </p:blipFill>
         <p:spPr>
           <a:xfrm>
-            <a:off x="21763979" y="19624616"/>
-            <a:ext cx="4168040" cy="8882565"/>
+            <a:off x="15413175" y="20810213"/>
+            <a:ext cx="5801425" cy="7296225"/>
           </a:xfrm>
           <a:prstGeom prst="rect">
             <a:avLst/>
@@ -17959,22 +17886,21 @@
       </p:pic>
       <p:pic>
         <p:nvPicPr>
-          <p:cNvPr id="141" name="Google Shape;141;p1" title="Screenshot_20260430_200008_SmartSaude.jpg"/>
+          <p:cNvPr id="140" name="Google Shape;140;p1" title="WhatsApp Image 2026-05-04 at 17.57.19 (2).jpeg"/>
           <p:cNvPicPr preferRelativeResize="0"/>
           <p:nvPr/>
         </p:nvPicPr>
-        <p:blipFill>
-          <a:blip r:embed="rId11">
+        <p:blipFill rotWithShape="1">
+          <a:blip r:embed="rId8">
             <a:alphaModFix/>
           </a:blip>
-          <a:stretch>
-            <a:fillRect/>
-          </a:stretch>
+          <a:srcRect b="54479" l="0" r="0" t="0"/>
+          <a:stretch/>
         </p:blipFill>
         <p:spPr>
           <a:xfrm>
-            <a:off x="16608105" y="19572042"/>
-            <a:ext cx="4168038" cy="8910356"/>
+            <a:off x="21310034" y="20813273"/>
+            <a:ext cx="6385776" cy="7180201"/>
           </a:xfrm>
           <a:prstGeom prst="rect">
             <a:avLst/>
@@ -17987,14 +17913,14 @@
       </p:pic>
       <p:sp>
         <p:nvSpPr>
-          <p:cNvPr id="142" name="Google Shape;142;p1"/>
+          <p:cNvPr id="141" name="Google Shape;141;p1"/>
           <p:cNvSpPr txBox="1"/>
           <p:nvPr/>
         </p:nvSpPr>
         <p:spPr>
           <a:xfrm>
-            <a:off x="21764079" y="28850908"/>
-            <a:ext cx="4168200" cy="528000"/>
+            <a:off x="18396233" y="28578304"/>
+            <a:ext cx="12433200" cy="528000"/>
           </a:xfrm>
           <a:prstGeom prst="rect">
             <a:avLst/>
@@ -18028,13 +17954,37 @@
               <a:buNone/>
             </a:pPr>
             <a:r>
+              <a:rPr b="0" i="0" lang="en-US" sz="3430" u="none" cap="none" strike="noStrike">
+                <a:solidFill>
+                  <a:srgbClr val="000000"/>
+                </a:solidFill>
+                <a:latin typeface="Inter"/>
+                <a:ea typeface="Inter"/>
+                <a:cs typeface="Inter"/>
+                <a:sym typeface="Inter"/>
+              </a:rPr>
+              <a:t>Fonte: Autoria Própria (202</a:t>
+            </a:r>
+            <a:r>
               <a:rPr lang="en-US" sz="3430">
                 <a:latin typeface="Inter"/>
                 <a:ea typeface="Inter"/>
                 <a:cs typeface="Inter"/>
                 <a:sym typeface="Inter"/>
               </a:rPr>
-              <a:t>Tela de agenda</a:t>
+              <a:t>6</a:t>
+            </a:r>
+            <a:r>
+              <a:rPr b="0" i="0" lang="en-US" sz="3430" u="none" cap="none" strike="noStrike">
+                <a:solidFill>
+                  <a:srgbClr val="000000"/>
+                </a:solidFill>
+                <a:latin typeface="Inter"/>
+                <a:ea typeface="Inter"/>
+                <a:cs typeface="Inter"/>
+                <a:sym typeface="Inter"/>
+              </a:rPr>
+              <a:t>)</a:t>
             </a:r>
             <a:endParaRPr b="0" i="0" sz="1400" u="none" cap="none" strike="noStrike">
               <a:solidFill>
@@ -18050,14 +18000,14 @@
       </p:sp>
       <p:sp>
         <p:nvSpPr>
-          <p:cNvPr id="143" name="Google Shape;143;p1"/>
+          <p:cNvPr id="142" name="Google Shape;142;p1"/>
           <p:cNvSpPr txBox="1"/>
           <p:nvPr/>
         </p:nvSpPr>
         <p:spPr>
           <a:xfrm>
-            <a:off x="3809700" y="33813300"/>
-            <a:ext cx="4168200" cy="2785800"/>
+            <a:off x="18411906" y="19246544"/>
+            <a:ext cx="12433200" cy="1594500"/>
           </a:xfrm>
           <a:prstGeom prst="rect">
             <a:avLst/>
@@ -18068,369 +18018,113 @@
           </a:ln>
         </p:spPr>
         <p:txBody>
-          <a:bodyPr anchorCtr="0" anchor="t" bIns="91425" lIns="91425" spcFirstLastPara="1" rIns="91425" wrap="square" tIns="91425">
-            <a:noAutofit/>
+          <a:bodyPr anchorCtr="0" anchor="t" bIns="0" lIns="0" spcFirstLastPara="1" rIns="0" wrap="square" tIns="0">
+            <a:spAutoFit/>
           </a:bodyPr>
           <a:lstStyle/>
           <a:p>
-            <a:pPr indent="0" lvl="0" marL="0" marR="0" rtl="0" algn="l">
-              <a:lnSpc>
-                <a:spcPct val="140000"/>
-              </a:lnSpc>
-              <a:spcBef>
-                <a:spcPts val="0"/>
-              </a:spcBef>
-              <a:spcAft>
-                <a:spcPts val="0"/>
-              </a:spcAft>
+            <a:pPr indent="0" lvl="0" marL="0" marR="0" rtl="0" algn="ctr">
+              <a:lnSpc>
+                <a:spcPct val="101020"/>
+              </a:lnSpc>
+              <a:spcBef>
+                <a:spcPts val="0"/>
+              </a:spcBef>
+              <a:spcAft>
+                <a:spcPts val="0"/>
+              </a:spcAft>
+              <a:buClr>
+                <a:srgbClr val="000000"/>
+              </a:buClr>
+              <a:buSzPts val="3430"/>
+              <a:buFont typeface="Arial"/>
               <a:buNone/>
             </a:pPr>
             <a:r>
-              <a:rPr b="1" lang="en-US" sz="3430">
-                <a:latin typeface="Open Sans"/>
-                <a:ea typeface="Open Sans"/>
-                <a:cs typeface="Open Sans"/>
-                <a:sym typeface="Open Sans"/>
+              <a:rPr lang="en-US" sz="3430">
+                <a:latin typeface="Inter"/>
+                <a:ea typeface="Inter"/>
+                <a:cs typeface="Inter"/>
+                <a:sym typeface="Inter"/>
               </a:rPr>
-              <a:t>Frontend:</a:t>
+              <a:t>Tela de Meus</a:t>
             </a:r>
-            <a:endParaRPr b="1" sz="3430">
-              <a:latin typeface="Open Sans"/>
-              <a:ea typeface="Open Sans"/>
-              <a:cs typeface="Open Sans"/>
-              <a:sym typeface="Open Sans"/>
+            <a:endParaRPr sz="3430">
+              <a:latin typeface="Inter"/>
+              <a:ea typeface="Inter"/>
+              <a:cs typeface="Inter"/>
+              <a:sym typeface="Inter"/>
             </a:endParaRPr>
           </a:p>
           <a:p>
-            <a:pPr indent="-446398" lvl="1" marL="914386" marR="0" rtl="0" algn="l">
-              <a:lnSpc>
-                <a:spcPct val="140000"/>
-              </a:lnSpc>
-              <a:spcBef>
-                <a:spcPts val="0"/>
-              </a:spcBef>
-              <a:spcAft>
-                <a:spcPts val="0"/>
-              </a:spcAft>
+            <a:pPr indent="0" lvl="0" marL="0" marR="0" rtl="0" algn="ctr">
+              <a:lnSpc>
+                <a:spcPct val="101020"/>
+              </a:lnSpc>
+              <a:spcBef>
+                <a:spcPts val="0"/>
+              </a:spcBef>
+              <a:spcAft>
+                <a:spcPts val="0"/>
+              </a:spcAft>
+              <a:buClr>
+                <a:srgbClr val="000000"/>
+              </a:buClr>
               <a:buSzPts val="3430"/>
-              <a:buFont typeface="Open Sans"/>
-              <a:buChar char="•"/>
+              <a:buFont typeface="Arial"/>
+              <a:buNone/>
             </a:pPr>
             <a:r>
               <a:rPr lang="en-US" sz="3430">
-                <a:latin typeface="Open Sans"/>
-                <a:ea typeface="Open Sans"/>
-                <a:cs typeface="Open Sans"/>
-                <a:sym typeface="Open Sans"/>
+                <a:latin typeface="Inter"/>
+                <a:ea typeface="Inter"/>
+                <a:cs typeface="Inter"/>
+                <a:sym typeface="Inter"/>
               </a:rPr>
-              <a:t>Java</a:t>
+              <a:t> pacientes</a:t>
             </a:r>
             <a:endParaRPr sz="3430">
-              <a:latin typeface="Open Sans"/>
-              <a:ea typeface="Open Sans"/>
-              <a:cs typeface="Open Sans"/>
-              <a:sym typeface="Open Sans"/>
+              <a:latin typeface="Inter"/>
+              <a:ea typeface="Inter"/>
+              <a:cs typeface="Inter"/>
+              <a:sym typeface="Inter"/>
             </a:endParaRPr>
           </a:p>
           <a:p>
-            <a:pPr indent="-446398" lvl="1" marL="914386" marR="0" rtl="0" algn="l">
-              <a:lnSpc>
-                <a:spcPct val="140000"/>
-              </a:lnSpc>
-              <a:spcBef>
-                <a:spcPts val="0"/>
-              </a:spcBef>
-              <a:spcAft>
-                <a:spcPts val="0"/>
-              </a:spcAft>
+            <a:pPr indent="0" lvl="0" marL="0" marR="0" rtl="0" algn="ctr">
+              <a:lnSpc>
+                <a:spcPct val="101020"/>
+              </a:lnSpc>
+              <a:spcBef>
+                <a:spcPts val="0"/>
+              </a:spcBef>
+              <a:spcAft>
+                <a:spcPts val="0"/>
+              </a:spcAft>
+              <a:buClr>
+                <a:srgbClr val="000000"/>
+              </a:buClr>
               <a:buSzPts val="3430"/>
-              <a:buFont typeface="Open Sans"/>
-              <a:buChar char="•"/>
+              <a:buFont typeface="Arial"/>
+              <a:buNone/>
             </a:pPr>
             <a:r>
               <a:rPr lang="en-US" sz="3430">
-                <a:latin typeface="Open Sans"/>
-                <a:ea typeface="Open Sans"/>
-                <a:cs typeface="Open Sans"/>
-                <a:sym typeface="Open Sans"/>
+                <a:latin typeface="Inter"/>
+                <a:ea typeface="Inter"/>
+                <a:cs typeface="Inter"/>
+                <a:sym typeface="Inter"/>
               </a:rPr>
-              <a:t>Android Studio</a:t>
+              <a:t>(Tela profissional)</a:t>
             </a:r>
-            <a:endParaRPr sz="3430">
-              <a:latin typeface="Open Sans"/>
-              <a:ea typeface="Open Sans"/>
-              <a:cs typeface="Open Sans"/>
-              <a:sym typeface="Open Sans"/>
-            </a:endParaRPr>
-          </a:p>
-          <a:p>
-            <a:pPr indent="-446398" lvl="1" marL="914386" marR="0" rtl="0" algn="l">
-              <a:lnSpc>
-                <a:spcPct val="140000"/>
-              </a:lnSpc>
-              <a:spcBef>
-                <a:spcPts val="0"/>
-              </a:spcBef>
-              <a:spcAft>
-                <a:spcPts val="0"/>
-              </a:spcAft>
-              <a:buSzPts val="3430"/>
-              <a:buFont typeface="Open Sans"/>
-              <a:buChar char="•"/>
-            </a:pPr>
-            <a:r>
-              <a:rPr lang="en-US" sz="3430">
-                <a:latin typeface="Open Sans"/>
-                <a:ea typeface="Open Sans"/>
-                <a:cs typeface="Open Sans"/>
-                <a:sym typeface="Open Sans"/>
-              </a:rPr>
-              <a:t>Figma</a:t>
-            </a:r>
-            <a:endParaRPr sz="3430">
-              <a:latin typeface="Open Sans"/>
-              <a:ea typeface="Open Sans"/>
-              <a:cs typeface="Open Sans"/>
-              <a:sym typeface="Open Sans"/>
-            </a:endParaRPr>
-          </a:p>
-          <a:p>
-            <a:pPr indent="0" lvl="0" marL="0" rtl="0" algn="l">
-              <a:spcBef>
-                <a:spcPts val="0"/>
-              </a:spcBef>
-              <a:spcAft>
-                <a:spcPts val="0"/>
-              </a:spcAft>
-              <a:buNone/>
-            </a:pPr>
-            <a:r>
-              <a:t/>
-            </a:r>
-            <a:endParaRPr b="1" sz="3430">
-              <a:latin typeface="Open Sans"/>
-              <a:ea typeface="Open Sans"/>
-              <a:cs typeface="Open Sans"/>
-              <a:sym typeface="Open Sans"/>
-            </a:endParaRPr>
-          </a:p>
-        </p:txBody>
-      </p:sp>
-      <p:sp>
-        <p:nvSpPr>
-          <p:cNvPr id="144" name="Google Shape;144;p1"/>
-          <p:cNvSpPr txBox="1"/>
-          <p:nvPr/>
-        </p:nvSpPr>
-        <p:spPr>
-          <a:xfrm>
-            <a:off x="7977900" y="33813300"/>
-            <a:ext cx="3474600" cy="4265700"/>
-          </a:xfrm>
-          <a:prstGeom prst="rect">
-            <a:avLst/>
-          </a:prstGeom>
-          <a:noFill/>
-          <a:ln>
-            <a:noFill/>
-          </a:ln>
-        </p:spPr>
-        <p:txBody>
-          <a:bodyPr anchorCtr="0" anchor="t" bIns="91425" lIns="91425" spcFirstLastPara="1" rIns="91425" wrap="square" tIns="91425">
-            <a:noAutofit/>
-          </a:bodyPr>
-          <a:lstStyle/>
-          <a:p>
-            <a:pPr indent="0" lvl="0" marL="0" marR="0" rtl="0" algn="l">
-              <a:lnSpc>
-                <a:spcPct val="140000"/>
-              </a:lnSpc>
-              <a:spcBef>
-                <a:spcPts val="0"/>
-              </a:spcBef>
-              <a:spcAft>
-                <a:spcPts val="0"/>
-              </a:spcAft>
-              <a:buNone/>
-            </a:pPr>
-            <a:r>
-              <a:rPr b="1" lang="en-US" sz="3430">
-                <a:latin typeface="Open Sans"/>
-                <a:ea typeface="Open Sans"/>
-                <a:cs typeface="Open Sans"/>
-                <a:sym typeface="Open Sans"/>
-              </a:rPr>
-              <a:t>Backend</a:t>
-            </a:r>
-            <a:r>
-              <a:rPr b="1" lang="en-US" sz="3430">
-                <a:latin typeface="Open Sans"/>
-                <a:ea typeface="Open Sans"/>
-                <a:cs typeface="Open Sans"/>
-                <a:sym typeface="Open Sans"/>
-              </a:rPr>
-              <a:t>:</a:t>
-            </a:r>
-            <a:endParaRPr b="1" sz="3430">
-              <a:latin typeface="Open Sans"/>
-              <a:ea typeface="Open Sans"/>
-              <a:cs typeface="Open Sans"/>
-              <a:sym typeface="Open Sans"/>
-            </a:endParaRPr>
-          </a:p>
-          <a:p>
-            <a:pPr indent="-446398" lvl="1" marL="914386" marR="0" rtl="0" algn="l">
-              <a:lnSpc>
-                <a:spcPct val="140000"/>
-              </a:lnSpc>
-              <a:spcBef>
-                <a:spcPts val="0"/>
-              </a:spcBef>
-              <a:spcAft>
-                <a:spcPts val="0"/>
-              </a:spcAft>
-              <a:buSzPts val="3430"/>
-              <a:buFont typeface="Open Sans"/>
-              <a:buChar char="•"/>
-            </a:pPr>
-            <a:r>
-              <a:rPr lang="en-US" sz="3430">
-                <a:latin typeface="Open Sans"/>
-                <a:ea typeface="Open Sans"/>
-                <a:cs typeface="Open Sans"/>
-                <a:sym typeface="Open Sans"/>
-              </a:rPr>
-              <a:t>Render</a:t>
-            </a:r>
-            <a:endParaRPr sz="3430">
-              <a:latin typeface="Open Sans"/>
-              <a:ea typeface="Open Sans"/>
-              <a:cs typeface="Open Sans"/>
-              <a:sym typeface="Open Sans"/>
-            </a:endParaRPr>
-          </a:p>
-          <a:p>
-            <a:pPr indent="-446398" lvl="1" marL="914386" marR="0" rtl="0" algn="l">
-              <a:lnSpc>
-                <a:spcPct val="140000"/>
-              </a:lnSpc>
-              <a:spcBef>
-                <a:spcPts val="0"/>
-              </a:spcBef>
-              <a:spcAft>
-                <a:spcPts val="0"/>
-              </a:spcAft>
-              <a:buSzPts val="3430"/>
-              <a:buFont typeface="Open Sans"/>
-              <a:buChar char="•"/>
-            </a:pPr>
-            <a:r>
-              <a:rPr lang="en-US" sz="3430">
-                <a:latin typeface="Open Sans"/>
-                <a:ea typeface="Open Sans"/>
-                <a:cs typeface="Open Sans"/>
-                <a:sym typeface="Open Sans"/>
-              </a:rPr>
-              <a:t>Python</a:t>
-            </a:r>
-            <a:endParaRPr sz="3430">
-              <a:latin typeface="Open Sans"/>
-              <a:ea typeface="Open Sans"/>
-              <a:cs typeface="Open Sans"/>
-              <a:sym typeface="Open Sans"/>
-            </a:endParaRPr>
-          </a:p>
-          <a:p>
-            <a:pPr indent="-446398" lvl="1" marL="914386" marR="0" rtl="0" algn="l">
-              <a:lnSpc>
-                <a:spcPct val="140000"/>
-              </a:lnSpc>
-              <a:spcBef>
-                <a:spcPts val="0"/>
-              </a:spcBef>
-              <a:spcAft>
-                <a:spcPts val="0"/>
-              </a:spcAft>
-              <a:buSzPts val="3430"/>
-              <a:buFont typeface="Open Sans"/>
-              <a:buChar char="•"/>
-            </a:pPr>
-            <a:r>
-              <a:rPr lang="en-US" sz="3430">
-                <a:latin typeface="Open Sans"/>
-                <a:ea typeface="Open Sans"/>
-                <a:cs typeface="Open Sans"/>
-                <a:sym typeface="Open Sans"/>
-              </a:rPr>
-              <a:t>FastAPI</a:t>
-            </a:r>
-            <a:endParaRPr sz="3430">
-              <a:latin typeface="Open Sans"/>
-              <a:ea typeface="Open Sans"/>
-              <a:cs typeface="Open Sans"/>
-              <a:sym typeface="Open Sans"/>
-            </a:endParaRPr>
-          </a:p>
-          <a:p>
-            <a:pPr indent="-446398" lvl="1" marL="914386" marR="0" rtl="0" algn="l">
-              <a:lnSpc>
-                <a:spcPct val="140000"/>
-              </a:lnSpc>
-              <a:spcBef>
-                <a:spcPts val="0"/>
-              </a:spcBef>
-              <a:spcAft>
-                <a:spcPts val="0"/>
-              </a:spcAft>
-              <a:buSzPts val="3430"/>
-              <a:buFont typeface="Open Sans"/>
-              <a:buChar char="•"/>
-            </a:pPr>
-            <a:r>
-              <a:rPr lang="en-US" sz="3430">
-                <a:latin typeface="Open Sans"/>
-                <a:ea typeface="Open Sans"/>
-                <a:cs typeface="Open Sans"/>
-                <a:sym typeface="Open Sans"/>
-              </a:rPr>
-              <a:t>Docker</a:t>
-            </a:r>
-            <a:endParaRPr sz="3430">
-              <a:latin typeface="Open Sans"/>
-              <a:ea typeface="Open Sans"/>
-              <a:cs typeface="Open Sans"/>
-              <a:sym typeface="Open Sans"/>
-            </a:endParaRPr>
-          </a:p>
-          <a:p>
-            <a:pPr indent="-446398" lvl="1" marL="914386" marR="0" rtl="0" algn="l">
-              <a:lnSpc>
-                <a:spcPct val="140000"/>
-              </a:lnSpc>
-              <a:spcBef>
-                <a:spcPts val="0"/>
-              </a:spcBef>
-              <a:spcAft>
-                <a:spcPts val="0"/>
-              </a:spcAft>
-              <a:buSzPts val="3430"/>
-              <a:buFont typeface="Open Sans"/>
-              <a:buChar char="•"/>
-            </a:pPr>
-            <a:r>
-              <a:rPr lang="en-US" sz="3430">
-                <a:latin typeface="Open Sans"/>
-                <a:ea typeface="Open Sans"/>
-                <a:cs typeface="Open Sans"/>
-                <a:sym typeface="Open Sans"/>
-              </a:rPr>
-              <a:t>MySQL</a:t>
-            </a:r>
-            <a:endParaRPr sz="3430">
-              <a:latin typeface="Open Sans"/>
-              <a:ea typeface="Open Sans"/>
-              <a:cs typeface="Open Sans"/>
-              <a:sym typeface="Open Sans"/>
+            <a:endParaRPr b="0" i="0" sz="1400" u="none" cap="none" strike="noStrike">
+              <a:solidFill>
+                <a:srgbClr val="000000"/>
+              </a:solidFill>
+              <a:latin typeface="Arial"/>
+              <a:ea typeface="Arial"/>
+              <a:cs typeface="Arial"/>
+              <a:sym typeface="Arial"/>
             </a:endParaRPr>
           </a:p>
         </p:txBody>
